--- a/GEO_Audit_Brisbane_Zinia_Massage.pptx
+++ b/GEO_Audit_Brisbane_Zinia_Massage.pptx
@@ -4,6 +4,9 @@
   <p:sldMasterIdLst>
     <p:sldMasterId id="2147483648" r:id="rId1"/>
   </p:sldMasterIdLst>
+  <p:notesMasterIdLst>
+    <p:notesMasterId r:id="rId15"/>
+  </p:notesMasterIdLst>
   <p:sldIdLst>
     <p:sldId id="256" r:id="rId2"/>
     <p:sldId id="257" r:id="rId3"/>
@@ -19,10 +22,7 @@
     <p:sldId id="267" r:id="rId13"/>
     <p:sldId id="268" r:id="rId14"/>
   </p:sldIdLst>
-  <p:notesMasterIdLst>
-    <p:notesMasterId r:id="rId15"/>
-  </p:notesMasterIdLst>
-  <p:sldSz cx="9144000" cy="5143500"/>
+  <p:sldSz cx="9144000" cy="5143500" type="screen16x9"/>
   <p:notesSz cx="5143500" cy="9144000"/>
   <p:defaultTextStyle>
     <a:lvl1pPr marL="0" algn="l" defTabSz="914400" rtl="0" eaLnBrk="1" latinLnBrk="0" hangingPunct="1">
@@ -116,6 +116,11 @@
       </a:defRPr>
     </a:lvl9pPr>
   </p:defaultTextStyle>
+  <p:extLst>
+    <p:ext uri="{EFAFB233-063F-42B5-8137-9DF3F51BA10A}">
+      <p15:sldGuideLst xmlns:p15="http://schemas.microsoft.com/office/powerpoint/2012/main"/>
+    </p:ext>
+  </p:extLst>
 </p:presentation>
 </file>
 
@@ -141,234 +146,10 @@
           <a:chExt cx="0" cy="0"/>
         </a:xfrm>
       </p:grpSpPr>
-      <p:sp>
-        <p:nvSpPr>
-          <p:cNvPr id="2" name="Header Placeholder 1"/>
-          <p:cNvSpPr>
-            <a:spLocks noGrp="1"/>
-          </p:cNvSpPr>
-          <p:nvPr>
-            <p:ph type="hdr" sz="quarter"/>
-          </p:nvPr>
-        </p:nvSpPr>
-        <p:spPr>
-          <a:xfrm>
-            <a:off x="0" y="0"/>
-            <a:ext cx="2971800" cy="458788"/>
-          </a:xfrm>
-          <a:prstGeom prst="rect">
-            <a:avLst/>
-          </a:prstGeom>
-        </p:spPr>
-        <p:txBody>
-          <a:bodyPr vert="horz" lIns="91440" tIns="45720" rIns="91440" bIns="45720" rtlCol="0"/>
-          <a:lstStyle>
-            <a:lvl1pPr algn="l">
-              <a:defRPr sz="1200"/>
-            </a:lvl1pPr>
-          </a:lstStyle>
-          <a:p>
-            <a:endParaRPr lang="en-US"/>
-          </a:p>
-        </p:txBody>
-      </p:sp>
-      <p:sp>
-        <p:nvSpPr>
-          <p:cNvPr id="3" name="Date Placeholder 2"/>
-          <p:cNvSpPr>
-            <a:spLocks noGrp="1"/>
-          </p:cNvSpPr>
-          <p:nvPr>
-            <p:ph type="dt" idx="1"/>
-          </p:nvPr>
-        </p:nvSpPr>
-        <p:spPr>
-          <a:xfrm>
-            <a:off x="3884613" y="0"/>
-            <a:ext cx="2971800" cy="458788"/>
-          </a:xfrm>
-          <a:prstGeom prst="rect">
-            <a:avLst/>
-          </a:prstGeom>
-        </p:spPr>
-        <p:txBody>
-          <a:bodyPr vert="horz" lIns="91440" tIns="45720" rIns="91440" bIns="45720" rtlCol="0"/>
-          <a:lstStyle>
-            <a:lvl1pPr algn="r">
-              <a:defRPr sz="1200"/>
-            </a:lvl1pPr>
-          </a:lstStyle>
-          <a:p>
-            <a:fld id="{5282F153-3F37-0F45-9E97-73ACFA13230C}" type="datetimeFigureOut">
-              <a:rPr lang="en-US"/>
-              <a:t>7/23/19</a:t>
-            </a:fld>
-            <a:endParaRPr lang="en-US"/>
-          </a:p>
-        </p:txBody>
-      </p:sp>
-      <p:sp>
-        <p:nvSpPr>
-          <p:cNvPr id="4" name="Slide Image Placeholder 3"/>
-          <p:cNvSpPr>
-            <a:spLocks noGrp="1" noRot="1" noChangeAspect="1"/>
-          </p:cNvSpPr>
-          <p:nvPr>
-            <p:ph type="sldImg" idx="2"/>
-          </p:nvPr>
-        </p:nvSpPr>
-        <p:spPr>
-          <a:xfrm>
-            <a:off x="685800" y="1143000"/>
-            <a:ext cx="5486400" cy="3086100"/>
-          </a:xfrm>
-          <a:prstGeom prst="rect">
-            <a:avLst/>
-          </a:prstGeom>
-          <a:noFill/>
-          <a:ln w="12700">
-            <a:solidFill>
-              <a:prstClr val="black"/>
-            </a:solidFill>
-          </a:ln>
-        </p:spPr>
-        <p:txBody>
-          <a:bodyPr vert="horz" lIns="91440" tIns="45720" rIns="91440" bIns="45720" rtlCol="0" anchor="ctr"/>
-          <a:lstStyle/>
-          <a:p>
-            <a:endParaRPr lang="en-US"/>
-          </a:p>
-        </p:txBody>
-      </p:sp>
-      <p:sp>
-        <p:nvSpPr>
-          <p:cNvPr id="5" name="Notes Placeholder 4"/>
-          <p:cNvSpPr>
-            <a:spLocks noGrp="1"/>
-          </p:cNvSpPr>
-          <p:nvPr>
-            <p:ph type="body" sz="quarter" idx="3"/>
-          </p:nvPr>
-        </p:nvSpPr>
-        <p:spPr>
-          <a:xfrm>
-            <a:off x="685800" y="4400550"/>
-            <a:ext cx="5486400" cy="3600450"/>
-          </a:xfrm>
-          <a:prstGeom prst="rect">
-            <a:avLst/>
-          </a:prstGeom>
-        </p:spPr>
-        <p:txBody>
-          <a:bodyPr vert="horz" lIns="91440" tIns="45720" rIns="91440" bIns="45720" rtlCol="0"/>
-          <a:lstStyle/>
-          <a:p>
-            <a:pPr lvl="0"/>
-            <a:r>
-              <a:rPr lang="en-US"/>
-              <a:t>Click to edit Master text styles</a:t>
-            </a:r>
-          </a:p>
-          <a:p>
-            <a:pPr lvl="1"/>
-            <a:r>
-              <a:rPr lang="en-US"/>
-              <a:t>Second level</a:t>
-            </a:r>
-          </a:p>
-          <a:p>
-            <a:pPr lvl="2"/>
-            <a:r>
-              <a:rPr lang="en-US"/>
-              <a:t>Third level</a:t>
-            </a:r>
-          </a:p>
-          <a:p>
-            <a:pPr lvl="3"/>
-            <a:r>
-              <a:rPr lang="en-US"/>
-              <a:t>Fourth level</a:t>
-            </a:r>
-          </a:p>
-          <a:p>
-            <a:pPr lvl="4"/>
-            <a:r>
-              <a:rPr lang="en-US"/>
-              <a:t>Fifth level</a:t>
-            </a:r>
-          </a:p>
-        </p:txBody>
-      </p:sp>
-      <p:sp>
-        <p:nvSpPr>
-          <p:cNvPr id="6" name="Footer Placeholder 5"/>
-          <p:cNvSpPr>
-            <a:spLocks noGrp="1"/>
-          </p:cNvSpPr>
-          <p:nvPr>
-            <p:ph type="ftr" sz="quarter" idx="4"/>
-          </p:nvPr>
-        </p:nvSpPr>
-        <p:spPr>
-          <a:xfrm>
-            <a:off x="0" y="8685213"/>
-            <a:ext cx="2971800" cy="458787"/>
-          </a:xfrm>
-          <a:prstGeom prst="rect">
-            <a:avLst/>
-          </a:prstGeom>
-        </p:spPr>
-        <p:txBody>
-          <a:bodyPr vert="horz" lIns="91440" tIns="45720" rIns="91440" bIns="45720" rtlCol="0" anchor="b"/>
-          <a:lstStyle>
-            <a:lvl1pPr algn="l">
-              <a:defRPr sz="1200"/>
-            </a:lvl1pPr>
-          </a:lstStyle>
-          <a:p>
-            <a:endParaRPr lang="en-US"/>
-          </a:p>
-        </p:txBody>
-      </p:sp>
-      <p:sp>
-        <p:nvSpPr>
-          <p:cNvPr id="7" name="Slide Number Placeholder 6"/>
-          <p:cNvSpPr>
-            <a:spLocks noGrp="1"/>
-          </p:cNvSpPr>
-          <p:nvPr>
-            <p:ph type="sldNum" sz="quarter" idx="5"/>
-          </p:nvPr>
-        </p:nvSpPr>
-        <p:spPr>
-          <a:xfrm>
-            <a:off x="3884613" y="8685213"/>
-            <a:ext cx="2971800" cy="458787"/>
-          </a:xfrm>
-          <a:prstGeom prst="rect">
-            <a:avLst/>
-          </a:prstGeom>
-        </p:spPr>
-        <p:txBody>
-          <a:bodyPr vert="horz" lIns="91440" tIns="45720" rIns="91440" bIns="45720" rtlCol="0" anchor="b"/>
-          <a:lstStyle>
-            <a:lvl1pPr algn="r">
-              <a:defRPr sz="1200"/>
-            </a:lvl1pPr>
-          </a:lstStyle>
-          <a:p>
-            <a:fld id="{CE5E9CC1-C706-0F49-92D6-E571CC5EEA8F}" type="slidenum">
-              <a:rPr lang="en-US"/>
-              <a:t>‹#›</a:t>
-            </a:fld>
-            <a:endParaRPr lang="en-US"/>
-          </a:p>
-        </p:txBody>
-      </p:sp>
     </p:spTree>
     <p:extLst>
       <p:ext uri="{BB962C8B-B14F-4D97-AF65-F5344CB8AC3E}">
-        <p14:creationId xmlns:p14="http://schemas.microsoft.com/office/powerpoint/2010/main" val="1024086991"/>
+        <p14:creationId xmlns:p14="http://schemas.microsoft.com/office/powerpoint/2010/main" val="3449034099"/>
       </p:ext>
     </p:extLst>
   </p:cSld>
@@ -512,10 +293,6 @@
           <a:bodyPr/>
           <a:lstStyle/>
           <a:p>
-            <a:r>
-              <a:rPr lang="en-US" dirty="0"/>
-              <a:t/>
-            </a:r>
             <a:endParaRPr lang="en-US" dirty="0"/>
           </a:p>
         </p:txBody>
@@ -600,10 +377,6 @@
           <a:bodyPr/>
           <a:lstStyle/>
           <a:p>
-            <a:r>
-              <a:rPr lang="en-US" dirty="0"/>
-              <a:t/>
-            </a:r>
             <a:endParaRPr lang="en-US" dirty="0"/>
           </a:p>
         </p:txBody>
@@ -688,10 +461,6 @@
           <a:bodyPr/>
           <a:lstStyle/>
           <a:p>
-            <a:r>
-              <a:rPr lang="en-US" dirty="0"/>
-              <a:t/>
-            </a:r>
             <a:endParaRPr lang="en-US" dirty="0"/>
           </a:p>
         </p:txBody>
@@ -776,10 +545,6 @@
           <a:bodyPr/>
           <a:lstStyle/>
           <a:p>
-            <a:r>
-              <a:rPr lang="en-US" dirty="0"/>
-              <a:t/>
-            </a:r>
             <a:endParaRPr lang="en-US" dirty="0"/>
           </a:p>
         </p:txBody>
@@ -864,10 +629,6 @@
           <a:bodyPr/>
           <a:lstStyle/>
           <a:p>
-            <a:r>
-              <a:rPr lang="en-US" dirty="0"/>
-              <a:t/>
-            </a:r>
             <a:endParaRPr lang="en-US" dirty="0"/>
           </a:p>
         </p:txBody>
@@ -952,10 +713,6 @@
           <a:bodyPr/>
           <a:lstStyle/>
           <a:p>
-            <a:r>
-              <a:rPr lang="en-US" dirty="0"/>
-              <a:t/>
-            </a:r>
             <a:endParaRPr lang="en-US" dirty="0"/>
           </a:p>
         </p:txBody>
@@ -1040,10 +797,6 @@
           <a:bodyPr/>
           <a:lstStyle/>
           <a:p>
-            <a:r>
-              <a:rPr lang="en-US" dirty="0"/>
-              <a:t/>
-            </a:r>
             <a:endParaRPr lang="en-US" dirty="0"/>
           </a:p>
         </p:txBody>
@@ -1128,10 +881,6 @@
           <a:bodyPr/>
           <a:lstStyle/>
           <a:p>
-            <a:r>
-              <a:rPr lang="en-US" dirty="0"/>
-              <a:t/>
-            </a:r>
             <a:endParaRPr lang="en-US" dirty="0"/>
           </a:p>
         </p:txBody>
@@ -1216,10 +965,6 @@
           <a:bodyPr/>
           <a:lstStyle/>
           <a:p>
-            <a:r>
-              <a:rPr lang="en-US" dirty="0"/>
-              <a:t/>
-            </a:r>
             <a:endParaRPr lang="en-US" dirty="0"/>
           </a:p>
         </p:txBody>
@@ -1304,10 +1049,6 @@
           <a:bodyPr/>
           <a:lstStyle/>
           <a:p>
-            <a:r>
-              <a:rPr lang="en-US" dirty="0"/>
-              <a:t/>
-            </a:r>
             <a:endParaRPr lang="en-US" dirty="0"/>
           </a:p>
         </p:txBody>
@@ -1392,10 +1133,6 @@
           <a:bodyPr/>
           <a:lstStyle/>
           <a:p>
-            <a:r>
-              <a:rPr lang="en-US" dirty="0"/>
-              <a:t/>
-            </a:r>
             <a:endParaRPr lang="en-US" dirty="0"/>
           </a:p>
         </p:txBody>
@@ -1480,10 +1217,6 @@
           <a:bodyPr/>
           <a:lstStyle/>
           <a:p>
-            <a:r>
-              <a:rPr lang="en-US" dirty="0"/>
-              <a:t/>
-            </a:r>
             <a:endParaRPr lang="en-US" dirty="0"/>
           </a:p>
         </p:txBody>
@@ -1568,10 +1301,6 @@
           <a:bodyPr/>
           <a:lstStyle/>
           <a:p>
-            <a:r>
-              <a:rPr lang="en-US" dirty="0"/>
-              <a:t/>
-            </a:r>
             <a:endParaRPr lang="en-US" dirty="0"/>
           </a:p>
         </p:txBody>
@@ -1645,6 +1374,11 @@
 <file path=ppt/slideMasters/slideMaster1.xml><?xml version="1.0" encoding="utf-8"?>
 <p:sldMaster xmlns:a="http://schemas.openxmlformats.org/drawingml/2006/main" xmlns:r="http://schemas.openxmlformats.org/officeDocument/2006/relationships" xmlns:p="http://schemas.openxmlformats.org/presentationml/2006/main">
   <p:cSld>
+    <p:bg>
+      <p:bgRef idx="1001">
+        <a:schemeClr val="bg1"/>
+      </p:bgRef>
+    </p:bg>
     <p:spTree>
       <p:nvGrpSpPr>
         <p:cNvPr id="1" name=""/>
@@ -1927,6 +1661,7 @@
         <a:solidFill>
           <a:srgbClr val="0F2D40"/>
         </a:solidFill>
+        <a:effectLst/>
       </p:bgPr>
     </p:bg>
     <p:spTree>
@@ -1967,6 +1702,13 @@
             <a:prstDash val="solid"/>
           </a:ln>
         </p:spPr>
+        <p:txBody>
+          <a:bodyPr/>
+          <a:lstStyle/>
+          <a:p>
+            <a:endParaRPr lang="en-US"/>
+          </a:p>
+        </p:txBody>
       </p:sp>
       <p:sp>
         <p:nvSpPr>
@@ -1996,6 +1738,13 @@
             <a:prstDash val="solid"/>
           </a:ln>
         </p:spPr>
+        <p:txBody>
+          <a:bodyPr/>
+          <a:lstStyle/>
+          <a:p>
+            <a:endParaRPr lang="en-US"/>
+          </a:p>
+        </p:txBody>
       </p:sp>
       <p:sp>
         <p:nvSpPr>
@@ -2025,6 +1774,13 @@
             <a:prstDash val="solid"/>
           </a:ln>
         </p:spPr>
+        <p:txBody>
+          <a:bodyPr/>
+          <a:lstStyle/>
+          <a:p>
+            <a:endParaRPr lang="en-US"/>
+          </a:p>
+        </p:txBody>
       </p:sp>
       <p:sp>
         <p:nvSpPr>
@@ -2050,6 +1806,13 @@
             <a:prstDash val="solid"/>
           </a:ln>
         </p:spPr>
+        <p:txBody>
+          <a:bodyPr/>
+          <a:lstStyle/>
+          <a:p>
+            <a:endParaRPr lang="en-US"/>
+          </a:p>
+        </p:txBody>
       </p:sp>
       <p:sp>
         <p:nvSpPr>
@@ -2072,11 +1835,11 @@
           <a:bodyPr wrap="square" lIns="0" tIns="0" rIns="0" bIns="0" rtlCol="0" anchor="ctr"/>
           <a:lstStyle/>
           <a:p>
-            <a:pPr algn="ctr" indent="0" marL="0">
-              <a:buNone/>
-            </a:pPr>
-            <a:r>
-              <a:rPr lang="en-US" sz="850" b="1" spc="150" kern="0" dirty="0">
+            <a:pPr marL="0" indent="0" algn="ctr">
+              <a:buNone/>
+            </a:pPr>
+            <a:r>
+              <a:rPr lang="en-US" sz="850" b="1" kern="0" spc="150" dirty="0">
                 <a:solidFill>
                   <a:srgbClr val="FFFFFF"/>
                 </a:solidFill>
@@ -2108,7 +1871,7 @@
           <a:bodyPr wrap="square" lIns="0" tIns="0" rIns="0" bIns="0" rtlCol="0" anchor="ctr"/>
           <a:lstStyle/>
           <a:p>
-            <a:pPr indent="0" marL="0">
+            <a:pPr marL="0" indent="0">
               <a:buNone/>
             </a:pPr>
             <a:r>
@@ -2122,7 +1885,7 @@
             <a:endParaRPr lang="en-US" sz="5200" dirty="0"/>
           </a:p>
           <a:p>
-            <a:pPr indent="0" marL="0">
+            <a:pPr marL="0" indent="0">
               <a:buNone/>
             </a:pPr>
             <a:r>
@@ -2158,7 +1921,7 @@
           <a:bodyPr wrap="square" lIns="0" tIns="0" rIns="0" bIns="0" rtlCol="0" anchor="ctr"/>
           <a:lstStyle/>
           <a:p>
-            <a:pPr indent="0" marL="0">
+            <a:pPr marL="0" indent="0">
               <a:buNone/>
             </a:pPr>
             <a:r>
@@ -2195,6 +1958,13 @@
             <a:prstDash val="solid"/>
           </a:ln>
         </p:spPr>
+        <p:txBody>
+          <a:bodyPr/>
+          <a:lstStyle/>
+          <a:p>
+            <a:endParaRPr lang="en-US"/>
+          </a:p>
+        </p:txBody>
       </p:sp>
       <p:sp>
         <p:nvSpPr>
@@ -2217,7 +1987,7 @@
           <a:bodyPr wrap="square" lIns="0" tIns="0" rIns="0" bIns="0" rtlCol="0" anchor="ctr"/>
           <a:lstStyle/>
           <a:p>
-            <a:pPr indent="0" marL="0">
+            <a:pPr marL="0" indent="0">
               <a:buNone/>
             </a:pPr>
             <a:r>
@@ -2228,9 +1998,6 @@
               </a:rPr>
               <a:t>Audit Date: </a:t>
             </a:r>
-            <a:pPr indent="0" marL="0">
-              <a:buNone/>
-            </a:pPr>
             <a:r>
               <a:rPr lang="en-US" sz="1100" dirty="0">
                 <a:solidFill>
@@ -2239,9 +2006,6 @@
               </a:rPr>
               <a:t>18 May 2026    </a:t>
             </a:r>
-            <a:pPr indent="0" marL="0">
-              <a:buNone/>
-            </a:pPr>
             <a:r>
               <a:rPr lang="en-US" sz="1100" b="1" dirty="0">
                 <a:solidFill>
@@ -2250,9 +2014,6 @@
               </a:rPr>
               <a:t>URL: </a:t>
             </a:r>
-            <a:pPr indent="0" marL="0">
-              <a:buNone/>
-            </a:pPr>
             <a:r>
               <a:rPr lang="en-US" sz="1100" dirty="0">
                 <a:solidFill>
@@ -2261,9 +2022,6 @@
               </a:rPr>
               <a:t>brisbaneziniamassage.com    </a:t>
             </a:r>
-            <a:pPr indent="0" marL="0">
-              <a:buNone/>
-            </a:pPr>
             <a:r>
               <a:rPr lang="en-US" sz="1100" b="1" dirty="0">
                 <a:solidFill>
@@ -2272,9 +2030,6 @@
               </a:rPr>
               <a:t>Pages: </a:t>
             </a:r>
-            <a:pPr indent="0" marL="0">
-              <a:buNone/>
-            </a:pPr>
             <a:r>
               <a:rPr lang="en-US" sz="1100" dirty="0">
                 <a:solidFill>
@@ -2311,6 +2066,13 @@
             <a:prstDash val="solid"/>
           </a:ln>
         </p:spPr>
+        <p:txBody>
+          <a:bodyPr/>
+          <a:lstStyle/>
+          <a:p>
+            <a:endParaRPr lang="en-US"/>
+          </a:p>
+        </p:txBody>
       </p:sp>
       <p:sp>
         <p:nvSpPr>
@@ -2333,7 +2095,7 @@
           <a:bodyPr wrap="square" lIns="0" tIns="0" rIns="0" bIns="0" rtlCol="0" anchor="ctr"/>
           <a:lstStyle/>
           <a:p>
-            <a:pPr algn="ctr" indent="0" marL="0">
+            <a:pPr marL="0" indent="0" algn="ctr">
               <a:buNone/>
             </a:pPr>
             <a:r>
@@ -2369,7 +2131,7 @@
           <a:bodyPr wrap="square" lIns="0" tIns="0" rIns="0" bIns="0" rtlCol="0" anchor="ctr"/>
           <a:lstStyle/>
           <a:p>
-            <a:pPr algn="ctr" indent="0" marL="0">
+            <a:pPr marL="0" indent="0" algn="ctr">
               <a:buNone/>
             </a:pPr>
             <a:r>
@@ -2400,6 +2162,7 @@
         <a:solidFill>
           <a:srgbClr val="F0FDFA"/>
         </a:solidFill>
+        <a:effectLst/>
       </p:bgPr>
     </p:bg>
     <p:spTree>
@@ -2440,6 +2203,13 @@
             <a:prstDash val="solid"/>
           </a:ln>
         </p:spPr>
+        <p:txBody>
+          <a:bodyPr/>
+          <a:lstStyle/>
+          <a:p>
+            <a:endParaRPr lang="en-US"/>
+          </a:p>
+        </p:txBody>
       </p:sp>
       <p:sp>
         <p:nvSpPr>
@@ -2462,7 +2232,7 @@
           <a:bodyPr wrap="square" lIns="0" tIns="0" rIns="0" bIns="0" rtlCol="0" anchor="ctr"/>
           <a:lstStyle/>
           <a:p>
-            <a:pPr indent="0" marL="0">
+            <a:pPr marL="0" indent="0">
               <a:buNone/>
             </a:pPr>
             <a:r>
@@ -2501,6 +2271,13 @@
             <a:prstDash val="solid"/>
           </a:ln>
         </p:spPr>
+        <p:txBody>
+          <a:bodyPr/>
+          <a:lstStyle/>
+          <a:p>
+            <a:endParaRPr lang="en-US"/>
+          </a:p>
+        </p:txBody>
       </p:sp>
       <p:sp>
         <p:nvSpPr>
@@ -2523,7 +2300,7 @@
           <a:bodyPr wrap="square" lIns="0" tIns="0" rIns="0" bIns="0" rtlCol="0" anchor="ctr"/>
           <a:lstStyle/>
           <a:p>
-            <a:pPr algn="ctr" indent="0" marL="0">
+            <a:pPr marL="0" indent="0" algn="ctr">
               <a:buNone/>
             </a:pPr>
             <a:r>
@@ -2559,7 +2336,7 @@
           <a:bodyPr wrap="square" lIns="0" tIns="0" rIns="0" bIns="0" rtlCol="0" anchor="ctr"/>
           <a:lstStyle/>
           <a:p>
-            <a:pPr algn="ctr" indent="0" marL="0">
+            <a:pPr marL="0" indent="0" algn="ctr">
               <a:buNone/>
             </a:pPr>
             <a:r>
@@ -2595,7 +2372,7 @@
           <a:bodyPr wrap="square" lIns="0" tIns="0" rIns="0" bIns="0" rtlCol="0" anchor="ctr"/>
           <a:lstStyle/>
           <a:p>
-            <a:pPr indent="0" marL="0">
+            <a:pPr marL="0" indent="0">
               <a:buNone/>
             </a:pPr>
             <a:r>
@@ -2606,9 +2383,6 @@
               </a:rPr>
               <a:t>Zero structured data </a:t>
             </a:r>
-            <a:pPr indent="0" marL="0">
-              <a:buNone/>
-            </a:pPr>
             <a:r>
               <a:rPr lang="en-US" sz="950" dirty="0">
                 <a:solidFill>
@@ -2642,7 +2416,7 @@
           <a:bodyPr wrap="square" lIns="0" tIns="0" rIns="0" bIns="0" rtlCol="0" anchor="ctr"/>
           <a:lstStyle/>
           <a:p>
-            <a:pPr indent="0" marL="0">
+            <a:pPr marL="0" indent="0">
               <a:buNone/>
             </a:pPr>
             <a:r>
@@ -2681,6 +2455,13 @@
             <a:prstDash val="solid"/>
           </a:ln>
         </p:spPr>
+        <p:txBody>
+          <a:bodyPr/>
+          <a:lstStyle/>
+          <a:p>
+            <a:endParaRPr lang="en-US"/>
+          </a:p>
+        </p:txBody>
       </p:sp>
       <p:sp>
         <p:nvSpPr>
@@ -2703,7 +2484,7 @@
           <a:bodyPr wrap="square" lIns="0" tIns="0" rIns="0" bIns="0" rtlCol="0" anchor="ctr"/>
           <a:lstStyle/>
           <a:p>
-            <a:pPr indent="0" marL="0">
+            <a:pPr marL="0" indent="0">
               <a:buNone/>
             </a:pPr>
             <a:r>
@@ -2739,7 +2520,7 @@
           <a:bodyPr wrap="square" lIns="0" tIns="0" rIns="0" bIns="0" rtlCol="0" anchor="ctr"/>
           <a:lstStyle/>
           <a:p>
-            <a:pPr indent="0" marL="0">
+            <a:pPr marL="0" indent="0">
               <a:buNone/>
             </a:pPr>
             <a:r>
@@ -2775,7 +2556,7 @@
           <a:bodyPr wrap="square" lIns="0" tIns="0" rIns="0" bIns="0" rtlCol="0" anchor="ctr"/>
           <a:lstStyle/>
           <a:p>
-            <a:pPr indent="0" marL="0">
+            <a:pPr marL="0" indent="0">
               <a:buNone/>
             </a:pPr>
             <a:r>
@@ -2814,6 +2595,13 @@
             <a:prstDash val="solid"/>
           </a:ln>
         </p:spPr>
+        <p:txBody>
+          <a:bodyPr/>
+          <a:lstStyle/>
+          <a:p>
+            <a:endParaRPr lang="en-US"/>
+          </a:p>
+        </p:txBody>
       </p:sp>
       <p:sp>
         <p:nvSpPr>
@@ -2836,7 +2624,7 @@
           <a:bodyPr wrap="square" lIns="0" tIns="0" rIns="0" bIns="0" rtlCol="0" anchor="ctr"/>
           <a:lstStyle/>
           <a:p>
-            <a:pPr indent="0" marL="0">
+            <a:pPr marL="0" indent="0">
               <a:buNone/>
             </a:pPr>
             <a:r>
@@ -2875,6 +2663,13 @@
             <a:prstDash val="solid"/>
           </a:ln>
         </p:spPr>
+        <p:txBody>
+          <a:bodyPr/>
+          <a:lstStyle/>
+          <a:p>
+            <a:endParaRPr lang="en-US"/>
+          </a:p>
+        </p:txBody>
       </p:sp>
       <p:sp>
         <p:nvSpPr>
@@ -2897,7 +2692,7 @@
           <a:bodyPr wrap="square" lIns="0" tIns="0" rIns="0" bIns="0" rtlCol="0" anchor="ctr"/>
           <a:lstStyle/>
           <a:p>
-            <a:pPr algn="ctr" indent="0" marL="0">
+            <a:pPr marL="0" indent="0" algn="ctr">
               <a:buNone/>
             </a:pPr>
             <a:r>
@@ -2933,7 +2728,7 @@
           <a:bodyPr wrap="square" lIns="0" tIns="0" rIns="0" bIns="0" rtlCol="0" anchor="ctr"/>
           <a:lstStyle/>
           <a:p>
-            <a:pPr indent="0" marL="0">
+            <a:pPr marL="0" indent="0">
               <a:buNone/>
             </a:pPr>
             <a:r>
@@ -2972,6 +2767,13 @@
             <a:prstDash val="solid"/>
           </a:ln>
         </p:spPr>
+        <p:txBody>
+          <a:bodyPr/>
+          <a:lstStyle/>
+          <a:p>
+            <a:endParaRPr lang="en-US"/>
+          </a:p>
+        </p:txBody>
       </p:sp>
       <p:sp>
         <p:nvSpPr>
@@ -2994,7 +2796,7 @@
           <a:bodyPr wrap="square" lIns="0" tIns="0" rIns="0" bIns="0" rtlCol="0" anchor="ctr"/>
           <a:lstStyle/>
           <a:p>
-            <a:pPr indent="0" marL="0">
+            <a:pPr marL="0" indent="0">
               <a:buNone/>
             </a:pPr>
             <a:r>
@@ -3033,6 +2835,13 @@
             <a:prstDash val="solid"/>
           </a:ln>
         </p:spPr>
+        <p:txBody>
+          <a:bodyPr/>
+          <a:lstStyle/>
+          <a:p>
+            <a:endParaRPr lang="en-US"/>
+          </a:p>
+        </p:txBody>
       </p:sp>
       <p:sp>
         <p:nvSpPr>
@@ -3055,7 +2864,7 @@
           <a:bodyPr wrap="square" lIns="0" tIns="0" rIns="0" bIns="0" rtlCol="0" anchor="ctr"/>
           <a:lstStyle/>
           <a:p>
-            <a:pPr algn="ctr" indent="0" marL="0">
+            <a:pPr marL="0" indent="0" algn="ctr">
               <a:buNone/>
             </a:pPr>
             <a:r>
@@ -3091,7 +2900,7 @@
           <a:bodyPr wrap="square" lIns="0" tIns="0" rIns="0" bIns="0" rtlCol="0" anchor="ctr"/>
           <a:lstStyle/>
           <a:p>
-            <a:pPr indent="0" marL="0">
+            <a:pPr marL="0" indent="0">
               <a:buNone/>
             </a:pPr>
             <a:r>
@@ -3130,6 +2939,13 @@
             <a:prstDash val="solid"/>
           </a:ln>
         </p:spPr>
+        <p:txBody>
+          <a:bodyPr/>
+          <a:lstStyle/>
+          <a:p>
+            <a:endParaRPr lang="en-US"/>
+          </a:p>
+        </p:txBody>
       </p:sp>
       <p:sp>
         <p:nvSpPr>
@@ -3152,7 +2968,7 @@
           <a:bodyPr wrap="square" lIns="0" tIns="0" rIns="0" bIns="0" rtlCol="0" anchor="ctr"/>
           <a:lstStyle/>
           <a:p>
-            <a:pPr indent="0" marL="0">
+            <a:pPr marL="0" indent="0">
               <a:buNone/>
             </a:pPr>
             <a:r>
@@ -3191,6 +3007,13 @@
             <a:prstDash val="solid"/>
           </a:ln>
         </p:spPr>
+        <p:txBody>
+          <a:bodyPr/>
+          <a:lstStyle/>
+          <a:p>
+            <a:endParaRPr lang="en-US"/>
+          </a:p>
+        </p:txBody>
       </p:sp>
       <p:sp>
         <p:nvSpPr>
@@ -3213,7 +3036,7 @@
           <a:bodyPr wrap="square" lIns="0" tIns="0" rIns="0" bIns="0" rtlCol="0" anchor="ctr"/>
           <a:lstStyle/>
           <a:p>
-            <a:pPr algn="ctr" indent="0" marL="0">
+            <a:pPr marL="0" indent="0" algn="ctr">
               <a:buNone/>
             </a:pPr>
             <a:r>
@@ -3249,7 +3072,7 @@
           <a:bodyPr wrap="square" lIns="0" tIns="0" rIns="0" bIns="0" rtlCol="0" anchor="ctr"/>
           <a:lstStyle/>
           <a:p>
-            <a:pPr indent="0" marL="0">
+            <a:pPr marL="0" indent="0">
               <a:buNone/>
             </a:pPr>
             <a:r>
@@ -3288,6 +3111,13 @@
             <a:prstDash val="solid"/>
           </a:ln>
         </p:spPr>
+        <p:txBody>
+          <a:bodyPr/>
+          <a:lstStyle/>
+          <a:p>
+            <a:endParaRPr lang="en-US"/>
+          </a:p>
+        </p:txBody>
       </p:sp>
       <p:sp>
         <p:nvSpPr>
@@ -3310,7 +3140,7 @@
           <a:bodyPr wrap="square" lIns="0" tIns="0" rIns="0" bIns="0" rtlCol="0" anchor="ctr"/>
           <a:lstStyle/>
           <a:p>
-            <a:pPr indent="0" marL="0">
+            <a:pPr marL="0" indent="0">
               <a:buNone/>
             </a:pPr>
             <a:r>
@@ -3349,6 +3179,13 @@
             <a:prstDash val="solid"/>
           </a:ln>
         </p:spPr>
+        <p:txBody>
+          <a:bodyPr/>
+          <a:lstStyle/>
+          <a:p>
+            <a:endParaRPr lang="en-US"/>
+          </a:p>
+        </p:txBody>
       </p:sp>
       <p:sp>
         <p:nvSpPr>
@@ -3371,7 +3208,7 @@
           <a:bodyPr wrap="square" lIns="0" tIns="0" rIns="0" bIns="0" rtlCol="0" anchor="ctr"/>
           <a:lstStyle/>
           <a:p>
-            <a:pPr algn="ctr" indent="0" marL="0">
+            <a:pPr marL="0" indent="0" algn="ctr">
               <a:buNone/>
             </a:pPr>
             <a:r>
@@ -3407,7 +3244,7 @@
           <a:bodyPr wrap="square" lIns="0" tIns="0" rIns="0" bIns="0" rtlCol="0" anchor="ctr"/>
           <a:lstStyle/>
           <a:p>
-            <a:pPr indent="0" marL="0">
+            <a:pPr marL="0" indent="0">
               <a:buNone/>
             </a:pPr>
             <a:r>
@@ -3446,6 +3283,13 @@
             <a:prstDash val="solid"/>
           </a:ln>
         </p:spPr>
+        <p:txBody>
+          <a:bodyPr/>
+          <a:lstStyle/>
+          <a:p>
+            <a:endParaRPr lang="en-US"/>
+          </a:p>
+        </p:txBody>
       </p:sp>
       <p:sp>
         <p:nvSpPr>
@@ -3468,7 +3312,7 @@
           <a:bodyPr wrap="square" lIns="0" tIns="0" rIns="0" bIns="0" rtlCol="0" anchor="ctr"/>
           <a:lstStyle/>
           <a:p>
-            <a:pPr indent="0" marL="0">
+            <a:pPr marL="0" indent="0">
               <a:buNone/>
             </a:pPr>
             <a:r>
@@ -3507,6 +3351,13 @@
             <a:prstDash val="solid"/>
           </a:ln>
         </p:spPr>
+        <p:txBody>
+          <a:bodyPr/>
+          <a:lstStyle/>
+          <a:p>
+            <a:endParaRPr lang="en-US"/>
+          </a:p>
+        </p:txBody>
       </p:sp>
       <p:sp>
         <p:nvSpPr>
@@ -3529,7 +3380,7 @@
           <a:bodyPr wrap="square" lIns="0" tIns="0" rIns="0" bIns="0" rtlCol="0" anchor="ctr"/>
           <a:lstStyle/>
           <a:p>
-            <a:pPr algn="ctr" indent="0" marL="0">
+            <a:pPr marL="0" indent="0" algn="ctr">
               <a:buNone/>
             </a:pPr>
             <a:r>
@@ -3565,7 +3416,7 @@
           <a:bodyPr wrap="square" lIns="0" tIns="0" rIns="0" bIns="0" rtlCol="0" anchor="ctr"/>
           <a:lstStyle/>
           <a:p>
-            <a:pPr indent="0" marL="0">
+            <a:pPr marL="0" indent="0">
               <a:buNone/>
             </a:pPr>
             <a:r>
@@ -3604,6 +3455,13 @@
             <a:prstDash val="solid"/>
           </a:ln>
         </p:spPr>
+        <p:txBody>
+          <a:bodyPr/>
+          <a:lstStyle/>
+          <a:p>
+            <a:endParaRPr lang="en-US"/>
+          </a:p>
+        </p:txBody>
       </p:sp>
       <p:sp>
         <p:nvSpPr>
@@ -3626,7 +3484,7 @@
           <a:bodyPr wrap="square" lIns="0" tIns="0" rIns="0" bIns="0" rtlCol="0" anchor="ctr"/>
           <a:lstStyle/>
           <a:p>
-            <a:pPr indent="0" marL="0">
+            <a:pPr marL="0" indent="0">
               <a:buNone/>
             </a:pPr>
             <a:r>
@@ -3665,6 +3523,13 @@
             <a:prstDash val="solid"/>
           </a:ln>
         </p:spPr>
+        <p:txBody>
+          <a:bodyPr/>
+          <a:lstStyle/>
+          <a:p>
+            <a:endParaRPr lang="en-US"/>
+          </a:p>
+        </p:txBody>
       </p:sp>
       <p:sp>
         <p:nvSpPr>
@@ -3687,7 +3552,7 @@
           <a:bodyPr wrap="square" lIns="0" tIns="0" rIns="0" bIns="0" rtlCol="0" anchor="ctr"/>
           <a:lstStyle/>
           <a:p>
-            <a:pPr algn="ctr" indent="0" marL="0">
+            <a:pPr marL="0" indent="0" algn="ctr">
               <a:buNone/>
             </a:pPr>
             <a:r>
@@ -3723,7 +3588,7 @@
           <a:bodyPr wrap="square" lIns="0" tIns="0" rIns="0" bIns="0" rtlCol="0" anchor="ctr"/>
           <a:lstStyle/>
           <a:p>
-            <a:pPr indent="0" marL="0">
+            <a:pPr marL="0" indent="0">
               <a:buNone/>
             </a:pPr>
             <a:r>
@@ -3754,6 +3619,7 @@
         <a:solidFill>
           <a:srgbClr val="F0FDFA"/>
         </a:solidFill>
+        <a:effectLst/>
       </p:bgPr>
     </p:bg>
     <p:spTree>
@@ -3794,6 +3660,13 @@
             <a:prstDash val="solid"/>
           </a:ln>
         </p:spPr>
+        <p:txBody>
+          <a:bodyPr/>
+          <a:lstStyle/>
+          <a:p>
+            <a:endParaRPr lang="en-US"/>
+          </a:p>
+        </p:txBody>
       </p:sp>
       <p:sp>
         <p:nvSpPr>
@@ -3816,7 +3689,7 @@
           <a:bodyPr wrap="square" lIns="0" tIns="0" rIns="0" bIns="0" rtlCol="0" anchor="ctr"/>
           <a:lstStyle/>
           <a:p>
-            <a:pPr indent="0" marL="0">
+            <a:pPr marL="0" indent="0">
               <a:buNone/>
             </a:pPr>
             <a:r>
@@ -3855,13 +3728,20 @@
             <a:prstDash val="solid"/>
           </a:ln>
           <a:effectLst>
-            <a:outerShdw sx="100000" sy="100000" kx="0" ky="0" algn="bl" rotWithShape="0" blurRad="101600" dist="25400" dir="8100000">
+            <a:outerShdw blurRad="101600" dist="25400" dir="8100000" algn="bl" rotWithShape="0">
               <a:srgbClr val="000000">
                 <a:alpha val="10000"/>
               </a:srgbClr>
             </a:outerShdw>
           </a:effectLst>
         </p:spPr>
+        <p:txBody>
+          <a:bodyPr/>
+          <a:lstStyle/>
+          <a:p>
+            <a:endParaRPr lang="en-US"/>
+          </a:p>
+        </p:txBody>
       </p:sp>
       <p:sp>
         <p:nvSpPr>
@@ -3887,6 +3767,13 @@
             <a:prstDash val="solid"/>
           </a:ln>
         </p:spPr>
+        <p:txBody>
+          <a:bodyPr/>
+          <a:lstStyle/>
+          <a:p>
+            <a:endParaRPr lang="en-US"/>
+          </a:p>
+        </p:txBody>
       </p:sp>
       <p:sp>
         <p:nvSpPr>
@@ -3912,6 +3799,13 @@
             <a:prstDash val="solid"/>
           </a:ln>
         </p:spPr>
+        <p:txBody>
+          <a:bodyPr/>
+          <a:lstStyle/>
+          <a:p>
+            <a:endParaRPr lang="en-US"/>
+          </a:p>
+        </p:txBody>
       </p:sp>
       <p:sp>
         <p:nvSpPr>
@@ -3934,7 +3828,7 @@
           <a:bodyPr wrap="square" lIns="0" tIns="0" rIns="0" bIns="0" rtlCol="0" anchor="ctr"/>
           <a:lstStyle/>
           <a:p>
-            <a:pPr algn="ctr" indent="0" marL="0">
+            <a:pPr marL="0" indent="0" algn="ctr">
               <a:buNone/>
             </a:pPr>
             <a:r>
@@ -3946,67 +3840,6 @@
               <a:t>1</a:t>
             </a:r>
             <a:endParaRPr lang="en-US" sz="1500" dirty="0"/>
-          </a:p>
-        </p:txBody>
-      </p:sp>
-      <p:sp>
-        <p:nvSpPr>
-          <p:cNvPr id="8" name="Shape 6"/>
-          <p:cNvSpPr/>
-          <p:nvPr/>
-        </p:nvSpPr>
-        <p:spPr>
-          <a:xfrm>
-            <a:off x="7772400" y="932688"/>
-            <a:ext cx="914400" cy="228600"/>
-          </a:xfrm>
-          <a:prstGeom prst="rect">
-            <a:avLst/>
-          </a:prstGeom>
-          <a:solidFill>
-            <a:srgbClr val="CCFBF1"/>
-          </a:solidFill>
-          <a:ln w="9525">
-            <a:solidFill>
-              <a:srgbClr val="0D9488"/>
-            </a:solidFill>
-            <a:prstDash val="solid"/>
-          </a:ln>
-        </p:spPr>
-      </p:sp>
-      <p:sp>
-        <p:nvSpPr>
-          <p:cNvPr id="9" name="Text 7"/>
-          <p:cNvSpPr/>
-          <p:nvPr/>
-        </p:nvSpPr>
-        <p:spPr>
-          <a:xfrm>
-            <a:off x="7772400" y="932688"/>
-            <a:ext cx="914400" cy="228600"/>
-          </a:xfrm>
-          <a:prstGeom prst="rect">
-            <a:avLst/>
-          </a:prstGeom>
-          <a:noFill/>
-          <a:ln/>
-        </p:spPr>
-        <p:txBody>
-          <a:bodyPr wrap="square" lIns="0" tIns="0" rIns="0" bIns="0" rtlCol="0" anchor="ctr"/>
-          <a:lstStyle/>
-          <a:p>
-            <a:pPr algn="ctr" indent="0" marL="0">
-              <a:buNone/>
-            </a:pPr>
-            <a:r>
-              <a:rPr lang="en-US" sz="850" b="1" dirty="0">
-                <a:solidFill>
-                  <a:srgbClr val="0A7A70"/>
-                </a:solidFill>
-              </a:rPr>
-              <a:t>~15 min</a:t>
-            </a:r>
-            <a:endParaRPr lang="en-US" sz="850" dirty="0"/>
           </a:p>
         </p:txBody>
       </p:sp>
@@ -4031,7 +3864,7 @@
           <a:bodyPr wrap="square" lIns="0" tIns="0" rIns="0" bIns="0" rtlCol="0" anchor="ctr"/>
           <a:lstStyle/>
           <a:p>
-            <a:pPr indent="0" marL="0">
+            <a:pPr marL="0" indent="0">
               <a:buNone/>
             </a:pPr>
             <a:r>
@@ -4067,7 +3900,7 @@
           <a:bodyPr wrap="square" lIns="0" tIns="0" rIns="0" bIns="0" rtlCol="0" anchor="ctr"/>
           <a:lstStyle/>
           <a:p>
-            <a:pPr indent="0" marL="0">
+            <a:pPr marL="0" indent="0">
               <a:buNone/>
             </a:pPr>
             <a:r>
@@ -4106,13 +3939,20 @@
             <a:prstDash val="solid"/>
           </a:ln>
           <a:effectLst>
-            <a:outerShdw sx="100000" sy="100000" kx="0" ky="0" algn="bl" rotWithShape="0" blurRad="101600" dist="25400" dir="8100000">
+            <a:outerShdw blurRad="101600" dist="25400" dir="8100000" algn="bl" rotWithShape="0">
               <a:srgbClr val="000000">
                 <a:alpha val="10000"/>
               </a:srgbClr>
             </a:outerShdw>
           </a:effectLst>
         </p:spPr>
+        <p:txBody>
+          <a:bodyPr/>
+          <a:lstStyle/>
+          <a:p>
+            <a:endParaRPr lang="en-US"/>
+          </a:p>
+        </p:txBody>
       </p:sp>
       <p:sp>
         <p:nvSpPr>
@@ -4138,6 +3978,13 @@
             <a:prstDash val="solid"/>
           </a:ln>
         </p:spPr>
+        <p:txBody>
+          <a:bodyPr/>
+          <a:lstStyle/>
+          <a:p>
+            <a:endParaRPr lang="en-US"/>
+          </a:p>
+        </p:txBody>
       </p:sp>
       <p:sp>
         <p:nvSpPr>
@@ -4163,6 +4010,13 @@
             <a:prstDash val="solid"/>
           </a:ln>
         </p:spPr>
+        <p:txBody>
+          <a:bodyPr/>
+          <a:lstStyle/>
+          <a:p>
+            <a:endParaRPr lang="en-US"/>
+          </a:p>
+        </p:txBody>
       </p:sp>
       <p:sp>
         <p:nvSpPr>
@@ -4185,7 +4039,7 @@
           <a:bodyPr wrap="square" lIns="0" tIns="0" rIns="0" bIns="0" rtlCol="0" anchor="ctr"/>
           <a:lstStyle/>
           <a:p>
-            <a:pPr algn="ctr" indent="0" marL="0">
+            <a:pPr marL="0" indent="0" algn="ctr">
               <a:buNone/>
             </a:pPr>
             <a:r>
@@ -4197,67 +4051,6 @@
               <a:t>2</a:t>
             </a:r>
             <a:endParaRPr lang="en-US" sz="1500" dirty="0"/>
-          </a:p>
-        </p:txBody>
-      </p:sp>
-      <p:sp>
-        <p:nvSpPr>
-          <p:cNvPr id="16" name="Shape 14"/>
-          <p:cNvSpPr/>
-          <p:nvPr/>
-        </p:nvSpPr>
-        <p:spPr>
-          <a:xfrm>
-            <a:off x="7772400" y="1737360"/>
-            <a:ext cx="914400" cy="228600"/>
-          </a:xfrm>
-          <a:prstGeom prst="rect">
-            <a:avLst/>
-          </a:prstGeom>
-          <a:solidFill>
-            <a:srgbClr val="CCFBF1"/>
-          </a:solidFill>
-          <a:ln w="9525">
-            <a:solidFill>
-              <a:srgbClr val="0D9488"/>
-            </a:solidFill>
-            <a:prstDash val="solid"/>
-          </a:ln>
-        </p:spPr>
-      </p:sp>
-      <p:sp>
-        <p:nvSpPr>
-          <p:cNvPr id="17" name="Text 15"/>
-          <p:cNvSpPr/>
-          <p:nvPr/>
-        </p:nvSpPr>
-        <p:spPr>
-          <a:xfrm>
-            <a:off x="7772400" y="1737360"/>
-            <a:ext cx="914400" cy="228600"/>
-          </a:xfrm>
-          <a:prstGeom prst="rect">
-            <a:avLst/>
-          </a:prstGeom>
-          <a:noFill/>
-          <a:ln/>
-        </p:spPr>
-        <p:txBody>
-          <a:bodyPr wrap="square" lIns="0" tIns="0" rIns="0" bIns="0" rtlCol="0" anchor="ctr"/>
-          <a:lstStyle/>
-          <a:p>
-            <a:pPr algn="ctr" indent="0" marL="0">
-              <a:buNone/>
-            </a:pPr>
-            <a:r>
-              <a:rPr lang="en-US" sz="850" b="1" dirty="0">
-                <a:solidFill>
-                  <a:srgbClr val="0A7A70"/>
-                </a:solidFill>
-              </a:rPr>
-              <a:t>~20 min</a:t>
-            </a:r>
-            <a:endParaRPr lang="en-US" sz="850" dirty="0"/>
           </a:p>
         </p:txBody>
       </p:sp>
@@ -4282,7 +4075,7 @@
           <a:bodyPr wrap="square" lIns="0" tIns="0" rIns="0" bIns="0" rtlCol="0" anchor="ctr"/>
           <a:lstStyle/>
           <a:p>
-            <a:pPr indent="0" marL="0">
+            <a:pPr marL="0" indent="0">
               <a:buNone/>
             </a:pPr>
             <a:r>
@@ -4318,7 +4111,7 @@
           <a:bodyPr wrap="square" lIns="0" tIns="0" rIns="0" bIns="0" rtlCol="0" anchor="ctr"/>
           <a:lstStyle/>
           <a:p>
-            <a:pPr indent="0" marL="0">
+            <a:pPr marL="0" indent="0">
               <a:buNone/>
             </a:pPr>
             <a:r>
@@ -4357,13 +4150,20 @@
             <a:prstDash val="solid"/>
           </a:ln>
           <a:effectLst>
-            <a:outerShdw sx="100000" sy="100000" kx="0" ky="0" algn="bl" rotWithShape="0" blurRad="101600" dist="25400" dir="8100000">
+            <a:outerShdw blurRad="101600" dist="25400" dir="8100000" algn="bl" rotWithShape="0">
               <a:srgbClr val="000000">
                 <a:alpha val="10000"/>
               </a:srgbClr>
             </a:outerShdw>
           </a:effectLst>
         </p:spPr>
+        <p:txBody>
+          <a:bodyPr/>
+          <a:lstStyle/>
+          <a:p>
+            <a:endParaRPr lang="en-US"/>
+          </a:p>
+        </p:txBody>
       </p:sp>
       <p:sp>
         <p:nvSpPr>
@@ -4389,6 +4189,13 @@
             <a:prstDash val="solid"/>
           </a:ln>
         </p:spPr>
+        <p:txBody>
+          <a:bodyPr/>
+          <a:lstStyle/>
+          <a:p>
+            <a:endParaRPr lang="en-US"/>
+          </a:p>
+        </p:txBody>
       </p:sp>
       <p:sp>
         <p:nvSpPr>
@@ -4414,6 +4221,13 @@
             <a:prstDash val="solid"/>
           </a:ln>
         </p:spPr>
+        <p:txBody>
+          <a:bodyPr/>
+          <a:lstStyle/>
+          <a:p>
+            <a:endParaRPr lang="en-US"/>
+          </a:p>
+        </p:txBody>
       </p:sp>
       <p:sp>
         <p:nvSpPr>
@@ -4436,7 +4250,7 @@
           <a:bodyPr wrap="square" lIns="0" tIns="0" rIns="0" bIns="0" rtlCol="0" anchor="ctr"/>
           <a:lstStyle/>
           <a:p>
-            <a:pPr algn="ctr" indent="0" marL="0">
+            <a:pPr marL="0" indent="0" algn="ctr">
               <a:buNone/>
             </a:pPr>
             <a:r>
@@ -4453,7 +4267,7 @@
       </p:sp>
       <p:sp>
         <p:nvSpPr>
-          <p:cNvPr id="24" name="Shape 22"/>
+          <p:cNvPr id="25" name="Text 23"/>
           <p:cNvSpPr/>
           <p:nvPr/>
         </p:nvSpPr>
@@ -4465,49 +4279,16 @@
           <a:prstGeom prst="rect">
             <a:avLst/>
           </a:prstGeom>
-          <a:solidFill>
-            <a:srgbClr val="CCFBF1"/>
-          </a:solidFill>
-          <a:ln w="9525">
-            <a:solidFill>
-              <a:srgbClr val="0D9488"/>
-            </a:solidFill>
-            <a:prstDash val="solid"/>
-          </a:ln>
-        </p:spPr>
-      </p:sp>
-      <p:sp>
-        <p:nvSpPr>
-          <p:cNvPr id="25" name="Text 23"/>
-          <p:cNvSpPr/>
-          <p:nvPr/>
-        </p:nvSpPr>
-        <p:spPr>
-          <a:xfrm>
-            <a:off x="7772400" y="2542032"/>
-            <a:ext cx="914400" cy="228600"/>
-          </a:xfrm>
-          <a:prstGeom prst="rect">
-            <a:avLst/>
-          </a:prstGeom>
-          <a:noFill/>
-          <a:ln/>
-        </p:spPr>
-        <p:txBody>
-          <a:bodyPr wrap="square" lIns="0" tIns="0" rIns="0" bIns="0" rtlCol="0" anchor="ctr"/>
-          <a:lstStyle/>
-          <a:p>
-            <a:pPr algn="ctr" indent="0" marL="0">
-              <a:buNone/>
-            </a:pPr>
-            <a:r>
-              <a:rPr lang="en-US" sz="850" b="1" dirty="0">
-                <a:solidFill>
-                  <a:srgbClr val="0A7A70"/>
-                </a:solidFill>
-              </a:rPr>
-              <a:t>~60 min</a:t>
-            </a:r>
+          <a:noFill/>
+          <a:ln/>
+        </p:spPr>
+        <p:txBody>
+          <a:bodyPr wrap="square" lIns="0" tIns="0" rIns="0" bIns="0" rtlCol="0" anchor="ctr"/>
+          <a:lstStyle/>
+          <a:p>
+            <a:pPr marL="0" indent="0" algn="ctr">
+              <a:buNone/>
+            </a:pPr>
             <a:endParaRPr lang="en-US" sz="850" dirty="0"/>
           </a:p>
         </p:txBody>
@@ -4533,7 +4314,7 @@
           <a:bodyPr wrap="square" lIns="0" tIns="0" rIns="0" bIns="0" rtlCol="0" anchor="ctr"/>
           <a:lstStyle/>
           <a:p>
-            <a:pPr indent="0" marL="0">
+            <a:pPr marL="0" indent="0">
               <a:buNone/>
             </a:pPr>
             <a:r>
@@ -4569,7 +4350,7 @@
           <a:bodyPr wrap="square" lIns="0" tIns="0" rIns="0" bIns="0" rtlCol="0" anchor="ctr"/>
           <a:lstStyle/>
           <a:p>
-            <a:pPr indent="0" marL="0">
+            <a:pPr marL="0" indent="0">
               <a:buNone/>
             </a:pPr>
             <a:r>
@@ -4608,13 +4389,20 @@
             <a:prstDash val="solid"/>
           </a:ln>
           <a:effectLst>
-            <a:outerShdw sx="100000" sy="100000" kx="0" ky="0" algn="bl" rotWithShape="0" blurRad="101600" dist="25400" dir="8100000">
+            <a:outerShdw blurRad="101600" dist="25400" dir="8100000" algn="bl" rotWithShape="0">
               <a:srgbClr val="000000">
                 <a:alpha val="10000"/>
               </a:srgbClr>
             </a:outerShdw>
           </a:effectLst>
         </p:spPr>
+        <p:txBody>
+          <a:bodyPr/>
+          <a:lstStyle/>
+          <a:p>
+            <a:endParaRPr lang="en-US"/>
+          </a:p>
+        </p:txBody>
       </p:sp>
       <p:sp>
         <p:nvSpPr>
@@ -4640,6 +4428,13 @@
             <a:prstDash val="solid"/>
           </a:ln>
         </p:spPr>
+        <p:txBody>
+          <a:bodyPr/>
+          <a:lstStyle/>
+          <a:p>
+            <a:endParaRPr lang="en-US"/>
+          </a:p>
+        </p:txBody>
       </p:sp>
       <p:sp>
         <p:nvSpPr>
@@ -4665,6 +4460,13 @@
             <a:prstDash val="solid"/>
           </a:ln>
         </p:spPr>
+        <p:txBody>
+          <a:bodyPr/>
+          <a:lstStyle/>
+          <a:p>
+            <a:endParaRPr lang="en-US"/>
+          </a:p>
+        </p:txBody>
       </p:sp>
       <p:sp>
         <p:nvSpPr>
@@ -4687,7 +4489,7 @@
           <a:bodyPr wrap="square" lIns="0" tIns="0" rIns="0" bIns="0" rtlCol="0" anchor="ctr"/>
           <a:lstStyle/>
           <a:p>
-            <a:pPr algn="ctr" indent="0" marL="0">
+            <a:pPr marL="0" indent="0" algn="ctr">
               <a:buNone/>
             </a:pPr>
             <a:r>
@@ -4704,7 +4506,7 @@
       </p:sp>
       <p:sp>
         <p:nvSpPr>
-          <p:cNvPr id="32" name="Shape 30"/>
+          <p:cNvPr id="33" name="Text 31"/>
           <p:cNvSpPr/>
           <p:nvPr/>
         </p:nvSpPr>
@@ -4716,49 +4518,16 @@
           <a:prstGeom prst="rect">
             <a:avLst/>
           </a:prstGeom>
-          <a:solidFill>
-            <a:srgbClr val="CCFBF1"/>
-          </a:solidFill>
-          <a:ln w="9525">
-            <a:solidFill>
-              <a:srgbClr val="0D9488"/>
-            </a:solidFill>
-            <a:prstDash val="solid"/>
-          </a:ln>
-        </p:spPr>
-      </p:sp>
-      <p:sp>
-        <p:nvSpPr>
-          <p:cNvPr id="33" name="Text 31"/>
-          <p:cNvSpPr/>
-          <p:nvPr/>
-        </p:nvSpPr>
-        <p:spPr>
-          <a:xfrm>
-            <a:off x="7772400" y="3346704"/>
-            <a:ext cx="914400" cy="228600"/>
-          </a:xfrm>
-          <a:prstGeom prst="rect">
-            <a:avLst/>
-          </a:prstGeom>
-          <a:noFill/>
-          <a:ln/>
-        </p:spPr>
-        <p:txBody>
-          <a:bodyPr wrap="square" lIns="0" tIns="0" rIns="0" bIns="0" rtlCol="0" anchor="ctr"/>
-          <a:lstStyle/>
-          <a:p>
-            <a:pPr algn="ctr" indent="0" marL="0">
-              <a:buNone/>
-            </a:pPr>
-            <a:r>
-              <a:rPr lang="en-US" sz="850" b="1" dirty="0">
-                <a:solidFill>
-                  <a:srgbClr val="0A7A70"/>
-                </a:solidFill>
-              </a:rPr>
-              <a:t>~5 min</a:t>
-            </a:r>
+          <a:noFill/>
+          <a:ln/>
+        </p:spPr>
+        <p:txBody>
+          <a:bodyPr wrap="square" lIns="0" tIns="0" rIns="0" bIns="0" rtlCol="0" anchor="ctr"/>
+          <a:lstStyle/>
+          <a:p>
+            <a:pPr marL="0" indent="0" algn="ctr">
+              <a:buNone/>
+            </a:pPr>
             <a:endParaRPr lang="en-US" sz="850" dirty="0"/>
           </a:p>
         </p:txBody>
@@ -4784,7 +4553,7 @@
           <a:bodyPr wrap="square" lIns="0" tIns="0" rIns="0" bIns="0" rtlCol="0" anchor="ctr"/>
           <a:lstStyle/>
           <a:p>
-            <a:pPr indent="0" marL="0">
+            <a:pPr marL="0" indent="0">
               <a:buNone/>
             </a:pPr>
             <a:r>
@@ -4820,7 +4589,7 @@
           <a:bodyPr wrap="square" lIns="0" tIns="0" rIns="0" bIns="0" rtlCol="0" anchor="ctr"/>
           <a:lstStyle/>
           <a:p>
-            <a:pPr indent="0" marL="0">
+            <a:pPr marL="0" indent="0">
               <a:buNone/>
             </a:pPr>
             <a:r>
@@ -4859,13 +4628,20 @@
             <a:prstDash val="solid"/>
           </a:ln>
           <a:effectLst>
-            <a:outerShdw sx="100000" sy="100000" kx="0" ky="0" algn="bl" rotWithShape="0" blurRad="101600" dist="25400" dir="8100000">
+            <a:outerShdw blurRad="101600" dist="25400" dir="8100000" algn="bl" rotWithShape="0">
               <a:srgbClr val="000000">
                 <a:alpha val="10000"/>
               </a:srgbClr>
             </a:outerShdw>
           </a:effectLst>
         </p:spPr>
+        <p:txBody>
+          <a:bodyPr/>
+          <a:lstStyle/>
+          <a:p>
+            <a:endParaRPr lang="en-US"/>
+          </a:p>
+        </p:txBody>
       </p:sp>
       <p:sp>
         <p:nvSpPr>
@@ -4891,6 +4667,13 @@
             <a:prstDash val="solid"/>
           </a:ln>
         </p:spPr>
+        <p:txBody>
+          <a:bodyPr/>
+          <a:lstStyle/>
+          <a:p>
+            <a:endParaRPr lang="en-US"/>
+          </a:p>
+        </p:txBody>
       </p:sp>
       <p:sp>
         <p:nvSpPr>
@@ -4916,6 +4699,13 @@
             <a:prstDash val="solid"/>
           </a:ln>
         </p:spPr>
+        <p:txBody>
+          <a:bodyPr/>
+          <a:lstStyle/>
+          <a:p>
+            <a:endParaRPr lang="en-US"/>
+          </a:p>
+        </p:txBody>
       </p:sp>
       <p:sp>
         <p:nvSpPr>
@@ -4938,7 +4728,7 @@
           <a:bodyPr wrap="square" lIns="0" tIns="0" rIns="0" bIns="0" rtlCol="0" anchor="ctr"/>
           <a:lstStyle/>
           <a:p>
-            <a:pPr algn="ctr" indent="0" marL="0">
+            <a:pPr marL="0" indent="0" algn="ctr">
               <a:buNone/>
             </a:pPr>
             <a:r>
@@ -4955,7 +4745,7 @@
       </p:sp>
       <p:sp>
         <p:nvSpPr>
-          <p:cNvPr id="40" name="Shape 38"/>
+          <p:cNvPr id="41" name="Text 39"/>
           <p:cNvSpPr/>
           <p:nvPr/>
         </p:nvSpPr>
@@ -4967,49 +4757,16 @@
           <a:prstGeom prst="rect">
             <a:avLst/>
           </a:prstGeom>
-          <a:solidFill>
-            <a:srgbClr val="CCFBF1"/>
-          </a:solidFill>
-          <a:ln w="9525">
-            <a:solidFill>
-              <a:srgbClr val="0D9488"/>
-            </a:solidFill>
-            <a:prstDash val="solid"/>
-          </a:ln>
-        </p:spPr>
-      </p:sp>
-      <p:sp>
-        <p:nvSpPr>
-          <p:cNvPr id="41" name="Text 39"/>
-          <p:cNvSpPr/>
-          <p:nvPr/>
-        </p:nvSpPr>
-        <p:spPr>
-          <a:xfrm>
-            <a:off x="7772400" y="4151376"/>
-            <a:ext cx="914400" cy="228600"/>
-          </a:xfrm>
-          <a:prstGeom prst="rect">
-            <a:avLst/>
-          </a:prstGeom>
-          <a:noFill/>
-          <a:ln/>
-        </p:spPr>
-        <p:txBody>
-          <a:bodyPr wrap="square" lIns="0" tIns="0" rIns="0" bIns="0" rtlCol="0" anchor="ctr"/>
-          <a:lstStyle/>
-          <a:p>
-            <a:pPr algn="ctr" indent="0" marL="0">
-              <a:buNone/>
-            </a:pPr>
-            <a:r>
-              <a:rPr lang="en-US" sz="850" b="1" dirty="0">
-                <a:solidFill>
-                  <a:srgbClr val="0A7A70"/>
-                </a:solidFill>
-              </a:rPr>
-              <a:t>~45 min</a:t>
-            </a:r>
+          <a:noFill/>
+          <a:ln/>
+        </p:spPr>
+        <p:txBody>
+          <a:bodyPr wrap="square" lIns="0" tIns="0" rIns="0" bIns="0" rtlCol="0" anchor="ctr"/>
+          <a:lstStyle/>
+          <a:p>
+            <a:pPr marL="0" indent="0" algn="ctr">
+              <a:buNone/>
+            </a:pPr>
             <a:endParaRPr lang="en-US" sz="850" dirty="0"/>
           </a:p>
         </p:txBody>
@@ -5035,7 +4792,7 @@
           <a:bodyPr wrap="square" lIns="0" tIns="0" rIns="0" bIns="0" rtlCol="0" anchor="ctr"/>
           <a:lstStyle/>
           <a:p>
-            <a:pPr indent="0" marL="0">
+            <a:pPr marL="0" indent="0">
               <a:buNone/>
             </a:pPr>
             <a:r>
@@ -5071,7 +4828,7 @@
           <a:bodyPr wrap="square" lIns="0" tIns="0" rIns="0" bIns="0" rtlCol="0" anchor="ctr"/>
           <a:lstStyle/>
           <a:p>
-            <a:pPr indent="0" marL="0">
+            <a:pPr marL="0" indent="0">
               <a:buNone/>
             </a:pPr>
             <a:r>
@@ -5102,6 +4859,7 @@
         <a:solidFill>
           <a:srgbClr val="F0FDFA"/>
         </a:solidFill>
+        <a:effectLst/>
       </p:bgPr>
     </p:bg>
     <p:spTree>
@@ -5142,6 +4900,13 @@
             <a:prstDash val="solid"/>
           </a:ln>
         </p:spPr>
+        <p:txBody>
+          <a:bodyPr/>
+          <a:lstStyle/>
+          <a:p>
+            <a:endParaRPr lang="en-US"/>
+          </a:p>
+        </p:txBody>
       </p:sp>
       <p:sp>
         <p:nvSpPr>
@@ -5164,7 +4929,7 @@
           <a:bodyPr wrap="square" lIns="0" tIns="0" rIns="0" bIns="0" rtlCol="0" anchor="ctr"/>
           <a:lstStyle/>
           <a:p>
-            <a:pPr indent="0" marL="0">
+            <a:pPr marL="0" indent="0">
               <a:buNone/>
             </a:pPr>
             <a:r>
@@ -5203,6 +4968,13 @@
             <a:prstDash val="solid"/>
           </a:ln>
         </p:spPr>
+        <p:txBody>
+          <a:bodyPr/>
+          <a:lstStyle/>
+          <a:p>
+            <a:endParaRPr lang="en-US"/>
+          </a:p>
+        </p:txBody>
       </p:sp>
       <p:sp>
         <p:nvSpPr>
@@ -5225,7 +4997,7 @@
           <a:bodyPr wrap="square" lIns="0" tIns="0" rIns="0" bIns="0" rtlCol="0" anchor="ctr"/>
           <a:lstStyle/>
           <a:p>
-            <a:pPr algn="ctr" indent="0" marL="0">
+            <a:pPr marL="0" indent="0" algn="ctr">
               <a:buNone/>
             </a:pPr>
             <a:r>
@@ -5261,7 +5033,7 @@
           <a:bodyPr wrap="square" lIns="0" tIns="0" rIns="0" bIns="0" rtlCol="0" anchor="ctr"/>
           <a:lstStyle/>
           <a:p>
-            <a:pPr algn="ctr" indent="0" marL="0">
+            <a:pPr marL="0" indent="0" algn="ctr">
               <a:buNone/>
             </a:pPr>
             <a:r>
@@ -5300,13 +5072,20 @@
             <a:prstDash val="solid"/>
           </a:ln>
           <a:effectLst>
-            <a:outerShdw sx="100000" sy="100000" kx="0" ky="0" algn="bl" rotWithShape="0" blurRad="101600" dist="25400" dir="8100000">
+            <a:outerShdw blurRad="101600" dist="25400" dir="8100000" algn="bl" rotWithShape="0">
               <a:srgbClr val="000000">
                 <a:alpha val="10000"/>
               </a:srgbClr>
             </a:outerShdw>
           </a:effectLst>
         </p:spPr>
+        <p:txBody>
+          <a:bodyPr/>
+          <a:lstStyle/>
+          <a:p>
+            <a:endParaRPr lang="en-US"/>
+          </a:p>
+        </p:txBody>
       </p:sp>
       <p:sp>
         <p:nvSpPr>
@@ -5329,7 +5108,7 @@
           <a:bodyPr wrap="square" lIns="0" tIns="0" rIns="0" bIns="0" rtlCol="0" anchor="ctr"/>
           <a:lstStyle/>
           <a:p>
-            <a:pPr algn="ctr" indent="0" marL="0">
+            <a:pPr marL="0" indent="0" algn="ctr">
               <a:buNone/>
             </a:pPr>
             <a:r>
@@ -5368,6 +5147,13 @@
             <a:prstDash val="solid"/>
           </a:ln>
         </p:spPr>
+        <p:txBody>
+          <a:bodyPr/>
+          <a:lstStyle/>
+          <a:p>
+            <a:endParaRPr lang="en-US"/>
+          </a:p>
+        </p:txBody>
       </p:sp>
       <p:sp>
         <p:nvSpPr>
@@ -5393,6 +5179,13 @@
             <a:prstDash val="solid"/>
           </a:ln>
         </p:spPr>
+        <p:txBody>
+          <a:bodyPr/>
+          <a:lstStyle/>
+          <a:p>
+            <a:endParaRPr lang="en-US"/>
+          </a:p>
+        </p:txBody>
       </p:sp>
       <p:sp>
         <p:nvSpPr>
@@ -5415,7 +5208,7 @@
           <a:bodyPr wrap="square" lIns="0" tIns="0" rIns="0" bIns="0" rtlCol="0" anchor="ctr"/>
           <a:lstStyle/>
           <a:p>
-            <a:pPr indent="0" marL="0">
+            <a:pPr marL="0" indent="0">
               <a:buNone/>
             </a:pPr>
             <a:r>
@@ -5454,6 +5247,13 @@
             <a:prstDash val="solid"/>
           </a:ln>
         </p:spPr>
+        <p:txBody>
+          <a:bodyPr/>
+          <a:lstStyle/>
+          <a:p>
+            <a:endParaRPr lang="en-US"/>
+          </a:p>
+        </p:txBody>
       </p:sp>
       <p:sp>
         <p:nvSpPr>
@@ -5479,6 +5279,13 @@
             <a:prstDash val="solid"/>
           </a:ln>
         </p:spPr>
+        <p:txBody>
+          <a:bodyPr/>
+          <a:lstStyle/>
+          <a:p>
+            <a:endParaRPr lang="en-US"/>
+          </a:p>
+        </p:txBody>
       </p:sp>
       <p:sp>
         <p:nvSpPr>
@@ -5501,7 +5308,7 @@
           <a:bodyPr wrap="square" lIns="0" tIns="0" rIns="0" bIns="0" rtlCol="0" anchor="ctr"/>
           <a:lstStyle/>
           <a:p>
-            <a:pPr indent="0" marL="0">
+            <a:pPr marL="0" indent="0">
               <a:buNone/>
             </a:pPr>
             <a:r>
@@ -5540,6 +5347,13 @@
             <a:prstDash val="solid"/>
           </a:ln>
         </p:spPr>
+        <p:txBody>
+          <a:bodyPr/>
+          <a:lstStyle/>
+          <a:p>
+            <a:endParaRPr lang="en-US"/>
+          </a:p>
+        </p:txBody>
       </p:sp>
       <p:sp>
         <p:nvSpPr>
@@ -5565,6 +5379,13 @@
             <a:prstDash val="solid"/>
           </a:ln>
         </p:spPr>
+        <p:txBody>
+          <a:bodyPr/>
+          <a:lstStyle/>
+          <a:p>
+            <a:endParaRPr lang="en-US"/>
+          </a:p>
+        </p:txBody>
       </p:sp>
       <p:sp>
         <p:nvSpPr>
@@ -5587,7 +5408,7 @@
           <a:bodyPr wrap="square" lIns="0" tIns="0" rIns="0" bIns="0" rtlCol="0" anchor="ctr"/>
           <a:lstStyle/>
           <a:p>
-            <a:pPr indent="0" marL="0">
+            <a:pPr marL="0" indent="0">
               <a:buNone/>
             </a:pPr>
             <a:r>
@@ -5626,6 +5447,13 @@
             <a:prstDash val="solid"/>
           </a:ln>
         </p:spPr>
+        <p:txBody>
+          <a:bodyPr/>
+          <a:lstStyle/>
+          <a:p>
+            <a:endParaRPr lang="en-US"/>
+          </a:p>
+        </p:txBody>
       </p:sp>
       <p:sp>
         <p:nvSpPr>
@@ -5651,6 +5479,13 @@
             <a:prstDash val="solid"/>
           </a:ln>
         </p:spPr>
+        <p:txBody>
+          <a:bodyPr/>
+          <a:lstStyle/>
+          <a:p>
+            <a:endParaRPr lang="en-US"/>
+          </a:p>
+        </p:txBody>
       </p:sp>
       <p:sp>
         <p:nvSpPr>
@@ -5673,7 +5508,7 @@
           <a:bodyPr wrap="square" lIns="0" tIns="0" rIns="0" bIns="0" rtlCol="0" anchor="ctr"/>
           <a:lstStyle/>
           <a:p>
-            <a:pPr indent="0" marL="0">
+            <a:pPr marL="0" indent="0">
               <a:buNone/>
             </a:pPr>
             <a:r>
@@ -5712,6 +5547,13 @@
             <a:prstDash val="solid"/>
           </a:ln>
         </p:spPr>
+        <p:txBody>
+          <a:bodyPr/>
+          <a:lstStyle/>
+          <a:p>
+            <a:endParaRPr lang="en-US"/>
+          </a:p>
+        </p:txBody>
       </p:sp>
       <p:sp>
         <p:nvSpPr>
@@ -5737,6 +5579,13 @@
             <a:prstDash val="solid"/>
           </a:ln>
         </p:spPr>
+        <p:txBody>
+          <a:bodyPr/>
+          <a:lstStyle/>
+          <a:p>
+            <a:endParaRPr lang="en-US"/>
+          </a:p>
+        </p:txBody>
       </p:sp>
       <p:sp>
         <p:nvSpPr>
@@ -5759,7 +5608,7 @@
           <a:bodyPr wrap="square" lIns="0" tIns="0" rIns="0" bIns="0" rtlCol="0" anchor="ctr"/>
           <a:lstStyle/>
           <a:p>
-            <a:pPr indent="0" marL="0">
+            <a:pPr marL="0" indent="0">
               <a:buNone/>
             </a:pPr>
             <a:r>
@@ -5798,6 +5647,13 @@
             <a:prstDash val="solid"/>
           </a:ln>
         </p:spPr>
+        <p:txBody>
+          <a:bodyPr/>
+          <a:lstStyle/>
+          <a:p>
+            <a:endParaRPr lang="en-US"/>
+          </a:p>
+        </p:txBody>
       </p:sp>
       <p:sp>
         <p:nvSpPr>
@@ -5823,6 +5679,13 @@
             <a:prstDash val="solid"/>
           </a:ln>
         </p:spPr>
+        <p:txBody>
+          <a:bodyPr/>
+          <a:lstStyle/>
+          <a:p>
+            <a:endParaRPr lang="en-US"/>
+          </a:p>
+        </p:txBody>
       </p:sp>
       <p:sp>
         <p:nvSpPr>
@@ -5845,7 +5708,7 @@
           <a:bodyPr wrap="square" lIns="0" tIns="0" rIns="0" bIns="0" rtlCol="0" anchor="ctr"/>
           <a:lstStyle/>
           <a:p>
-            <a:pPr indent="0" marL="0">
+            <a:pPr marL="0" indent="0">
               <a:buNone/>
             </a:pPr>
             <a:r>
@@ -5884,6 +5747,13 @@
             <a:prstDash val="solid"/>
           </a:ln>
         </p:spPr>
+        <p:txBody>
+          <a:bodyPr/>
+          <a:lstStyle/>
+          <a:p>
+            <a:endParaRPr lang="en-US"/>
+          </a:p>
+        </p:txBody>
       </p:sp>
       <p:sp>
         <p:nvSpPr>
@@ -5906,7 +5776,7 @@
           <a:bodyPr wrap="square" lIns="0" tIns="0" rIns="0" bIns="0" rtlCol="0" anchor="ctr"/>
           <a:lstStyle/>
           <a:p>
-            <a:pPr algn="ctr" indent="0" marL="0">
+            <a:pPr marL="0" indent="0" algn="ctr">
               <a:buNone/>
             </a:pPr>
             <a:r>
@@ -5942,7 +5812,7 @@
           <a:bodyPr wrap="square" lIns="0" tIns="0" rIns="0" bIns="0" rtlCol="0" anchor="ctr"/>
           <a:lstStyle/>
           <a:p>
-            <a:pPr algn="ctr" indent="0" marL="0">
+            <a:pPr marL="0" indent="0" algn="ctr">
               <a:buNone/>
             </a:pPr>
             <a:r>
@@ -5981,13 +5851,20 @@
             <a:prstDash val="solid"/>
           </a:ln>
           <a:effectLst>
-            <a:outerShdw sx="100000" sy="100000" kx="0" ky="0" algn="bl" rotWithShape="0" blurRad="101600" dist="25400" dir="8100000">
+            <a:outerShdw blurRad="101600" dist="25400" dir="8100000" algn="bl" rotWithShape="0">
               <a:srgbClr val="000000">
                 <a:alpha val="10000"/>
               </a:srgbClr>
             </a:outerShdw>
           </a:effectLst>
         </p:spPr>
+        <p:txBody>
+          <a:bodyPr/>
+          <a:lstStyle/>
+          <a:p>
+            <a:endParaRPr lang="en-US"/>
+          </a:p>
+        </p:txBody>
       </p:sp>
       <p:sp>
         <p:nvSpPr>
@@ -6010,7 +5887,7 @@
           <a:bodyPr wrap="square" lIns="0" tIns="0" rIns="0" bIns="0" rtlCol="0" anchor="ctr"/>
           <a:lstStyle/>
           <a:p>
-            <a:pPr algn="ctr" indent="0" marL="0">
+            <a:pPr marL="0" indent="0" algn="ctr">
               <a:buNone/>
             </a:pPr>
             <a:r>
@@ -6049,6 +5926,13 @@
             <a:prstDash val="solid"/>
           </a:ln>
         </p:spPr>
+        <p:txBody>
+          <a:bodyPr/>
+          <a:lstStyle/>
+          <a:p>
+            <a:endParaRPr lang="en-US"/>
+          </a:p>
+        </p:txBody>
       </p:sp>
       <p:sp>
         <p:nvSpPr>
@@ -6074,6 +5958,13 @@
             <a:prstDash val="solid"/>
           </a:ln>
         </p:spPr>
+        <p:txBody>
+          <a:bodyPr/>
+          <a:lstStyle/>
+          <a:p>
+            <a:endParaRPr lang="en-US"/>
+          </a:p>
+        </p:txBody>
       </p:sp>
       <p:sp>
         <p:nvSpPr>
@@ -6096,7 +5987,7 @@
           <a:bodyPr wrap="square" lIns="0" tIns="0" rIns="0" bIns="0" rtlCol="0" anchor="ctr"/>
           <a:lstStyle/>
           <a:p>
-            <a:pPr indent="0" marL="0">
+            <a:pPr marL="0" indent="0">
               <a:buNone/>
             </a:pPr>
             <a:r>
@@ -6135,6 +6026,13 @@
             <a:prstDash val="solid"/>
           </a:ln>
         </p:spPr>
+        <p:txBody>
+          <a:bodyPr/>
+          <a:lstStyle/>
+          <a:p>
+            <a:endParaRPr lang="en-US"/>
+          </a:p>
+        </p:txBody>
       </p:sp>
       <p:sp>
         <p:nvSpPr>
@@ -6160,6 +6058,13 @@
             <a:prstDash val="solid"/>
           </a:ln>
         </p:spPr>
+        <p:txBody>
+          <a:bodyPr/>
+          <a:lstStyle/>
+          <a:p>
+            <a:endParaRPr lang="en-US"/>
+          </a:p>
+        </p:txBody>
       </p:sp>
       <p:sp>
         <p:nvSpPr>
@@ -6182,7 +6087,7 @@
           <a:bodyPr wrap="square" lIns="0" tIns="0" rIns="0" bIns="0" rtlCol="0" anchor="ctr"/>
           <a:lstStyle/>
           <a:p>
-            <a:pPr indent="0" marL="0">
+            <a:pPr marL="0" indent="0">
               <a:buNone/>
             </a:pPr>
             <a:r>
@@ -6221,6 +6126,13 @@
             <a:prstDash val="solid"/>
           </a:ln>
         </p:spPr>
+        <p:txBody>
+          <a:bodyPr/>
+          <a:lstStyle/>
+          <a:p>
+            <a:endParaRPr lang="en-US"/>
+          </a:p>
+        </p:txBody>
       </p:sp>
       <p:sp>
         <p:nvSpPr>
@@ -6246,6 +6158,13 @@
             <a:prstDash val="solid"/>
           </a:ln>
         </p:spPr>
+        <p:txBody>
+          <a:bodyPr/>
+          <a:lstStyle/>
+          <a:p>
+            <a:endParaRPr lang="en-US"/>
+          </a:p>
+        </p:txBody>
       </p:sp>
       <p:sp>
         <p:nvSpPr>
@@ -6268,7 +6187,7 @@
           <a:bodyPr wrap="square" lIns="0" tIns="0" rIns="0" bIns="0" rtlCol="0" anchor="ctr"/>
           <a:lstStyle/>
           <a:p>
-            <a:pPr indent="0" marL="0">
+            <a:pPr marL="0" indent="0">
               <a:buNone/>
             </a:pPr>
             <a:r>
@@ -6307,6 +6226,13 @@
             <a:prstDash val="solid"/>
           </a:ln>
         </p:spPr>
+        <p:txBody>
+          <a:bodyPr/>
+          <a:lstStyle/>
+          <a:p>
+            <a:endParaRPr lang="en-US"/>
+          </a:p>
+        </p:txBody>
       </p:sp>
       <p:sp>
         <p:nvSpPr>
@@ -6332,6 +6258,13 @@
             <a:prstDash val="solid"/>
           </a:ln>
         </p:spPr>
+        <p:txBody>
+          <a:bodyPr/>
+          <a:lstStyle/>
+          <a:p>
+            <a:endParaRPr lang="en-US"/>
+          </a:p>
+        </p:txBody>
       </p:sp>
       <p:sp>
         <p:nvSpPr>
@@ -6354,7 +6287,7 @@
           <a:bodyPr wrap="square" lIns="0" tIns="0" rIns="0" bIns="0" rtlCol="0" anchor="ctr"/>
           <a:lstStyle/>
           <a:p>
-            <a:pPr indent="0" marL="0">
+            <a:pPr marL="0" indent="0">
               <a:buNone/>
             </a:pPr>
             <a:r>
@@ -6393,6 +6326,13 @@
             <a:prstDash val="solid"/>
           </a:ln>
         </p:spPr>
+        <p:txBody>
+          <a:bodyPr/>
+          <a:lstStyle/>
+          <a:p>
+            <a:endParaRPr lang="en-US"/>
+          </a:p>
+        </p:txBody>
       </p:sp>
       <p:sp>
         <p:nvSpPr>
@@ -6418,6 +6358,13 @@
             <a:prstDash val="solid"/>
           </a:ln>
         </p:spPr>
+        <p:txBody>
+          <a:bodyPr/>
+          <a:lstStyle/>
+          <a:p>
+            <a:endParaRPr lang="en-US"/>
+          </a:p>
+        </p:txBody>
       </p:sp>
       <p:sp>
         <p:nvSpPr>
@@ -6440,7 +6387,7 @@
           <a:bodyPr wrap="square" lIns="0" tIns="0" rIns="0" bIns="0" rtlCol="0" anchor="ctr"/>
           <a:lstStyle/>
           <a:p>
-            <a:pPr indent="0" marL="0">
+            <a:pPr marL="0" indent="0">
               <a:buNone/>
             </a:pPr>
             <a:r>
@@ -6479,6 +6426,13 @@
             <a:prstDash val="solid"/>
           </a:ln>
         </p:spPr>
+        <p:txBody>
+          <a:bodyPr/>
+          <a:lstStyle/>
+          <a:p>
+            <a:endParaRPr lang="en-US"/>
+          </a:p>
+        </p:txBody>
       </p:sp>
       <p:sp>
         <p:nvSpPr>
@@ -6504,6 +6458,13 @@
             <a:prstDash val="solid"/>
           </a:ln>
         </p:spPr>
+        <p:txBody>
+          <a:bodyPr/>
+          <a:lstStyle/>
+          <a:p>
+            <a:endParaRPr lang="en-US"/>
+          </a:p>
+        </p:txBody>
       </p:sp>
       <p:sp>
         <p:nvSpPr>
@@ -6526,7 +6487,7 @@
           <a:bodyPr wrap="square" lIns="0" tIns="0" rIns="0" bIns="0" rtlCol="0" anchor="ctr"/>
           <a:lstStyle/>
           <a:p>
-            <a:pPr indent="0" marL="0">
+            <a:pPr marL="0" indent="0">
               <a:buNone/>
             </a:pPr>
             <a:r>
@@ -6565,6 +6526,13 @@
             <a:prstDash val="solid"/>
           </a:ln>
         </p:spPr>
+        <p:txBody>
+          <a:bodyPr/>
+          <a:lstStyle/>
+          <a:p>
+            <a:endParaRPr lang="en-US"/>
+          </a:p>
+        </p:txBody>
       </p:sp>
       <p:sp>
         <p:nvSpPr>
@@ -6587,7 +6555,7 @@
           <a:bodyPr wrap="square" lIns="0" tIns="0" rIns="0" bIns="0" rtlCol="0" anchor="ctr"/>
           <a:lstStyle/>
           <a:p>
-            <a:pPr algn="ctr" indent="0" marL="0">
+            <a:pPr marL="0" indent="0" algn="ctr">
               <a:buNone/>
             </a:pPr>
             <a:r>
@@ -6623,7 +6591,7 @@
           <a:bodyPr wrap="square" lIns="0" tIns="0" rIns="0" bIns="0" rtlCol="0" anchor="ctr"/>
           <a:lstStyle/>
           <a:p>
-            <a:pPr algn="ctr" indent="0" marL="0">
+            <a:pPr marL="0" indent="0" algn="ctr">
               <a:buNone/>
             </a:pPr>
             <a:r>
@@ -6662,13 +6630,20 @@
             <a:prstDash val="solid"/>
           </a:ln>
           <a:effectLst>
-            <a:outerShdw sx="100000" sy="100000" kx="0" ky="0" algn="bl" rotWithShape="0" blurRad="101600" dist="25400" dir="8100000">
+            <a:outerShdw blurRad="101600" dist="25400" dir="8100000" algn="bl" rotWithShape="0">
               <a:srgbClr val="000000">
                 <a:alpha val="10000"/>
               </a:srgbClr>
             </a:outerShdw>
           </a:effectLst>
         </p:spPr>
+        <p:txBody>
+          <a:bodyPr/>
+          <a:lstStyle/>
+          <a:p>
+            <a:endParaRPr lang="en-US"/>
+          </a:p>
+        </p:txBody>
       </p:sp>
       <p:sp>
         <p:nvSpPr>
@@ -6691,7 +6666,7 @@
           <a:bodyPr wrap="square" lIns="0" tIns="0" rIns="0" bIns="0" rtlCol="0" anchor="ctr"/>
           <a:lstStyle/>
           <a:p>
-            <a:pPr algn="ctr" indent="0" marL="0">
+            <a:pPr marL="0" indent="0" algn="ctr">
               <a:buNone/>
             </a:pPr>
             <a:r>
@@ -6730,6 +6705,13 @@
             <a:prstDash val="solid"/>
           </a:ln>
         </p:spPr>
+        <p:txBody>
+          <a:bodyPr/>
+          <a:lstStyle/>
+          <a:p>
+            <a:endParaRPr lang="en-US"/>
+          </a:p>
+        </p:txBody>
       </p:sp>
       <p:sp>
         <p:nvSpPr>
@@ -6755,6 +6737,13 @@
             <a:prstDash val="solid"/>
           </a:ln>
         </p:spPr>
+        <p:txBody>
+          <a:bodyPr/>
+          <a:lstStyle/>
+          <a:p>
+            <a:endParaRPr lang="en-US"/>
+          </a:p>
+        </p:txBody>
       </p:sp>
       <p:sp>
         <p:nvSpPr>
@@ -6777,7 +6766,7 @@
           <a:bodyPr wrap="square" lIns="0" tIns="0" rIns="0" bIns="0" rtlCol="0" anchor="ctr"/>
           <a:lstStyle/>
           <a:p>
-            <a:pPr indent="0" marL="0">
+            <a:pPr marL="0" indent="0">
               <a:buNone/>
             </a:pPr>
             <a:r>
@@ -6816,6 +6805,13 @@
             <a:prstDash val="solid"/>
           </a:ln>
         </p:spPr>
+        <p:txBody>
+          <a:bodyPr/>
+          <a:lstStyle/>
+          <a:p>
+            <a:endParaRPr lang="en-US"/>
+          </a:p>
+        </p:txBody>
       </p:sp>
       <p:sp>
         <p:nvSpPr>
@@ -6841,6 +6837,13 @@
             <a:prstDash val="solid"/>
           </a:ln>
         </p:spPr>
+        <p:txBody>
+          <a:bodyPr/>
+          <a:lstStyle/>
+          <a:p>
+            <a:endParaRPr lang="en-US"/>
+          </a:p>
+        </p:txBody>
       </p:sp>
       <p:sp>
         <p:nvSpPr>
@@ -6863,7 +6866,7 @@
           <a:bodyPr wrap="square" lIns="0" tIns="0" rIns="0" bIns="0" rtlCol="0" anchor="ctr"/>
           <a:lstStyle/>
           <a:p>
-            <a:pPr indent="0" marL="0">
+            <a:pPr marL="0" indent="0">
               <a:buNone/>
             </a:pPr>
             <a:r>
@@ -6902,6 +6905,13 @@
             <a:prstDash val="solid"/>
           </a:ln>
         </p:spPr>
+        <p:txBody>
+          <a:bodyPr/>
+          <a:lstStyle/>
+          <a:p>
+            <a:endParaRPr lang="en-US"/>
+          </a:p>
+        </p:txBody>
       </p:sp>
       <p:sp>
         <p:nvSpPr>
@@ -6927,6 +6937,13 @@
             <a:prstDash val="solid"/>
           </a:ln>
         </p:spPr>
+        <p:txBody>
+          <a:bodyPr/>
+          <a:lstStyle/>
+          <a:p>
+            <a:endParaRPr lang="en-US"/>
+          </a:p>
+        </p:txBody>
       </p:sp>
       <p:sp>
         <p:nvSpPr>
@@ -6949,7 +6966,7 @@
           <a:bodyPr wrap="square" lIns="0" tIns="0" rIns="0" bIns="0" rtlCol="0" anchor="ctr"/>
           <a:lstStyle/>
           <a:p>
-            <a:pPr indent="0" marL="0">
+            <a:pPr marL="0" indent="0">
               <a:buNone/>
             </a:pPr>
             <a:r>
@@ -6988,6 +7005,13 @@
             <a:prstDash val="solid"/>
           </a:ln>
         </p:spPr>
+        <p:txBody>
+          <a:bodyPr/>
+          <a:lstStyle/>
+          <a:p>
+            <a:endParaRPr lang="en-US"/>
+          </a:p>
+        </p:txBody>
       </p:sp>
       <p:sp>
         <p:nvSpPr>
@@ -7013,6 +7037,13 @@
             <a:prstDash val="solid"/>
           </a:ln>
         </p:spPr>
+        <p:txBody>
+          <a:bodyPr/>
+          <a:lstStyle/>
+          <a:p>
+            <a:endParaRPr lang="en-US"/>
+          </a:p>
+        </p:txBody>
       </p:sp>
       <p:sp>
         <p:nvSpPr>
@@ -7035,7 +7066,7 @@
           <a:bodyPr wrap="square" lIns="0" tIns="0" rIns="0" bIns="0" rtlCol="0" anchor="ctr"/>
           <a:lstStyle/>
           <a:p>
-            <a:pPr indent="0" marL="0">
+            <a:pPr marL="0" indent="0">
               <a:buNone/>
             </a:pPr>
             <a:r>
@@ -7074,6 +7105,13 @@
             <a:prstDash val="solid"/>
           </a:ln>
         </p:spPr>
+        <p:txBody>
+          <a:bodyPr/>
+          <a:lstStyle/>
+          <a:p>
+            <a:endParaRPr lang="en-US"/>
+          </a:p>
+        </p:txBody>
       </p:sp>
       <p:sp>
         <p:nvSpPr>
@@ -7099,6 +7137,13 @@
             <a:prstDash val="solid"/>
           </a:ln>
         </p:spPr>
+        <p:txBody>
+          <a:bodyPr/>
+          <a:lstStyle/>
+          <a:p>
+            <a:endParaRPr lang="en-US"/>
+          </a:p>
+        </p:txBody>
       </p:sp>
       <p:sp>
         <p:nvSpPr>
@@ -7121,7 +7166,7 @@
           <a:bodyPr wrap="square" lIns="0" tIns="0" rIns="0" bIns="0" rtlCol="0" anchor="ctr"/>
           <a:lstStyle/>
           <a:p>
-            <a:pPr indent="0" marL="0">
+            <a:pPr marL="0" indent="0">
               <a:buNone/>
             </a:pPr>
             <a:r>
@@ -7160,6 +7205,13 @@
             <a:prstDash val="solid"/>
           </a:ln>
         </p:spPr>
+        <p:txBody>
+          <a:bodyPr/>
+          <a:lstStyle/>
+          <a:p>
+            <a:endParaRPr lang="en-US"/>
+          </a:p>
+        </p:txBody>
       </p:sp>
       <p:sp>
         <p:nvSpPr>
@@ -7185,6 +7237,13 @@
             <a:prstDash val="solid"/>
           </a:ln>
         </p:spPr>
+        <p:txBody>
+          <a:bodyPr/>
+          <a:lstStyle/>
+          <a:p>
+            <a:endParaRPr lang="en-US"/>
+          </a:p>
+        </p:txBody>
       </p:sp>
       <p:sp>
         <p:nvSpPr>
@@ -7207,7 +7266,7 @@
           <a:bodyPr wrap="square" lIns="0" tIns="0" rIns="0" bIns="0" rtlCol="0" anchor="ctr"/>
           <a:lstStyle/>
           <a:p>
-            <a:pPr indent="0" marL="0">
+            <a:pPr marL="0" indent="0">
               <a:buNone/>
             </a:pPr>
             <a:r>
@@ -7246,6 +7305,13 @@
             <a:prstDash val="solid"/>
           </a:ln>
         </p:spPr>
+        <p:txBody>
+          <a:bodyPr/>
+          <a:lstStyle/>
+          <a:p>
+            <a:endParaRPr lang="en-US"/>
+          </a:p>
+        </p:txBody>
       </p:sp>
       <p:sp>
         <p:nvSpPr>
@@ -7268,7 +7334,7 @@
           <a:bodyPr wrap="square" lIns="0" tIns="0" rIns="0" bIns="0" rtlCol="0" anchor="ctr"/>
           <a:lstStyle/>
           <a:p>
-            <a:pPr algn="ctr" indent="0" marL="0">
+            <a:pPr marL="0" indent="0" algn="ctr">
               <a:buNone/>
             </a:pPr>
             <a:r>
@@ -7304,7 +7370,7 @@
           <a:bodyPr wrap="square" lIns="0" tIns="0" rIns="0" bIns="0" rtlCol="0" anchor="ctr"/>
           <a:lstStyle/>
           <a:p>
-            <a:pPr algn="ctr" indent="0" marL="0">
+            <a:pPr marL="0" indent="0" algn="ctr">
               <a:buNone/>
             </a:pPr>
             <a:r>
@@ -7343,13 +7409,20 @@
             <a:prstDash val="solid"/>
           </a:ln>
           <a:effectLst>
-            <a:outerShdw sx="100000" sy="100000" kx="0" ky="0" algn="bl" rotWithShape="0" blurRad="101600" dist="25400" dir="8100000">
+            <a:outerShdw blurRad="101600" dist="25400" dir="8100000" algn="bl" rotWithShape="0">
               <a:srgbClr val="000000">
                 <a:alpha val="10000"/>
               </a:srgbClr>
             </a:outerShdw>
           </a:effectLst>
         </p:spPr>
+        <p:txBody>
+          <a:bodyPr/>
+          <a:lstStyle/>
+          <a:p>
+            <a:endParaRPr lang="en-US"/>
+          </a:p>
+        </p:txBody>
       </p:sp>
       <p:sp>
         <p:nvSpPr>
@@ -7372,7 +7445,7 @@
           <a:bodyPr wrap="square" lIns="0" tIns="0" rIns="0" bIns="0" rtlCol="0" anchor="ctr"/>
           <a:lstStyle/>
           <a:p>
-            <a:pPr algn="ctr" indent="0" marL="0">
+            <a:pPr marL="0" indent="0" algn="ctr">
               <a:buNone/>
             </a:pPr>
             <a:r>
@@ -7411,6 +7484,13 @@
             <a:prstDash val="solid"/>
           </a:ln>
         </p:spPr>
+        <p:txBody>
+          <a:bodyPr/>
+          <a:lstStyle/>
+          <a:p>
+            <a:endParaRPr lang="en-US"/>
+          </a:p>
+        </p:txBody>
       </p:sp>
       <p:sp>
         <p:nvSpPr>
@@ -7436,6 +7516,13 @@
             <a:prstDash val="solid"/>
           </a:ln>
         </p:spPr>
+        <p:txBody>
+          <a:bodyPr/>
+          <a:lstStyle/>
+          <a:p>
+            <a:endParaRPr lang="en-US"/>
+          </a:p>
+        </p:txBody>
       </p:sp>
       <p:sp>
         <p:nvSpPr>
@@ -7458,7 +7545,7 @@
           <a:bodyPr wrap="square" lIns="0" tIns="0" rIns="0" bIns="0" rtlCol="0" anchor="ctr"/>
           <a:lstStyle/>
           <a:p>
-            <a:pPr indent="0" marL="0">
+            <a:pPr marL="0" indent="0">
               <a:buNone/>
             </a:pPr>
             <a:r>
@@ -7497,6 +7584,13 @@
             <a:prstDash val="solid"/>
           </a:ln>
         </p:spPr>
+        <p:txBody>
+          <a:bodyPr/>
+          <a:lstStyle/>
+          <a:p>
+            <a:endParaRPr lang="en-US"/>
+          </a:p>
+        </p:txBody>
       </p:sp>
       <p:sp>
         <p:nvSpPr>
@@ -7522,6 +7616,13 @@
             <a:prstDash val="solid"/>
           </a:ln>
         </p:spPr>
+        <p:txBody>
+          <a:bodyPr/>
+          <a:lstStyle/>
+          <a:p>
+            <a:endParaRPr lang="en-US"/>
+          </a:p>
+        </p:txBody>
       </p:sp>
       <p:sp>
         <p:nvSpPr>
@@ -7544,7 +7645,7 @@
           <a:bodyPr wrap="square" lIns="0" tIns="0" rIns="0" bIns="0" rtlCol="0" anchor="ctr"/>
           <a:lstStyle/>
           <a:p>
-            <a:pPr indent="0" marL="0">
+            <a:pPr marL="0" indent="0">
               <a:buNone/>
             </a:pPr>
             <a:r>
@@ -7583,6 +7684,13 @@
             <a:prstDash val="solid"/>
           </a:ln>
         </p:spPr>
+        <p:txBody>
+          <a:bodyPr/>
+          <a:lstStyle/>
+          <a:p>
+            <a:endParaRPr lang="en-US"/>
+          </a:p>
+        </p:txBody>
       </p:sp>
       <p:sp>
         <p:nvSpPr>
@@ -7608,6 +7716,13 @@
             <a:prstDash val="solid"/>
           </a:ln>
         </p:spPr>
+        <p:txBody>
+          <a:bodyPr/>
+          <a:lstStyle/>
+          <a:p>
+            <a:endParaRPr lang="en-US"/>
+          </a:p>
+        </p:txBody>
       </p:sp>
       <p:sp>
         <p:nvSpPr>
@@ -7630,7 +7745,7 @@
           <a:bodyPr wrap="square" lIns="0" tIns="0" rIns="0" bIns="0" rtlCol="0" anchor="ctr"/>
           <a:lstStyle/>
           <a:p>
-            <a:pPr indent="0" marL="0">
+            <a:pPr marL="0" indent="0">
               <a:buNone/>
             </a:pPr>
             <a:r>
@@ -7669,6 +7784,13 @@
             <a:prstDash val="solid"/>
           </a:ln>
         </p:spPr>
+        <p:txBody>
+          <a:bodyPr/>
+          <a:lstStyle/>
+          <a:p>
+            <a:endParaRPr lang="en-US"/>
+          </a:p>
+        </p:txBody>
       </p:sp>
       <p:sp>
         <p:nvSpPr>
@@ -7694,6 +7816,13 @@
             <a:prstDash val="solid"/>
           </a:ln>
         </p:spPr>
+        <p:txBody>
+          <a:bodyPr/>
+          <a:lstStyle/>
+          <a:p>
+            <a:endParaRPr lang="en-US"/>
+          </a:p>
+        </p:txBody>
       </p:sp>
       <p:sp>
         <p:nvSpPr>
@@ -7716,7 +7845,7 @@
           <a:bodyPr wrap="square" lIns="0" tIns="0" rIns="0" bIns="0" rtlCol="0" anchor="ctr"/>
           <a:lstStyle/>
           <a:p>
-            <a:pPr indent="0" marL="0">
+            <a:pPr marL="0" indent="0">
               <a:buNone/>
             </a:pPr>
             <a:r>
@@ -7755,6 +7884,13 @@
             <a:prstDash val="solid"/>
           </a:ln>
         </p:spPr>
+        <p:txBody>
+          <a:bodyPr/>
+          <a:lstStyle/>
+          <a:p>
+            <a:endParaRPr lang="en-US"/>
+          </a:p>
+        </p:txBody>
       </p:sp>
       <p:sp>
         <p:nvSpPr>
@@ -7780,6 +7916,13 @@
             <a:prstDash val="solid"/>
           </a:ln>
         </p:spPr>
+        <p:txBody>
+          <a:bodyPr/>
+          <a:lstStyle/>
+          <a:p>
+            <a:endParaRPr lang="en-US"/>
+          </a:p>
+        </p:txBody>
       </p:sp>
       <p:sp>
         <p:nvSpPr>
@@ -7802,7 +7945,7 @@
           <a:bodyPr wrap="square" lIns="0" tIns="0" rIns="0" bIns="0" rtlCol="0" anchor="ctr"/>
           <a:lstStyle/>
           <a:p>
-            <a:pPr indent="0" marL="0">
+            <a:pPr marL="0" indent="0">
               <a:buNone/>
             </a:pPr>
             <a:r>
@@ -7841,6 +7984,13 @@
             <a:prstDash val="solid"/>
           </a:ln>
         </p:spPr>
+        <p:txBody>
+          <a:bodyPr/>
+          <a:lstStyle/>
+          <a:p>
+            <a:endParaRPr lang="en-US"/>
+          </a:p>
+        </p:txBody>
       </p:sp>
       <p:sp>
         <p:nvSpPr>
@@ -7866,6 +8016,13 @@
             <a:prstDash val="solid"/>
           </a:ln>
         </p:spPr>
+        <p:txBody>
+          <a:bodyPr/>
+          <a:lstStyle/>
+          <a:p>
+            <a:endParaRPr lang="en-US"/>
+          </a:p>
+        </p:txBody>
       </p:sp>
       <p:sp>
         <p:nvSpPr>
@@ -7888,7 +8045,7 @@
           <a:bodyPr wrap="square" lIns="0" tIns="0" rIns="0" bIns="0" rtlCol="0" anchor="ctr"/>
           <a:lstStyle/>
           <a:p>
-            <a:pPr indent="0" marL="0">
+            <a:pPr marL="0" indent="0">
               <a:buNone/>
             </a:pPr>
             <a:r>
@@ -7919,6 +8076,7 @@
         <a:solidFill>
           <a:srgbClr val="0F2D40"/>
         </a:solidFill>
+        <a:effectLst/>
       </p:bgPr>
     </p:bg>
     <p:spTree>
@@ -7959,6 +8117,13 @@
             <a:prstDash val="solid"/>
           </a:ln>
         </p:spPr>
+        <p:txBody>
+          <a:bodyPr/>
+          <a:lstStyle/>
+          <a:p>
+            <a:endParaRPr lang="en-US"/>
+          </a:p>
+        </p:txBody>
       </p:sp>
       <p:sp>
         <p:nvSpPr>
@@ -7988,6 +8153,13 @@
             <a:prstDash val="solid"/>
           </a:ln>
         </p:spPr>
+        <p:txBody>
+          <a:bodyPr/>
+          <a:lstStyle/>
+          <a:p>
+            <a:endParaRPr lang="en-US"/>
+          </a:p>
+        </p:txBody>
       </p:sp>
       <p:sp>
         <p:nvSpPr>
@@ -8010,7 +8182,7 @@
           <a:bodyPr wrap="square" lIns="0" tIns="0" rIns="0" bIns="0" rtlCol="0" anchor="ctr"/>
           <a:lstStyle/>
           <a:p>
-            <a:pPr indent="0" marL="0">
+            <a:pPr marL="0" indent="0">
               <a:buNone/>
             </a:pPr>
             <a:r>
@@ -8046,7 +8218,7 @@
           <a:bodyPr wrap="square" lIns="0" tIns="0" rIns="0" bIns="0" rtlCol="0" anchor="ctr"/>
           <a:lstStyle/>
           <a:p>
-            <a:pPr indent="0" marL="0">
+            <a:pPr marL="0" indent="0">
               <a:buNone/>
             </a:pPr>
             <a:r>
@@ -8057,9 +8229,6 @@
               </a:rPr>
               <a:t>A score of </a:t>
             </a:r>
-            <a:pPr indent="0" marL="0">
-              <a:buNone/>
-            </a:pPr>
             <a:r>
               <a:rPr lang="en-US" sz="1300" b="1" dirty="0">
                 <a:solidFill>
@@ -8068,9 +8237,6 @@
               </a:rPr>
               <a:t>23/100</a:t>
             </a:r>
-            <a:pPr indent="0" marL="0">
-              <a:buNone/>
-            </a:pPr>
             <a:r>
               <a:rPr lang="en-US" sz="1300" dirty="0">
                 <a:solidFill>
@@ -8079,9 +8245,6 @@
               </a:rPr>
               <a:t> sounds alarming — but this site's low score is almost entirely driven by </a:t>
             </a:r>
-            <a:pPr indent="0" marL="0">
-              <a:buNone/>
-            </a:pPr>
             <a:r>
               <a:rPr lang="en-US" sz="1300" b="1" dirty="0">
                 <a:solidFill>
@@ -8090,9 +8253,6 @@
               </a:rPr>
               <a:t>missing technical configuration and content structure</a:t>
             </a:r>
-            <a:pPr indent="0" marL="0">
-              <a:buNone/>
-            </a:pPr>
             <a:r>
               <a:rPr lang="en-US" sz="1300" dirty="0">
                 <a:solidFill>
@@ -8126,7 +8286,7 @@
           <a:bodyPr wrap="square" lIns="0" tIns="0" rIns="0" bIns="0" rtlCol="0" anchor="ctr"/>
           <a:lstStyle/>
           <a:p>
-            <a:pPr indent="0" marL="0">
+            <a:pPr marL="0" indent="0">
               <a:buNone/>
             </a:pPr>
             <a:r>
@@ -8165,6 +8325,13 @@
             <a:prstDash val="solid"/>
           </a:ln>
         </p:spPr>
+        <p:txBody>
+          <a:bodyPr/>
+          <a:lstStyle/>
+          <a:p>
+            <a:endParaRPr lang="en-US"/>
+          </a:p>
+        </p:txBody>
       </p:sp>
       <p:sp>
         <p:nvSpPr>
@@ -8190,6 +8357,13 @@
             <a:prstDash val="solid"/>
           </a:ln>
         </p:spPr>
+        <p:txBody>
+          <a:bodyPr/>
+          <a:lstStyle/>
+          <a:p>
+            <a:endParaRPr lang="en-US"/>
+          </a:p>
+        </p:txBody>
       </p:sp>
       <p:sp>
         <p:nvSpPr>
@@ -8212,7 +8386,7 @@
           <a:bodyPr wrap="square" lIns="0" tIns="0" rIns="0" bIns="0" rtlCol="0" anchor="ctr"/>
           <a:lstStyle/>
           <a:p>
-            <a:pPr algn="ctr" indent="0" marL="0">
+            <a:pPr marL="0" indent="0" algn="ctr">
               <a:buNone/>
             </a:pPr>
             <a:r>
@@ -8248,7 +8422,7 @@
           <a:bodyPr wrap="square" lIns="0" tIns="0" rIns="0" bIns="0" rtlCol="0" anchor="ctr"/>
           <a:lstStyle/>
           <a:p>
-            <a:pPr algn="ctr" indent="0" marL="0">
+            <a:pPr marL="0" indent="0" algn="ctr">
               <a:buNone/>
             </a:pPr>
             <a:r>
@@ -8284,7 +8458,7 @@
           <a:bodyPr wrap="square" lIns="0" tIns="0" rIns="0" bIns="0" rtlCol="0" anchor="ctr"/>
           <a:lstStyle/>
           <a:p>
-            <a:pPr algn="ctr" indent="0" marL="0">
+            <a:pPr marL="0" indent="0" algn="ctr">
               <a:buNone/>
             </a:pPr>
             <a:r>
@@ -8323,6 +8497,13 @@
             <a:prstDash val="solid"/>
           </a:ln>
         </p:spPr>
+        <p:txBody>
+          <a:bodyPr/>
+          <a:lstStyle/>
+          <a:p>
+            <a:endParaRPr lang="en-US"/>
+          </a:p>
+        </p:txBody>
       </p:sp>
       <p:sp>
         <p:nvSpPr>
@@ -8348,6 +8529,13 @@
             <a:prstDash val="solid"/>
           </a:ln>
         </p:spPr>
+        <p:txBody>
+          <a:bodyPr/>
+          <a:lstStyle/>
+          <a:p>
+            <a:endParaRPr lang="en-US"/>
+          </a:p>
+        </p:txBody>
       </p:sp>
       <p:sp>
         <p:nvSpPr>
@@ -8370,7 +8558,7 @@
           <a:bodyPr wrap="square" lIns="0" tIns="0" rIns="0" bIns="0" rtlCol="0" anchor="ctr"/>
           <a:lstStyle/>
           <a:p>
-            <a:pPr algn="ctr" indent="0" marL="0">
+            <a:pPr marL="0" indent="0" algn="ctr">
               <a:buNone/>
             </a:pPr>
             <a:r>
@@ -8406,7 +8594,7 @@
           <a:bodyPr wrap="square" lIns="0" tIns="0" rIns="0" bIns="0" rtlCol="0" anchor="ctr"/>
           <a:lstStyle/>
           <a:p>
-            <a:pPr algn="ctr" indent="0" marL="0">
+            <a:pPr marL="0" indent="0" algn="ctr">
               <a:buNone/>
             </a:pPr>
             <a:r>
@@ -8442,7 +8630,7 @@
           <a:bodyPr wrap="square" lIns="0" tIns="0" rIns="0" bIns="0" rtlCol="0" anchor="ctr"/>
           <a:lstStyle/>
           <a:p>
-            <a:pPr algn="ctr" indent="0" marL="0">
+            <a:pPr marL="0" indent="0" algn="ctr">
               <a:buNone/>
             </a:pPr>
             <a:r>
@@ -8481,6 +8669,13 @@
             <a:prstDash val="solid"/>
           </a:ln>
         </p:spPr>
+        <p:txBody>
+          <a:bodyPr/>
+          <a:lstStyle/>
+          <a:p>
+            <a:endParaRPr lang="en-US"/>
+          </a:p>
+        </p:txBody>
       </p:sp>
       <p:sp>
         <p:nvSpPr>
@@ -8506,6 +8701,13 @@
             <a:prstDash val="solid"/>
           </a:ln>
         </p:spPr>
+        <p:txBody>
+          <a:bodyPr/>
+          <a:lstStyle/>
+          <a:p>
+            <a:endParaRPr lang="en-US"/>
+          </a:p>
+        </p:txBody>
       </p:sp>
       <p:sp>
         <p:nvSpPr>
@@ -8528,7 +8730,7 @@
           <a:bodyPr wrap="square" lIns="0" tIns="0" rIns="0" bIns="0" rtlCol="0" anchor="ctr"/>
           <a:lstStyle/>
           <a:p>
-            <a:pPr algn="ctr" indent="0" marL="0">
+            <a:pPr marL="0" indent="0" algn="ctr">
               <a:buNone/>
             </a:pPr>
             <a:r>
@@ -8564,7 +8766,7 @@
           <a:bodyPr wrap="square" lIns="0" tIns="0" rIns="0" bIns="0" rtlCol="0" anchor="ctr"/>
           <a:lstStyle/>
           <a:p>
-            <a:pPr algn="ctr" indent="0" marL="0">
+            <a:pPr marL="0" indent="0" algn="ctr">
               <a:buNone/>
             </a:pPr>
             <a:r>
@@ -8600,7 +8802,7 @@
           <a:bodyPr wrap="square" lIns="0" tIns="0" rIns="0" bIns="0" rtlCol="0" anchor="ctr"/>
           <a:lstStyle/>
           <a:p>
-            <a:pPr algn="ctr" indent="0" marL="0">
+            <a:pPr marL="0" indent="0" algn="ctr">
               <a:buNone/>
             </a:pPr>
             <a:r>
@@ -8636,7 +8838,7 @@
           <a:bodyPr wrap="square" lIns="0" tIns="0" rIns="0" bIns="0" rtlCol="0" anchor="ctr"/>
           <a:lstStyle/>
           <a:p>
-            <a:pPr indent="0" marL="0">
+            <a:pPr marL="0" indent="0">
               <a:buNone/>
             </a:pPr>
             <a:r>
@@ -8667,6 +8869,7 @@
         <a:solidFill>
           <a:srgbClr val="F0FDFA"/>
         </a:solidFill>
+        <a:effectLst/>
       </p:bgPr>
     </p:bg>
     <p:spTree>
@@ -8707,6 +8910,13 @@
             <a:prstDash val="solid"/>
           </a:ln>
         </p:spPr>
+        <p:txBody>
+          <a:bodyPr/>
+          <a:lstStyle/>
+          <a:p>
+            <a:endParaRPr lang="en-US"/>
+          </a:p>
+        </p:txBody>
       </p:sp>
       <p:sp>
         <p:nvSpPr>
@@ -8729,7 +8939,7 @@
           <a:bodyPr wrap="square" lIns="0" tIns="0" rIns="0" bIns="0" rtlCol="0" anchor="ctr"/>
           <a:lstStyle/>
           <a:p>
-            <a:pPr indent="0" marL="0">
+            <a:pPr marL="0" indent="0">
               <a:buNone/>
             </a:pPr>
             <a:r>
@@ -8768,13 +8978,20 @@
             <a:prstDash val="solid"/>
           </a:ln>
           <a:effectLst>
-            <a:outerShdw sx="100000" sy="100000" kx="0" ky="0" algn="bl" rotWithShape="0" blurRad="101600" dist="25400" dir="8100000">
+            <a:outerShdw blurRad="101600" dist="25400" dir="8100000" algn="bl" rotWithShape="0">
               <a:srgbClr val="000000">
                 <a:alpha val="10000"/>
               </a:srgbClr>
             </a:outerShdw>
           </a:effectLst>
         </p:spPr>
+        <p:txBody>
+          <a:bodyPr/>
+          <a:lstStyle/>
+          <a:p>
+            <a:endParaRPr lang="en-US"/>
+          </a:p>
+        </p:txBody>
       </p:sp>
       <p:sp>
         <p:nvSpPr>
@@ -8797,11 +9014,11 @@
           <a:bodyPr wrap="square" lIns="0" tIns="0" rIns="0" bIns="0" rtlCol="0" anchor="ctr"/>
           <a:lstStyle/>
           <a:p>
-            <a:pPr algn="ctr" indent="0" marL="0">
-              <a:buNone/>
-            </a:pPr>
-            <a:r>
-              <a:rPr lang="en-US" sz="900" b="1" spc="120" kern="0" dirty="0">
+            <a:pPr marL="0" indent="0" algn="ctr">
+              <a:buNone/>
+            </a:pPr>
+            <a:r>
+              <a:rPr lang="en-US" sz="900" b="1" kern="0" spc="120" dirty="0">
                 <a:solidFill>
                   <a:srgbClr val="A0BEC9"/>
                 </a:solidFill>
@@ -8833,7 +9050,7 @@
           <a:bodyPr wrap="square" lIns="0" tIns="0" rIns="0" bIns="0" rtlCol="0" anchor="ctr"/>
           <a:lstStyle/>
           <a:p>
-            <a:pPr algn="ctr" indent="0" marL="0">
+            <a:pPr marL="0" indent="0" algn="ctr">
               <a:buNone/>
             </a:pPr>
             <a:r>
@@ -8869,7 +9086,7 @@
           <a:bodyPr wrap="square" lIns="0" tIns="0" rIns="0" bIns="0" rtlCol="0" anchor="ctr"/>
           <a:lstStyle/>
           <a:p>
-            <a:pPr algn="ctr" indent="0" marL="0">
+            <a:pPr marL="0" indent="0" algn="ctr">
               <a:buNone/>
             </a:pPr>
             <a:r>
@@ -8908,6 +9125,13 @@
             <a:prstDash val="solid"/>
           </a:ln>
         </p:spPr>
+        <p:txBody>
+          <a:bodyPr/>
+          <a:lstStyle/>
+          <a:p>
+            <a:endParaRPr lang="en-US"/>
+          </a:p>
+        </p:txBody>
       </p:sp>
       <p:sp>
         <p:nvSpPr>
@@ -8930,11 +9154,11 @@
           <a:bodyPr wrap="square" lIns="0" tIns="0" rIns="0" bIns="0" rtlCol="0" anchor="ctr"/>
           <a:lstStyle/>
           <a:p>
-            <a:pPr algn="ctr" indent="0" marL="0">
-              <a:buNone/>
-            </a:pPr>
-            <a:r>
-              <a:rPr lang="en-US" sz="1300" b="1" spc="200" kern="0" dirty="0">
+            <a:pPr marL="0" indent="0" algn="ctr">
+              <a:buNone/>
+            </a:pPr>
+            <a:r>
+              <a:rPr lang="en-US" sz="1300" b="1" kern="0" spc="200" dirty="0">
                 <a:solidFill>
                   <a:srgbClr val="FFFFFF"/>
                 </a:solidFill>
@@ -8966,7 +9190,7 @@
           <a:bodyPr wrap="square" lIns="0" tIns="0" rIns="0" bIns="0" rtlCol="0" anchor="ctr"/>
           <a:lstStyle/>
           <a:p>
-            <a:pPr algn="ctr" indent="0" marL="0">
+            <a:pPr marL="0" indent="0" algn="ctr">
               <a:buNone/>
             </a:pPr>
             <a:r>
@@ -9002,7 +9226,7 @@
           <a:bodyPr wrap="square" lIns="0" tIns="0" rIns="0" bIns="0" rtlCol="0" anchor="ctr"/>
           <a:lstStyle/>
           <a:p>
-            <a:pPr algn="ctr" indent="0" marL="0">
+            <a:pPr marL="0" indent="0" algn="ctr">
               <a:buNone/>
             </a:pPr>
             <a:r>
@@ -9041,6 +9265,13 @@
             <a:prstDash val="solid"/>
           </a:ln>
         </p:spPr>
+        <p:txBody>
+          <a:bodyPr/>
+          <a:lstStyle/>
+          <a:p>
+            <a:endParaRPr lang="en-US"/>
+          </a:p>
+        </p:txBody>
       </p:sp>
       <p:sp>
         <p:nvSpPr>
@@ -9066,6 +9297,13 @@
             <a:prstDash val="solid"/>
           </a:ln>
         </p:spPr>
+        <p:txBody>
+          <a:bodyPr/>
+          <a:lstStyle/>
+          <a:p>
+            <a:endParaRPr lang="en-US"/>
+          </a:p>
+        </p:txBody>
       </p:sp>
       <p:sp>
         <p:nvSpPr>
@@ -9088,7 +9326,7 @@
           <a:bodyPr wrap="square" lIns="0" tIns="0" rIns="0" bIns="0" rtlCol="0" anchor="ctr"/>
           <a:lstStyle/>
           <a:p>
-            <a:pPr algn="ctr" indent="0" marL="0">
+            <a:pPr marL="0" indent="0" algn="ctr">
               <a:buNone/>
             </a:pPr>
             <a:r>
@@ -9124,7 +9362,7 @@
           <a:bodyPr wrap="square" lIns="0" tIns="0" rIns="0" bIns="0" rtlCol="0" anchor="ctr"/>
           <a:lstStyle/>
           <a:p>
-            <a:pPr indent="0" marL="0">
+            <a:pPr marL="0" indent="0">
               <a:buNone/>
             </a:pPr>
             <a:r>
@@ -9163,13 +9401,20 @@
             <a:prstDash val="solid"/>
           </a:ln>
           <a:effectLst>
-            <a:outerShdw sx="100000" sy="100000" kx="0" ky="0" algn="bl" rotWithShape="0" blurRad="101600" dist="25400" dir="8100000">
+            <a:outerShdw blurRad="101600" dist="25400" dir="8100000" algn="bl" rotWithShape="0">
               <a:srgbClr val="000000">
                 <a:alpha val="10000"/>
               </a:srgbClr>
             </a:outerShdw>
           </a:effectLst>
         </p:spPr>
+        <p:txBody>
+          <a:bodyPr/>
+          <a:lstStyle/>
+          <a:p>
+            <a:endParaRPr lang="en-US"/>
+          </a:p>
+        </p:txBody>
       </p:sp>
       <p:sp>
         <p:nvSpPr>
@@ -9195,6 +9440,13 @@
             <a:prstDash val="solid"/>
           </a:ln>
         </p:spPr>
+        <p:txBody>
+          <a:bodyPr/>
+          <a:lstStyle/>
+          <a:p>
+            <a:endParaRPr lang="en-US"/>
+          </a:p>
+        </p:txBody>
       </p:sp>
       <p:sp>
         <p:nvSpPr>
@@ -9217,7 +9469,7 @@
           <a:bodyPr wrap="square" lIns="0" tIns="0" rIns="0" bIns="0" rtlCol="0" anchor="ctr"/>
           <a:lstStyle/>
           <a:p>
-            <a:pPr indent="0" marL="0">
+            <a:pPr marL="0" indent="0">
               <a:buNone/>
             </a:pPr>
             <a:r>
@@ -9253,7 +9505,7 @@
           <a:bodyPr wrap="square" lIns="0" tIns="0" rIns="0" bIns="0" rtlCol="0" anchor="ctr"/>
           <a:lstStyle/>
           <a:p>
-            <a:pPr indent="0" marL="0">
+            <a:pPr marL="0" indent="0">
               <a:buNone/>
             </a:pPr>
             <a:r>
@@ -9292,13 +9544,20 @@
             <a:prstDash val="solid"/>
           </a:ln>
           <a:effectLst>
-            <a:outerShdw sx="100000" sy="100000" kx="0" ky="0" algn="bl" rotWithShape="0" blurRad="101600" dist="25400" dir="8100000">
+            <a:outerShdw blurRad="101600" dist="25400" dir="8100000" algn="bl" rotWithShape="0">
               <a:srgbClr val="000000">
                 <a:alpha val="10000"/>
               </a:srgbClr>
             </a:outerShdw>
           </a:effectLst>
         </p:spPr>
+        <p:txBody>
+          <a:bodyPr/>
+          <a:lstStyle/>
+          <a:p>
+            <a:endParaRPr lang="en-US"/>
+          </a:p>
+        </p:txBody>
       </p:sp>
       <p:sp>
         <p:nvSpPr>
@@ -9324,6 +9583,13 @@
             <a:prstDash val="solid"/>
           </a:ln>
         </p:spPr>
+        <p:txBody>
+          <a:bodyPr/>
+          <a:lstStyle/>
+          <a:p>
+            <a:endParaRPr lang="en-US"/>
+          </a:p>
+        </p:txBody>
       </p:sp>
       <p:sp>
         <p:nvSpPr>
@@ -9346,7 +9612,7 @@
           <a:bodyPr wrap="square" lIns="0" tIns="0" rIns="0" bIns="0" rtlCol="0" anchor="ctr"/>
           <a:lstStyle/>
           <a:p>
-            <a:pPr indent="0" marL="0">
+            <a:pPr marL="0" indent="0">
               <a:buNone/>
             </a:pPr>
             <a:r>
@@ -9382,7 +9648,7 @@
           <a:bodyPr wrap="square" lIns="0" tIns="0" rIns="0" bIns="0" rtlCol="0" anchor="ctr"/>
           <a:lstStyle/>
           <a:p>
-            <a:pPr indent="0" marL="0">
+            <a:pPr marL="0" indent="0">
               <a:buNone/>
             </a:pPr>
             <a:r>
@@ -9421,13 +9687,20 @@
             <a:prstDash val="solid"/>
           </a:ln>
           <a:effectLst>
-            <a:outerShdw sx="100000" sy="100000" kx="0" ky="0" algn="bl" rotWithShape="0" blurRad="101600" dist="25400" dir="8100000">
+            <a:outerShdw blurRad="101600" dist="25400" dir="8100000" algn="bl" rotWithShape="0">
               <a:srgbClr val="000000">
                 <a:alpha val="10000"/>
               </a:srgbClr>
             </a:outerShdw>
           </a:effectLst>
         </p:spPr>
+        <p:txBody>
+          <a:bodyPr/>
+          <a:lstStyle/>
+          <a:p>
+            <a:endParaRPr lang="en-US"/>
+          </a:p>
+        </p:txBody>
       </p:sp>
       <p:sp>
         <p:nvSpPr>
@@ -9453,6 +9726,13 @@
             <a:prstDash val="solid"/>
           </a:ln>
         </p:spPr>
+        <p:txBody>
+          <a:bodyPr/>
+          <a:lstStyle/>
+          <a:p>
+            <a:endParaRPr lang="en-US"/>
+          </a:p>
+        </p:txBody>
       </p:sp>
       <p:sp>
         <p:nvSpPr>
@@ -9475,7 +9755,7 @@
           <a:bodyPr wrap="square" lIns="0" tIns="0" rIns="0" bIns="0" rtlCol="0" anchor="ctr"/>
           <a:lstStyle/>
           <a:p>
-            <a:pPr indent="0" marL="0">
+            <a:pPr marL="0" indent="0">
               <a:buNone/>
             </a:pPr>
             <a:r>
@@ -9511,7 +9791,7 @@
           <a:bodyPr wrap="square" lIns="0" tIns="0" rIns="0" bIns="0" rtlCol="0" anchor="ctr"/>
           <a:lstStyle/>
           <a:p>
-            <a:pPr indent="0" marL="0">
+            <a:pPr marL="0" indent="0">
               <a:buNone/>
             </a:pPr>
             <a:r>
@@ -9550,13 +9830,20 @@
             <a:prstDash val="solid"/>
           </a:ln>
           <a:effectLst>
-            <a:outerShdw sx="100000" sy="100000" kx="0" ky="0" algn="bl" rotWithShape="0" blurRad="101600" dist="25400" dir="8100000">
+            <a:outerShdw blurRad="101600" dist="25400" dir="8100000" algn="bl" rotWithShape="0">
               <a:srgbClr val="000000">
                 <a:alpha val="10000"/>
               </a:srgbClr>
             </a:outerShdw>
           </a:effectLst>
         </p:spPr>
+        <p:txBody>
+          <a:bodyPr/>
+          <a:lstStyle/>
+          <a:p>
+            <a:endParaRPr lang="en-US"/>
+          </a:p>
+        </p:txBody>
       </p:sp>
       <p:sp>
         <p:nvSpPr>
@@ -9582,6 +9869,13 @@
             <a:prstDash val="solid"/>
           </a:ln>
         </p:spPr>
+        <p:txBody>
+          <a:bodyPr/>
+          <a:lstStyle/>
+          <a:p>
+            <a:endParaRPr lang="en-US"/>
+          </a:p>
+        </p:txBody>
       </p:sp>
       <p:sp>
         <p:nvSpPr>
@@ -9604,7 +9898,7 @@
           <a:bodyPr wrap="square" lIns="0" tIns="0" rIns="0" bIns="0" rtlCol="0" anchor="ctr"/>
           <a:lstStyle/>
           <a:p>
-            <a:pPr indent="0" marL="0">
+            <a:pPr marL="0" indent="0">
               <a:buNone/>
             </a:pPr>
             <a:r>
@@ -9640,7 +9934,7 @@
           <a:bodyPr wrap="square" lIns="0" tIns="0" rIns="0" bIns="0" rtlCol="0" anchor="ctr"/>
           <a:lstStyle/>
           <a:p>
-            <a:pPr indent="0" marL="0">
+            <a:pPr marL="0" indent="0">
               <a:buNone/>
             </a:pPr>
             <a:r>
@@ -9679,13 +9973,20 @@
             <a:prstDash val="solid"/>
           </a:ln>
           <a:effectLst>
-            <a:outerShdw sx="100000" sy="100000" kx="0" ky="0" algn="bl" rotWithShape="0" blurRad="101600" dist="25400" dir="8100000">
+            <a:outerShdw blurRad="101600" dist="25400" dir="8100000" algn="bl" rotWithShape="0">
               <a:srgbClr val="000000">
                 <a:alpha val="10000"/>
               </a:srgbClr>
             </a:outerShdw>
           </a:effectLst>
         </p:spPr>
+        <p:txBody>
+          <a:bodyPr/>
+          <a:lstStyle/>
+          <a:p>
+            <a:endParaRPr lang="en-US"/>
+          </a:p>
+        </p:txBody>
       </p:sp>
       <p:sp>
         <p:nvSpPr>
@@ -9711,6 +10012,13 @@
             <a:prstDash val="solid"/>
           </a:ln>
         </p:spPr>
+        <p:txBody>
+          <a:bodyPr/>
+          <a:lstStyle/>
+          <a:p>
+            <a:endParaRPr lang="en-US"/>
+          </a:p>
+        </p:txBody>
       </p:sp>
       <p:sp>
         <p:nvSpPr>
@@ -9733,7 +10041,7 @@
           <a:bodyPr wrap="square" lIns="0" tIns="0" rIns="0" bIns="0" rtlCol="0" anchor="ctr"/>
           <a:lstStyle/>
           <a:p>
-            <a:pPr indent="0" marL="0">
+            <a:pPr marL="0" indent="0">
               <a:buNone/>
             </a:pPr>
             <a:r>
@@ -9769,7 +10077,7 @@
           <a:bodyPr wrap="square" lIns="0" tIns="0" rIns="0" bIns="0" rtlCol="0" anchor="ctr"/>
           <a:lstStyle/>
           <a:p>
-            <a:pPr indent="0" marL="0">
+            <a:pPr marL="0" indent="0">
               <a:buNone/>
             </a:pPr>
             <a:r>
@@ -9800,6 +10108,7 @@
         <a:solidFill>
           <a:srgbClr val="F0FDFA"/>
         </a:solidFill>
+        <a:effectLst/>
       </p:bgPr>
     </p:bg>
     <p:spTree>
@@ -9840,6 +10149,13 @@
             <a:prstDash val="solid"/>
           </a:ln>
         </p:spPr>
+        <p:txBody>
+          <a:bodyPr/>
+          <a:lstStyle/>
+          <a:p>
+            <a:endParaRPr lang="en-US"/>
+          </a:p>
+        </p:txBody>
       </p:sp>
       <p:sp>
         <p:nvSpPr>
@@ -9862,7 +10178,7 @@
           <a:bodyPr wrap="square" lIns="0" tIns="0" rIns="0" bIns="0" rtlCol="0" anchor="ctr"/>
           <a:lstStyle/>
           <a:p>
-            <a:pPr indent="0" marL="0">
+            <a:pPr marL="0" indent="0">
               <a:buNone/>
             </a:pPr>
             <a:r>
@@ -9898,7 +10214,7 @@
           <a:bodyPr wrap="square" lIns="0" tIns="0" rIns="0" bIns="0" rtlCol="0" anchor="ctr"/>
           <a:lstStyle/>
           <a:p>
-            <a:pPr indent="0" marL="0">
+            <a:pPr marL="0" indent="0">
               <a:buNone/>
             </a:pPr>
             <a:r>
@@ -9934,7 +10250,7 @@
           <a:bodyPr wrap="square" lIns="0" tIns="0" rIns="0" bIns="0" rtlCol="0" anchor="ctr"/>
           <a:lstStyle/>
           <a:p>
-            <a:pPr indent="0" marL="0">
+            <a:pPr marL="0" indent="0">
               <a:buNone/>
             </a:pPr>
             <a:r>
@@ -9970,7 +10286,7 @@
           <a:bodyPr wrap="square" lIns="0" tIns="0" rIns="0" bIns="0" rtlCol="0" anchor="ctr"/>
           <a:lstStyle/>
           <a:p>
-            <a:pPr indent="0" marL="0">
+            <a:pPr marL="0" indent="0">
               <a:buNone/>
             </a:pPr>
             <a:r>
@@ -10009,6 +10325,13 @@
             <a:prstDash val="solid"/>
           </a:ln>
         </p:spPr>
+        <p:txBody>
+          <a:bodyPr/>
+          <a:lstStyle/>
+          <a:p>
+            <a:endParaRPr lang="en-US"/>
+          </a:p>
+        </p:txBody>
       </p:sp>
       <p:sp>
         <p:nvSpPr>
@@ -10034,6 +10357,13 @@
             <a:prstDash val="solid"/>
           </a:ln>
         </p:spPr>
+        <p:txBody>
+          <a:bodyPr/>
+          <a:lstStyle/>
+          <a:p>
+            <a:endParaRPr lang="en-US"/>
+          </a:p>
+        </p:txBody>
       </p:sp>
       <p:sp>
         <p:nvSpPr>
@@ -10056,7 +10386,7 @@
           <a:bodyPr wrap="square" lIns="0" tIns="0" rIns="0" bIns="0" rtlCol="0" anchor="ctr"/>
           <a:lstStyle/>
           <a:p>
-            <a:pPr indent="0" marL="0">
+            <a:pPr marL="0" indent="0">
               <a:buNone/>
             </a:pPr>
             <a:r>
@@ -10092,7 +10422,7 @@
           <a:bodyPr wrap="square" lIns="0" tIns="0" rIns="0" bIns="0" rtlCol="0" anchor="ctr"/>
           <a:lstStyle/>
           <a:p>
-            <a:pPr indent="0" marL="0">
+            <a:pPr marL="0" indent="0">
               <a:buNone/>
             </a:pPr>
             <a:r>
@@ -10128,7 +10458,7 @@
           <a:bodyPr wrap="square" lIns="0" tIns="0" rIns="0" bIns="0" rtlCol="0" anchor="ctr"/>
           <a:lstStyle/>
           <a:p>
-            <a:pPr indent="0" marL="0">
+            <a:pPr marL="0" indent="0">
               <a:buNone/>
             </a:pPr>
             <a:r>
@@ -10164,7 +10494,7 @@
           <a:bodyPr wrap="square" lIns="0" tIns="0" rIns="0" bIns="0" rtlCol="0" anchor="ctr"/>
           <a:lstStyle/>
           <a:p>
-            <a:pPr indent="0" marL="0">
+            <a:pPr marL="0" indent="0">
               <a:buNone/>
             </a:pPr>
             <a:r>
@@ -10203,6 +10533,13 @@
             <a:prstDash val="solid"/>
           </a:ln>
         </p:spPr>
+        <p:txBody>
+          <a:bodyPr/>
+          <a:lstStyle/>
+          <a:p>
+            <a:endParaRPr lang="en-US"/>
+          </a:p>
+        </p:txBody>
       </p:sp>
       <p:sp>
         <p:nvSpPr>
@@ -10228,6 +10565,13 @@
             <a:prstDash val="solid"/>
           </a:ln>
         </p:spPr>
+        <p:txBody>
+          <a:bodyPr/>
+          <a:lstStyle/>
+          <a:p>
+            <a:endParaRPr lang="en-US"/>
+          </a:p>
+        </p:txBody>
       </p:sp>
       <p:sp>
         <p:nvSpPr>
@@ -10250,7 +10594,7 @@
           <a:bodyPr wrap="square" lIns="0" tIns="0" rIns="0" bIns="0" rtlCol="0" anchor="ctr"/>
           <a:lstStyle/>
           <a:p>
-            <a:pPr indent="0" marL="0">
+            <a:pPr marL="0" indent="0">
               <a:buNone/>
             </a:pPr>
             <a:r>
@@ -10286,7 +10630,7 @@
           <a:bodyPr wrap="square" lIns="0" tIns="0" rIns="0" bIns="0" rtlCol="0" anchor="ctr"/>
           <a:lstStyle/>
           <a:p>
-            <a:pPr indent="0" marL="0">
+            <a:pPr marL="0" indent="0">
               <a:buNone/>
             </a:pPr>
             <a:r>
@@ -10322,7 +10666,7 @@
           <a:bodyPr wrap="square" lIns="0" tIns="0" rIns="0" bIns="0" rtlCol="0" anchor="ctr"/>
           <a:lstStyle/>
           <a:p>
-            <a:pPr indent="0" marL="0">
+            <a:pPr marL="0" indent="0">
               <a:buNone/>
             </a:pPr>
             <a:r>
@@ -10358,7 +10702,7 @@
           <a:bodyPr wrap="square" lIns="0" tIns="0" rIns="0" bIns="0" rtlCol="0" anchor="ctr"/>
           <a:lstStyle/>
           <a:p>
-            <a:pPr indent="0" marL="0">
+            <a:pPr marL="0" indent="0">
               <a:buNone/>
             </a:pPr>
             <a:r>
@@ -10397,6 +10741,13 @@
             <a:prstDash val="solid"/>
           </a:ln>
         </p:spPr>
+        <p:txBody>
+          <a:bodyPr/>
+          <a:lstStyle/>
+          <a:p>
+            <a:endParaRPr lang="en-US"/>
+          </a:p>
+        </p:txBody>
       </p:sp>
       <p:sp>
         <p:nvSpPr>
@@ -10422,6 +10773,13 @@
             <a:prstDash val="solid"/>
           </a:ln>
         </p:spPr>
+        <p:txBody>
+          <a:bodyPr/>
+          <a:lstStyle/>
+          <a:p>
+            <a:endParaRPr lang="en-US"/>
+          </a:p>
+        </p:txBody>
       </p:sp>
       <p:sp>
         <p:nvSpPr>
@@ -10444,7 +10802,7 @@
           <a:bodyPr wrap="square" lIns="0" tIns="0" rIns="0" bIns="0" rtlCol="0" anchor="ctr"/>
           <a:lstStyle/>
           <a:p>
-            <a:pPr indent="0" marL="0">
+            <a:pPr marL="0" indent="0">
               <a:buNone/>
             </a:pPr>
             <a:r>
@@ -10480,7 +10838,7 @@
           <a:bodyPr wrap="square" lIns="0" tIns="0" rIns="0" bIns="0" rtlCol="0" anchor="ctr"/>
           <a:lstStyle/>
           <a:p>
-            <a:pPr indent="0" marL="0">
+            <a:pPr marL="0" indent="0">
               <a:buNone/>
             </a:pPr>
             <a:r>
@@ -10516,7 +10874,7 @@
           <a:bodyPr wrap="square" lIns="0" tIns="0" rIns="0" bIns="0" rtlCol="0" anchor="ctr"/>
           <a:lstStyle/>
           <a:p>
-            <a:pPr indent="0" marL="0">
+            <a:pPr marL="0" indent="0">
               <a:buNone/>
             </a:pPr>
             <a:r>
@@ -10552,7 +10910,7 @@
           <a:bodyPr wrap="square" lIns="0" tIns="0" rIns="0" bIns="0" rtlCol="0" anchor="ctr"/>
           <a:lstStyle/>
           <a:p>
-            <a:pPr indent="0" marL="0">
+            <a:pPr marL="0" indent="0">
               <a:buNone/>
             </a:pPr>
             <a:r>
@@ -10591,6 +10949,13 @@
             <a:prstDash val="solid"/>
           </a:ln>
         </p:spPr>
+        <p:txBody>
+          <a:bodyPr/>
+          <a:lstStyle/>
+          <a:p>
+            <a:endParaRPr lang="en-US"/>
+          </a:p>
+        </p:txBody>
       </p:sp>
       <p:sp>
         <p:nvSpPr>
@@ -10616,6 +10981,13 @@
             <a:prstDash val="solid"/>
           </a:ln>
         </p:spPr>
+        <p:txBody>
+          <a:bodyPr/>
+          <a:lstStyle/>
+          <a:p>
+            <a:endParaRPr lang="en-US"/>
+          </a:p>
+        </p:txBody>
       </p:sp>
       <p:sp>
         <p:nvSpPr>
@@ -10638,7 +11010,7 @@
           <a:bodyPr wrap="square" lIns="0" tIns="0" rIns="0" bIns="0" rtlCol="0" anchor="ctr"/>
           <a:lstStyle/>
           <a:p>
-            <a:pPr indent="0" marL="0">
+            <a:pPr marL="0" indent="0">
               <a:buNone/>
             </a:pPr>
             <a:r>
@@ -10674,7 +11046,7 @@
           <a:bodyPr wrap="square" lIns="0" tIns="0" rIns="0" bIns="0" rtlCol="0" anchor="ctr"/>
           <a:lstStyle/>
           <a:p>
-            <a:pPr indent="0" marL="0">
+            <a:pPr marL="0" indent="0">
               <a:buNone/>
             </a:pPr>
             <a:r>
@@ -10710,7 +11082,7 @@
           <a:bodyPr wrap="square" lIns="0" tIns="0" rIns="0" bIns="0" rtlCol="0" anchor="ctr"/>
           <a:lstStyle/>
           <a:p>
-            <a:pPr indent="0" marL="0">
+            <a:pPr marL="0" indent="0">
               <a:buNone/>
             </a:pPr>
             <a:r>
@@ -10746,7 +11118,7 @@
           <a:bodyPr wrap="square" lIns="0" tIns="0" rIns="0" bIns="0" rtlCol="0" anchor="ctr"/>
           <a:lstStyle/>
           <a:p>
-            <a:pPr indent="0" marL="0">
+            <a:pPr marL="0" indent="0">
               <a:buNone/>
             </a:pPr>
             <a:r>
@@ -10785,6 +11157,13 @@
             <a:prstDash val="solid"/>
           </a:ln>
         </p:spPr>
+        <p:txBody>
+          <a:bodyPr/>
+          <a:lstStyle/>
+          <a:p>
+            <a:endParaRPr lang="en-US"/>
+          </a:p>
+        </p:txBody>
       </p:sp>
       <p:sp>
         <p:nvSpPr>
@@ -10807,7 +11186,7 @@
           <a:bodyPr wrap="square" lIns="0" tIns="0" rIns="0" bIns="0" rtlCol="0" anchor="ctr"/>
           <a:lstStyle/>
           <a:p>
-            <a:pPr indent="0" marL="0">
+            <a:pPr marL="0" indent="0">
               <a:buNone/>
             </a:pPr>
             <a:r>
@@ -10843,7 +11222,7 @@
           <a:bodyPr wrap="square" lIns="0" tIns="0" rIns="0" bIns="0" rtlCol="0" anchor="ctr"/>
           <a:lstStyle/>
           <a:p>
-            <a:pPr indent="0" marL="0">
+            <a:pPr marL="0" indent="0">
               <a:buNone/>
             </a:pPr>
             <a:r>
@@ -10879,7 +11258,7 @@
           <a:bodyPr wrap="square" lIns="0" tIns="0" rIns="0" bIns="0" rtlCol="0" anchor="ctr"/>
           <a:lstStyle/>
           <a:p>
-            <a:pPr indent="0" marL="0">
+            <a:pPr marL="0" indent="0">
               <a:buNone/>
             </a:pPr>
             <a:r>
@@ -10915,7 +11294,7 @@
           <a:bodyPr wrap="square" lIns="0" tIns="0" rIns="0" bIns="0" rtlCol="0" anchor="ctr"/>
           <a:lstStyle/>
           <a:p>
-            <a:pPr indent="0" marL="0">
+            <a:pPr marL="0" indent="0">
               <a:buNone/>
             </a:pPr>
             <a:r>
@@ -10954,6 +11333,13 @@
             <a:prstDash val="solid"/>
           </a:ln>
         </p:spPr>
+        <p:txBody>
+          <a:bodyPr/>
+          <a:lstStyle/>
+          <a:p>
+            <a:endParaRPr lang="en-US"/>
+          </a:p>
+        </p:txBody>
       </p:sp>
       <p:sp>
         <p:nvSpPr>
@@ -10979,6 +11365,13 @@
             <a:prstDash val="solid"/>
           </a:ln>
         </p:spPr>
+        <p:txBody>
+          <a:bodyPr/>
+          <a:lstStyle/>
+          <a:p>
+            <a:endParaRPr lang="en-US"/>
+          </a:p>
+        </p:txBody>
       </p:sp>
       <p:sp>
         <p:nvSpPr>
@@ -11001,7 +11394,7 @@
           <a:bodyPr wrap="square" lIns="0" tIns="0" rIns="0" bIns="0" rtlCol="0" anchor="ctr"/>
           <a:lstStyle/>
           <a:p>
-            <a:pPr indent="0" marL="0">
+            <a:pPr marL="0" indent="0">
               <a:buNone/>
             </a:pPr>
             <a:r>
@@ -11037,7 +11430,7 @@
           <a:bodyPr wrap="square" lIns="0" tIns="0" rIns="0" bIns="0" rtlCol="0" anchor="ctr"/>
           <a:lstStyle/>
           <a:p>
-            <a:pPr indent="0" marL="0">
+            <a:pPr marL="0" indent="0">
               <a:buNone/>
             </a:pPr>
             <a:r>
@@ -11076,13 +11469,20 @@
             <a:prstDash val="solid"/>
           </a:ln>
           <a:effectLst>
-            <a:outerShdw sx="100000" sy="100000" kx="0" ky="0" algn="bl" rotWithShape="0" blurRad="101600" dist="25400" dir="8100000">
+            <a:outerShdw blurRad="101600" dist="25400" dir="8100000" algn="bl" rotWithShape="0">
               <a:srgbClr val="000000">
                 <a:alpha val="10000"/>
               </a:srgbClr>
             </a:outerShdw>
           </a:effectLst>
         </p:spPr>
+        <p:txBody>
+          <a:bodyPr/>
+          <a:lstStyle/>
+          <a:p>
+            <a:endParaRPr lang="en-US"/>
+          </a:p>
+        </p:txBody>
       </p:sp>
       <p:sp>
         <p:nvSpPr>
@@ -11105,11 +11505,11 @@
           <a:bodyPr wrap="square" lIns="0" tIns="0" rIns="0" bIns="0" rtlCol="0" anchor="ctr"/>
           <a:lstStyle/>
           <a:p>
-            <a:pPr algn="ctr" indent="0" marL="0">
-              <a:buNone/>
-            </a:pPr>
-            <a:r>
-              <a:rPr lang="en-US" sz="950" b="1" spc="50" kern="0" dirty="0">
+            <a:pPr marL="0" indent="0" algn="ctr">
+              <a:buNone/>
+            </a:pPr>
+            <a:r>
+              <a:rPr lang="en-US" sz="950" b="1" kern="0" spc="50" dirty="0">
                 <a:solidFill>
                   <a:srgbClr val="A0BEC9"/>
                 </a:solidFill>
@@ -11119,11 +11519,11 @@
             <a:endParaRPr lang="en-US" sz="950" dirty="0"/>
           </a:p>
           <a:p>
-            <a:pPr algn="ctr" indent="0" marL="0">
-              <a:buNone/>
-            </a:pPr>
-            <a:r>
-              <a:rPr lang="en-US" sz="950" b="1" spc="50" kern="0" dirty="0">
+            <a:pPr marL="0" indent="0" algn="ctr">
+              <a:buNone/>
+            </a:pPr>
+            <a:r>
+              <a:rPr lang="en-US" sz="950" b="1" kern="0" spc="50" dirty="0">
                 <a:solidFill>
                   <a:srgbClr val="A0BEC9"/>
                 </a:solidFill>
@@ -11155,7 +11555,7 @@
           <a:bodyPr wrap="square" lIns="0" tIns="0" rIns="0" bIns="0" rtlCol="0" anchor="ctr"/>
           <a:lstStyle/>
           <a:p>
-            <a:pPr algn="ctr" indent="0" marL="0">
+            <a:pPr marL="0" indent="0" algn="ctr">
               <a:buNone/>
             </a:pPr>
             <a:r>
@@ -11191,7 +11591,7 @@
           <a:bodyPr wrap="square" lIns="0" tIns="0" rIns="0" bIns="0" rtlCol="0" anchor="ctr"/>
           <a:lstStyle/>
           <a:p>
-            <a:pPr algn="ctr" indent="0" marL="0">
+            <a:pPr marL="0" indent="0" algn="ctr">
               <a:buNone/>
             </a:pPr>
             <a:r>
@@ -11228,6 +11628,13 @@
             <a:prstDash val="solid"/>
           </a:ln>
         </p:spPr>
+        <p:txBody>
+          <a:bodyPr/>
+          <a:lstStyle/>
+          <a:p>
+            <a:endParaRPr lang="en-US"/>
+          </a:p>
+        </p:txBody>
       </p:sp>
       <p:sp>
         <p:nvSpPr>
@@ -11250,7 +11657,7 @@
           <a:bodyPr wrap="square" lIns="0" tIns="0" rIns="0" bIns="0" rtlCol="0" anchor="ctr"/>
           <a:lstStyle/>
           <a:p>
-            <a:pPr indent="0" marL="0">
+            <a:pPr marL="0" indent="0">
               <a:buNone/>
             </a:pPr>
             <a:r>
@@ -11286,7 +11693,7 @@
           <a:bodyPr wrap="square" lIns="0" tIns="0" rIns="0" bIns="0" rtlCol="0" anchor="ctr"/>
           <a:lstStyle/>
           <a:p>
-            <a:pPr algn="r" indent="0" marL="0">
+            <a:pPr marL="0" indent="0" algn="r">
               <a:buNone/>
             </a:pPr>
             <a:r>
@@ -11322,7 +11729,7 @@
           <a:bodyPr wrap="square" lIns="0" tIns="0" rIns="0" bIns="0" rtlCol="0" anchor="ctr"/>
           <a:lstStyle/>
           <a:p>
-            <a:pPr indent="0" marL="0">
+            <a:pPr marL="0" indent="0">
               <a:buNone/>
             </a:pPr>
             <a:r>
@@ -11358,7 +11765,7 @@
           <a:bodyPr wrap="square" lIns="0" tIns="0" rIns="0" bIns="0" rtlCol="0" anchor="ctr"/>
           <a:lstStyle/>
           <a:p>
-            <a:pPr algn="r" indent="0" marL="0">
+            <a:pPr marL="0" indent="0" algn="r">
               <a:buNone/>
             </a:pPr>
             <a:r>
@@ -11394,7 +11801,7 @@
           <a:bodyPr wrap="square" lIns="0" tIns="0" rIns="0" bIns="0" rtlCol="0" anchor="ctr"/>
           <a:lstStyle/>
           <a:p>
-            <a:pPr indent="0" marL="0">
+            <a:pPr marL="0" indent="0">
               <a:buNone/>
             </a:pPr>
             <a:r>
@@ -11430,7 +11837,7 @@
           <a:bodyPr wrap="square" lIns="0" tIns="0" rIns="0" bIns="0" rtlCol="0" anchor="ctr"/>
           <a:lstStyle/>
           <a:p>
-            <a:pPr algn="r" indent="0" marL="0">
+            <a:pPr marL="0" indent="0" algn="r">
               <a:buNone/>
             </a:pPr>
             <a:r>
@@ -11466,7 +11873,7 @@
           <a:bodyPr wrap="square" lIns="0" tIns="0" rIns="0" bIns="0" rtlCol="0" anchor="ctr"/>
           <a:lstStyle/>
           <a:p>
-            <a:pPr indent="0" marL="0">
+            <a:pPr marL="0" indent="0">
               <a:buNone/>
             </a:pPr>
             <a:r>
@@ -11502,7 +11909,7 @@
           <a:bodyPr wrap="square" lIns="0" tIns="0" rIns="0" bIns="0" rtlCol="0" anchor="ctr"/>
           <a:lstStyle/>
           <a:p>
-            <a:pPr algn="r" indent="0" marL="0">
+            <a:pPr marL="0" indent="0" algn="r">
               <a:buNone/>
             </a:pPr>
             <a:r>
@@ -11538,7 +11945,7 @@
           <a:bodyPr wrap="square" lIns="0" tIns="0" rIns="0" bIns="0" rtlCol="0" anchor="ctr"/>
           <a:lstStyle/>
           <a:p>
-            <a:pPr indent="0" marL="0">
+            <a:pPr marL="0" indent="0">
               <a:buNone/>
             </a:pPr>
             <a:r>
@@ -11574,7 +11981,7 @@
           <a:bodyPr wrap="square" lIns="0" tIns="0" rIns="0" bIns="0" rtlCol="0" anchor="ctr"/>
           <a:lstStyle/>
           <a:p>
-            <a:pPr algn="r" indent="0" marL="0">
+            <a:pPr marL="0" indent="0" algn="r">
               <a:buNone/>
             </a:pPr>
             <a:r>
@@ -11610,7 +12017,7 @@
           <a:bodyPr wrap="square" lIns="0" tIns="0" rIns="0" bIns="0" rtlCol="0" anchor="ctr"/>
           <a:lstStyle/>
           <a:p>
-            <a:pPr indent="0" marL="0">
+            <a:pPr marL="0" indent="0">
               <a:buNone/>
             </a:pPr>
             <a:r>
@@ -11646,7 +12053,7 @@
           <a:bodyPr wrap="square" lIns="0" tIns="0" rIns="0" bIns="0" rtlCol="0" anchor="ctr"/>
           <a:lstStyle/>
           <a:p>
-            <a:pPr algn="r" indent="0" marL="0">
+            <a:pPr marL="0" indent="0" algn="r">
               <a:buNone/>
             </a:pPr>
             <a:r>
@@ -11682,7 +12089,7 @@
           <a:bodyPr wrap="square" lIns="0" tIns="0" rIns="0" bIns="0" rtlCol="0" anchor="ctr"/>
           <a:lstStyle/>
           <a:p>
-            <a:pPr indent="0" marL="0">
+            <a:pPr marL="0" indent="0">
               <a:buNone/>
             </a:pPr>
             <a:r>
@@ -11713,6 +12120,7 @@
         <a:solidFill>
           <a:srgbClr val="F0FDFA"/>
         </a:solidFill>
+        <a:effectLst/>
       </p:bgPr>
     </p:bg>
     <p:spTree>
@@ -11753,6 +12161,13 @@
             <a:prstDash val="solid"/>
           </a:ln>
         </p:spPr>
+        <p:txBody>
+          <a:bodyPr/>
+          <a:lstStyle/>
+          <a:p>
+            <a:endParaRPr lang="en-US"/>
+          </a:p>
+        </p:txBody>
       </p:sp>
       <p:sp>
         <p:nvSpPr>
@@ -11775,7 +12190,7 @@
           <a:bodyPr wrap="square" lIns="0" tIns="0" rIns="0" bIns="0" rtlCol="0" anchor="ctr"/>
           <a:lstStyle/>
           <a:p>
-            <a:pPr indent="0" marL="0">
+            <a:pPr marL="0" indent="0">
               <a:buNone/>
             </a:pPr>
             <a:r>
@@ -11814,13 +12229,20 @@
             <a:prstDash val="solid"/>
           </a:ln>
           <a:effectLst>
-            <a:outerShdw sx="100000" sy="100000" kx="0" ky="0" algn="bl" rotWithShape="0" blurRad="101600" dist="25400" dir="8100000">
+            <a:outerShdw blurRad="101600" dist="25400" dir="8100000" algn="bl" rotWithShape="0">
               <a:srgbClr val="000000">
                 <a:alpha val="10000"/>
               </a:srgbClr>
             </a:outerShdw>
           </a:effectLst>
         </p:spPr>
+        <p:txBody>
+          <a:bodyPr/>
+          <a:lstStyle/>
+          <a:p>
+            <a:endParaRPr lang="en-US"/>
+          </a:p>
+        </p:txBody>
       </p:sp>
       <p:sp>
         <p:nvSpPr>
@@ -11846,6 +12268,13 @@
             <a:prstDash val="solid"/>
           </a:ln>
         </p:spPr>
+        <p:txBody>
+          <a:bodyPr/>
+          <a:lstStyle/>
+          <a:p>
+            <a:endParaRPr lang="en-US"/>
+          </a:p>
+        </p:txBody>
       </p:sp>
       <p:sp>
         <p:nvSpPr>
@@ -11871,6 +12300,13 @@
             <a:prstDash val="solid"/>
           </a:ln>
         </p:spPr>
+        <p:txBody>
+          <a:bodyPr/>
+          <a:lstStyle/>
+          <a:p>
+            <a:endParaRPr lang="en-US"/>
+          </a:p>
+        </p:txBody>
       </p:sp>
       <p:sp>
         <p:nvSpPr>
@@ -11893,7 +12329,7 @@
           <a:bodyPr wrap="square" lIns="0" tIns="0" rIns="0" bIns="0" rtlCol="0" anchor="ctr"/>
           <a:lstStyle/>
           <a:p>
-            <a:pPr algn="ctr" indent="0" marL="0">
+            <a:pPr marL="0" indent="0" algn="ctr">
               <a:buNone/>
             </a:pPr>
             <a:r>
@@ -11929,7 +12365,7 @@
           <a:bodyPr wrap="square" lIns="0" tIns="0" rIns="0" bIns="0" rtlCol="0" anchor="ctr"/>
           <a:lstStyle/>
           <a:p>
-            <a:pPr indent="0" marL="0">
+            <a:pPr marL="0" indent="0">
               <a:buNone/>
             </a:pPr>
             <a:r>
@@ -11965,7 +12401,7 @@
           <a:bodyPr wrap="square" lIns="0" tIns="0" rIns="0" bIns="0" rtlCol="0" anchor="ctr"/>
           <a:lstStyle/>
           <a:p>
-            <a:pPr indent="0" marL="0">
+            <a:pPr marL="0" indent="0">
               <a:buNone/>
             </a:pPr>
             <a:r>
@@ -12002,6 +12438,13 @@
             <a:prstDash val="solid"/>
           </a:ln>
         </p:spPr>
+        <p:txBody>
+          <a:bodyPr/>
+          <a:lstStyle/>
+          <a:p>
+            <a:endParaRPr lang="en-US"/>
+          </a:p>
+        </p:txBody>
       </p:sp>
       <p:sp>
         <p:nvSpPr>
@@ -12024,7 +12467,7 @@
           <a:bodyPr wrap="square" lIns="0" tIns="0" rIns="0" bIns="0" rtlCol="0" anchor="ctr"/>
           <a:lstStyle/>
           <a:p>
-            <a:pPr indent="0" marL="0">
+            <a:pPr marL="0" indent="0">
               <a:buNone/>
             </a:pPr>
             <a:r>
@@ -12060,7 +12503,7 @@
           <a:bodyPr wrap="square" lIns="0" tIns="0" rIns="0" bIns="0" rtlCol="0" anchor="ctr"/>
           <a:lstStyle/>
           <a:p>
-            <a:pPr indent="0" marL="0">
+            <a:pPr marL="0" indent="0">
               <a:buNone/>
             </a:pPr>
             <a:r>
@@ -12099,13 +12542,20 @@
             <a:prstDash val="solid"/>
           </a:ln>
           <a:effectLst>
-            <a:outerShdw sx="100000" sy="100000" kx="0" ky="0" algn="bl" rotWithShape="0" blurRad="101600" dist="25400" dir="8100000">
+            <a:outerShdw blurRad="101600" dist="25400" dir="8100000" algn="bl" rotWithShape="0">
               <a:srgbClr val="000000">
                 <a:alpha val="10000"/>
               </a:srgbClr>
             </a:outerShdw>
           </a:effectLst>
         </p:spPr>
+        <p:txBody>
+          <a:bodyPr/>
+          <a:lstStyle/>
+          <a:p>
+            <a:endParaRPr lang="en-US"/>
+          </a:p>
+        </p:txBody>
       </p:sp>
       <p:sp>
         <p:nvSpPr>
@@ -12131,6 +12581,13 @@
             <a:prstDash val="solid"/>
           </a:ln>
         </p:spPr>
+        <p:txBody>
+          <a:bodyPr/>
+          <a:lstStyle/>
+          <a:p>
+            <a:endParaRPr lang="en-US"/>
+          </a:p>
+        </p:txBody>
       </p:sp>
       <p:sp>
         <p:nvSpPr>
@@ -12156,6 +12613,13 @@
             <a:prstDash val="solid"/>
           </a:ln>
         </p:spPr>
+        <p:txBody>
+          <a:bodyPr/>
+          <a:lstStyle/>
+          <a:p>
+            <a:endParaRPr lang="en-US"/>
+          </a:p>
+        </p:txBody>
       </p:sp>
       <p:sp>
         <p:nvSpPr>
@@ -12178,7 +12642,7 @@
           <a:bodyPr wrap="square" lIns="0" tIns="0" rIns="0" bIns="0" rtlCol="0" anchor="ctr"/>
           <a:lstStyle/>
           <a:p>
-            <a:pPr algn="ctr" indent="0" marL="0">
+            <a:pPr marL="0" indent="0" algn="ctr">
               <a:buNone/>
             </a:pPr>
             <a:r>
@@ -12214,7 +12678,7 @@
           <a:bodyPr wrap="square" lIns="0" tIns="0" rIns="0" bIns="0" rtlCol="0" anchor="ctr"/>
           <a:lstStyle/>
           <a:p>
-            <a:pPr indent="0" marL="0">
+            <a:pPr marL="0" indent="0">
               <a:buNone/>
             </a:pPr>
             <a:r>
@@ -12250,7 +12714,7 @@
           <a:bodyPr wrap="square" lIns="0" tIns="0" rIns="0" bIns="0" rtlCol="0" anchor="ctr"/>
           <a:lstStyle/>
           <a:p>
-            <a:pPr indent="0" marL="0">
+            <a:pPr marL="0" indent="0">
               <a:buNone/>
             </a:pPr>
             <a:r>
@@ -12287,6 +12751,13 @@
             <a:prstDash val="solid"/>
           </a:ln>
         </p:spPr>
+        <p:txBody>
+          <a:bodyPr/>
+          <a:lstStyle/>
+          <a:p>
+            <a:endParaRPr lang="en-US"/>
+          </a:p>
+        </p:txBody>
       </p:sp>
       <p:sp>
         <p:nvSpPr>
@@ -12309,7 +12780,7 @@
           <a:bodyPr wrap="square" lIns="0" tIns="0" rIns="0" bIns="0" rtlCol="0" anchor="ctr"/>
           <a:lstStyle/>
           <a:p>
-            <a:pPr indent="0" marL="0">
+            <a:pPr marL="0" indent="0">
               <a:buNone/>
             </a:pPr>
             <a:r>
@@ -12345,7 +12816,7 @@
           <a:bodyPr wrap="square" lIns="0" tIns="0" rIns="0" bIns="0" rtlCol="0" anchor="ctr"/>
           <a:lstStyle/>
           <a:p>
-            <a:pPr indent="0" marL="0">
+            <a:pPr marL="0" indent="0">
               <a:buNone/>
             </a:pPr>
             <a:r>
@@ -12384,13 +12855,20 @@
             <a:prstDash val="solid"/>
           </a:ln>
           <a:effectLst>
-            <a:outerShdw sx="100000" sy="100000" kx="0" ky="0" algn="bl" rotWithShape="0" blurRad="101600" dist="25400" dir="8100000">
+            <a:outerShdw blurRad="101600" dist="25400" dir="8100000" algn="bl" rotWithShape="0">
               <a:srgbClr val="000000">
                 <a:alpha val="10000"/>
               </a:srgbClr>
             </a:outerShdw>
           </a:effectLst>
         </p:spPr>
+        <p:txBody>
+          <a:bodyPr/>
+          <a:lstStyle/>
+          <a:p>
+            <a:endParaRPr lang="en-US"/>
+          </a:p>
+        </p:txBody>
       </p:sp>
       <p:sp>
         <p:nvSpPr>
@@ -12416,6 +12894,13 @@
             <a:prstDash val="solid"/>
           </a:ln>
         </p:spPr>
+        <p:txBody>
+          <a:bodyPr/>
+          <a:lstStyle/>
+          <a:p>
+            <a:endParaRPr lang="en-US"/>
+          </a:p>
+        </p:txBody>
       </p:sp>
       <p:sp>
         <p:nvSpPr>
@@ -12441,6 +12926,13 @@
             <a:prstDash val="solid"/>
           </a:ln>
         </p:spPr>
+        <p:txBody>
+          <a:bodyPr/>
+          <a:lstStyle/>
+          <a:p>
+            <a:endParaRPr lang="en-US"/>
+          </a:p>
+        </p:txBody>
       </p:sp>
       <p:sp>
         <p:nvSpPr>
@@ -12463,7 +12955,7 @@
           <a:bodyPr wrap="square" lIns="0" tIns="0" rIns="0" bIns="0" rtlCol="0" anchor="ctr"/>
           <a:lstStyle/>
           <a:p>
-            <a:pPr algn="ctr" indent="0" marL="0">
+            <a:pPr marL="0" indent="0" algn="ctr">
               <a:buNone/>
             </a:pPr>
             <a:r>
@@ -12499,7 +12991,7 @@
           <a:bodyPr wrap="square" lIns="0" tIns="0" rIns="0" bIns="0" rtlCol="0" anchor="ctr"/>
           <a:lstStyle/>
           <a:p>
-            <a:pPr indent="0" marL="0">
+            <a:pPr marL="0" indent="0">
               <a:buNone/>
             </a:pPr>
             <a:r>
@@ -12535,7 +13027,7 @@
           <a:bodyPr wrap="square" lIns="0" tIns="0" rIns="0" bIns="0" rtlCol="0" anchor="ctr"/>
           <a:lstStyle/>
           <a:p>
-            <a:pPr indent="0" marL="0">
+            <a:pPr marL="0" indent="0">
               <a:buNone/>
             </a:pPr>
             <a:r>
@@ -12572,6 +13064,13 @@
             <a:prstDash val="solid"/>
           </a:ln>
         </p:spPr>
+        <p:txBody>
+          <a:bodyPr/>
+          <a:lstStyle/>
+          <a:p>
+            <a:endParaRPr lang="en-US"/>
+          </a:p>
+        </p:txBody>
       </p:sp>
       <p:sp>
         <p:nvSpPr>
@@ -12594,7 +13093,7 @@
           <a:bodyPr wrap="square" lIns="0" tIns="0" rIns="0" bIns="0" rtlCol="0" anchor="ctr"/>
           <a:lstStyle/>
           <a:p>
-            <a:pPr indent="0" marL="0">
+            <a:pPr marL="0" indent="0">
               <a:buNone/>
             </a:pPr>
             <a:r>
@@ -12630,7 +13129,7 @@
           <a:bodyPr wrap="square" lIns="0" tIns="0" rIns="0" bIns="0" rtlCol="0" anchor="ctr"/>
           <a:lstStyle/>
           <a:p>
-            <a:pPr indent="0" marL="0">
+            <a:pPr marL="0" indent="0">
               <a:buNone/>
             </a:pPr>
             <a:r>
@@ -12669,13 +13168,20 @@
             <a:prstDash val="solid"/>
           </a:ln>
           <a:effectLst>
-            <a:outerShdw sx="100000" sy="100000" kx="0" ky="0" algn="bl" rotWithShape="0" blurRad="101600" dist="25400" dir="8100000">
+            <a:outerShdw blurRad="101600" dist="25400" dir="8100000" algn="bl" rotWithShape="0">
               <a:srgbClr val="000000">
                 <a:alpha val="10000"/>
               </a:srgbClr>
             </a:outerShdw>
           </a:effectLst>
         </p:spPr>
+        <p:txBody>
+          <a:bodyPr/>
+          <a:lstStyle/>
+          <a:p>
+            <a:endParaRPr lang="en-US"/>
+          </a:p>
+        </p:txBody>
       </p:sp>
       <p:sp>
         <p:nvSpPr>
@@ -12701,6 +13207,13 @@
             <a:prstDash val="solid"/>
           </a:ln>
         </p:spPr>
+        <p:txBody>
+          <a:bodyPr/>
+          <a:lstStyle/>
+          <a:p>
+            <a:endParaRPr lang="en-US"/>
+          </a:p>
+        </p:txBody>
       </p:sp>
       <p:sp>
         <p:nvSpPr>
@@ -12726,6 +13239,13 @@
             <a:prstDash val="solid"/>
           </a:ln>
         </p:spPr>
+        <p:txBody>
+          <a:bodyPr/>
+          <a:lstStyle/>
+          <a:p>
+            <a:endParaRPr lang="en-US"/>
+          </a:p>
+        </p:txBody>
       </p:sp>
       <p:sp>
         <p:nvSpPr>
@@ -12748,7 +13268,7 @@
           <a:bodyPr wrap="square" lIns="0" tIns="0" rIns="0" bIns="0" rtlCol="0" anchor="ctr"/>
           <a:lstStyle/>
           <a:p>
-            <a:pPr algn="ctr" indent="0" marL="0">
+            <a:pPr marL="0" indent="0" algn="ctr">
               <a:buNone/>
             </a:pPr>
             <a:r>
@@ -12784,7 +13304,7 @@
           <a:bodyPr wrap="square" lIns="0" tIns="0" rIns="0" bIns="0" rtlCol="0" anchor="ctr"/>
           <a:lstStyle/>
           <a:p>
-            <a:pPr indent="0" marL="0">
+            <a:pPr marL="0" indent="0">
               <a:buNone/>
             </a:pPr>
             <a:r>
@@ -12820,7 +13340,7 @@
           <a:bodyPr wrap="square" lIns="0" tIns="0" rIns="0" bIns="0" rtlCol="0" anchor="ctr"/>
           <a:lstStyle/>
           <a:p>
-            <a:pPr indent="0" marL="0">
+            <a:pPr marL="0" indent="0">
               <a:buNone/>
             </a:pPr>
             <a:r>
@@ -12857,6 +13377,13 @@
             <a:prstDash val="solid"/>
           </a:ln>
         </p:spPr>
+        <p:txBody>
+          <a:bodyPr/>
+          <a:lstStyle/>
+          <a:p>
+            <a:endParaRPr lang="en-US"/>
+          </a:p>
+        </p:txBody>
       </p:sp>
       <p:sp>
         <p:nvSpPr>
@@ -12879,7 +13406,7 @@
           <a:bodyPr wrap="square" lIns="0" tIns="0" rIns="0" bIns="0" rtlCol="0" anchor="ctr"/>
           <a:lstStyle/>
           <a:p>
-            <a:pPr indent="0" marL="0">
+            <a:pPr marL="0" indent="0">
               <a:buNone/>
             </a:pPr>
             <a:r>
@@ -12915,7 +13442,7 @@
           <a:bodyPr wrap="square" lIns="0" tIns="0" rIns="0" bIns="0" rtlCol="0" anchor="ctr"/>
           <a:lstStyle/>
           <a:p>
-            <a:pPr indent="0" marL="0">
+            <a:pPr marL="0" indent="0">
               <a:buNone/>
             </a:pPr>
             <a:r>
@@ -12946,6 +13473,7 @@
         <a:solidFill>
           <a:srgbClr val="F0FDFA"/>
         </a:solidFill>
+        <a:effectLst/>
       </p:bgPr>
     </p:bg>
     <p:spTree>
@@ -12986,6 +13514,13 @@
             <a:prstDash val="solid"/>
           </a:ln>
         </p:spPr>
+        <p:txBody>
+          <a:bodyPr/>
+          <a:lstStyle/>
+          <a:p>
+            <a:endParaRPr lang="en-US"/>
+          </a:p>
+        </p:txBody>
       </p:sp>
       <p:sp>
         <p:nvSpPr>
@@ -13008,7 +13543,7 @@
           <a:bodyPr wrap="square" lIns="0" tIns="0" rIns="0" bIns="0" rtlCol="0" anchor="ctr"/>
           <a:lstStyle/>
           <a:p>
-            <a:pPr indent="0" marL="0">
+            <a:pPr marL="0" indent="0">
               <a:buNone/>
             </a:pPr>
             <a:r>
@@ -13047,13 +13582,20 @@
             <a:prstDash val="solid"/>
           </a:ln>
           <a:effectLst>
-            <a:outerShdw sx="100000" sy="100000" kx="0" ky="0" algn="bl" rotWithShape="0" blurRad="101600" dist="25400" dir="8100000">
+            <a:outerShdw blurRad="101600" dist="25400" dir="8100000" algn="bl" rotWithShape="0">
               <a:srgbClr val="000000">
                 <a:alpha val="10000"/>
               </a:srgbClr>
             </a:outerShdw>
           </a:effectLst>
         </p:spPr>
+        <p:txBody>
+          <a:bodyPr/>
+          <a:lstStyle/>
+          <a:p>
+            <a:endParaRPr lang="en-US"/>
+          </a:p>
+        </p:txBody>
       </p:sp>
       <p:sp>
         <p:nvSpPr>
@@ -13079,6 +13621,13 @@
             <a:prstDash val="solid"/>
           </a:ln>
         </p:spPr>
+        <p:txBody>
+          <a:bodyPr/>
+          <a:lstStyle/>
+          <a:p>
+            <a:endParaRPr lang="en-US"/>
+          </a:p>
+        </p:txBody>
       </p:sp>
       <p:sp>
         <p:nvSpPr>
@@ -13104,6 +13653,13 @@
             <a:prstDash val="solid"/>
           </a:ln>
         </p:spPr>
+        <p:txBody>
+          <a:bodyPr/>
+          <a:lstStyle/>
+          <a:p>
+            <a:endParaRPr lang="en-US"/>
+          </a:p>
+        </p:txBody>
       </p:sp>
       <p:sp>
         <p:nvSpPr>
@@ -13126,7 +13682,7 @@
           <a:bodyPr wrap="square" lIns="0" tIns="0" rIns="0" bIns="0" rtlCol="0" anchor="ctr"/>
           <a:lstStyle/>
           <a:p>
-            <a:pPr algn="ctr" indent="0" marL="0">
+            <a:pPr marL="0" indent="0" algn="ctr">
               <a:buNone/>
             </a:pPr>
             <a:r>
@@ -13162,7 +13718,7 @@
           <a:bodyPr wrap="square" lIns="0" tIns="0" rIns="0" bIns="0" rtlCol="0" anchor="ctr"/>
           <a:lstStyle/>
           <a:p>
-            <a:pPr indent="0" marL="0">
+            <a:pPr marL="0" indent="0">
               <a:buNone/>
             </a:pPr>
             <a:r>
@@ -13198,7 +13754,7 @@
           <a:bodyPr wrap="square" lIns="0" tIns="0" rIns="0" bIns="0" rtlCol="0" anchor="ctr"/>
           <a:lstStyle/>
           <a:p>
-            <a:pPr indent="0" marL="0">
+            <a:pPr marL="0" indent="0">
               <a:buNone/>
             </a:pPr>
             <a:r>
@@ -13237,13 +13793,20 @@
             <a:prstDash val="solid"/>
           </a:ln>
           <a:effectLst>
-            <a:outerShdw sx="100000" sy="100000" kx="0" ky="0" algn="bl" rotWithShape="0" blurRad="101600" dist="25400" dir="8100000">
+            <a:outerShdw blurRad="101600" dist="25400" dir="8100000" algn="bl" rotWithShape="0">
               <a:srgbClr val="000000">
                 <a:alpha val="10000"/>
               </a:srgbClr>
             </a:outerShdw>
           </a:effectLst>
         </p:spPr>
+        <p:txBody>
+          <a:bodyPr/>
+          <a:lstStyle/>
+          <a:p>
+            <a:endParaRPr lang="en-US"/>
+          </a:p>
+        </p:txBody>
       </p:sp>
       <p:sp>
         <p:nvSpPr>
@@ -13269,6 +13832,13 @@
             <a:prstDash val="solid"/>
           </a:ln>
         </p:spPr>
+        <p:txBody>
+          <a:bodyPr/>
+          <a:lstStyle/>
+          <a:p>
+            <a:endParaRPr lang="en-US"/>
+          </a:p>
+        </p:txBody>
       </p:sp>
       <p:sp>
         <p:nvSpPr>
@@ -13294,6 +13864,13 @@
             <a:prstDash val="solid"/>
           </a:ln>
         </p:spPr>
+        <p:txBody>
+          <a:bodyPr/>
+          <a:lstStyle/>
+          <a:p>
+            <a:endParaRPr lang="en-US"/>
+          </a:p>
+        </p:txBody>
       </p:sp>
       <p:sp>
         <p:nvSpPr>
@@ -13316,7 +13893,7 @@
           <a:bodyPr wrap="square" lIns="0" tIns="0" rIns="0" bIns="0" rtlCol="0" anchor="ctr"/>
           <a:lstStyle/>
           <a:p>
-            <a:pPr algn="ctr" indent="0" marL="0">
+            <a:pPr marL="0" indent="0" algn="ctr">
               <a:buNone/>
             </a:pPr>
             <a:r>
@@ -13352,7 +13929,7 @@
           <a:bodyPr wrap="square" lIns="0" tIns="0" rIns="0" bIns="0" rtlCol="0" anchor="ctr"/>
           <a:lstStyle/>
           <a:p>
-            <a:pPr indent="0" marL="0">
+            <a:pPr marL="0" indent="0">
               <a:buNone/>
             </a:pPr>
             <a:r>
@@ -13388,7 +13965,7 @@
           <a:bodyPr wrap="square" lIns="0" tIns="0" rIns="0" bIns="0" rtlCol="0" anchor="ctr"/>
           <a:lstStyle/>
           <a:p>
-            <a:pPr indent="0" marL="0">
+            <a:pPr marL="0" indent="0">
               <a:buNone/>
             </a:pPr>
             <a:r>
@@ -13427,13 +14004,20 @@
             <a:prstDash val="solid"/>
           </a:ln>
           <a:effectLst>
-            <a:outerShdw sx="100000" sy="100000" kx="0" ky="0" algn="bl" rotWithShape="0" blurRad="101600" dist="25400" dir="8100000">
+            <a:outerShdw blurRad="101600" dist="25400" dir="8100000" algn="bl" rotWithShape="0">
               <a:srgbClr val="000000">
                 <a:alpha val="10000"/>
               </a:srgbClr>
             </a:outerShdw>
           </a:effectLst>
         </p:spPr>
+        <p:txBody>
+          <a:bodyPr/>
+          <a:lstStyle/>
+          <a:p>
+            <a:endParaRPr lang="en-US"/>
+          </a:p>
+        </p:txBody>
       </p:sp>
       <p:sp>
         <p:nvSpPr>
@@ -13459,6 +14043,13 @@
             <a:prstDash val="solid"/>
           </a:ln>
         </p:spPr>
+        <p:txBody>
+          <a:bodyPr/>
+          <a:lstStyle/>
+          <a:p>
+            <a:endParaRPr lang="en-US"/>
+          </a:p>
+        </p:txBody>
       </p:sp>
       <p:sp>
         <p:nvSpPr>
@@ -13484,6 +14075,13 @@
             <a:prstDash val="solid"/>
           </a:ln>
         </p:spPr>
+        <p:txBody>
+          <a:bodyPr/>
+          <a:lstStyle/>
+          <a:p>
+            <a:endParaRPr lang="en-US"/>
+          </a:p>
+        </p:txBody>
       </p:sp>
       <p:sp>
         <p:nvSpPr>
@@ -13506,7 +14104,7 @@
           <a:bodyPr wrap="square" lIns="0" tIns="0" rIns="0" bIns="0" rtlCol="0" anchor="ctr"/>
           <a:lstStyle/>
           <a:p>
-            <a:pPr algn="ctr" indent="0" marL="0">
+            <a:pPr marL="0" indent="0" algn="ctr">
               <a:buNone/>
             </a:pPr>
             <a:r>
@@ -13542,7 +14140,7 @@
           <a:bodyPr wrap="square" lIns="0" tIns="0" rIns="0" bIns="0" rtlCol="0" anchor="ctr"/>
           <a:lstStyle/>
           <a:p>
-            <a:pPr indent="0" marL="0">
+            <a:pPr marL="0" indent="0">
               <a:buNone/>
             </a:pPr>
             <a:r>
@@ -13578,7 +14176,7 @@
           <a:bodyPr wrap="square" lIns="0" tIns="0" rIns="0" bIns="0" rtlCol="0" anchor="ctr"/>
           <a:lstStyle/>
           <a:p>
-            <a:pPr indent="0" marL="0">
+            <a:pPr marL="0" indent="0">
               <a:buNone/>
             </a:pPr>
             <a:r>
@@ -13617,13 +14215,20 @@
             <a:prstDash val="solid"/>
           </a:ln>
           <a:effectLst>
-            <a:outerShdw sx="100000" sy="100000" kx="0" ky="0" algn="bl" rotWithShape="0" blurRad="101600" dist="25400" dir="8100000">
+            <a:outerShdw blurRad="101600" dist="25400" dir="8100000" algn="bl" rotWithShape="0">
               <a:srgbClr val="000000">
                 <a:alpha val="10000"/>
               </a:srgbClr>
             </a:outerShdw>
           </a:effectLst>
         </p:spPr>
+        <p:txBody>
+          <a:bodyPr/>
+          <a:lstStyle/>
+          <a:p>
+            <a:endParaRPr lang="en-US"/>
+          </a:p>
+        </p:txBody>
       </p:sp>
       <p:sp>
         <p:nvSpPr>
@@ -13649,6 +14254,13 @@
             <a:prstDash val="solid"/>
           </a:ln>
         </p:spPr>
+        <p:txBody>
+          <a:bodyPr/>
+          <a:lstStyle/>
+          <a:p>
+            <a:endParaRPr lang="en-US"/>
+          </a:p>
+        </p:txBody>
       </p:sp>
       <p:sp>
         <p:nvSpPr>
@@ -13674,6 +14286,13 @@
             <a:prstDash val="solid"/>
           </a:ln>
         </p:spPr>
+        <p:txBody>
+          <a:bodyPr/>
+          <a:lstStyle/>
+          <a:p>
+            <a:endParaRPr lang="en-US"/>
+          </a:p>
+        </p:txBody>
       </p:sp>
       <p:sp>
         <p:nvSpPr>
@@ -13696,7 +14315,7 @@
           <a:bodyPr wrap="square" lIns="0" tIns="0" rIns="0" bIns="0" rtlCol="0" anchor="ctr"/>
           <a:lstStyle/>
           <a:p>
-            <a:pPr algn="ctr" indent="0" marL="0">
+            <a:pPr marL="0" indent="0" algn="ctr">
               <a:buNone/>
             </a:pPr>
             <a:r>
@@ -13732,7 +14351,7 @@
           <a:bodyPr wrap="square" lIns="0" tIns="0" rIns="0" bIns="0" rtlCol="0" anchor="ctr"/>
           <a:lstStyle/>
           <a:p>
-            <a:pPr indent="0" marL="0">
+            <a:pPr marL="0" indent="0">
               <a:buNone/>
             </a:pPr>
             <a:r>
@@ -13768,7 +14387,7 @@
           <a:bodyPr wrap="square" lIns="0" tIns="0" rIns="0" bIns="0" rtlCol="0" anchor="ctr"/>
           <a:lstStyle/>
           <a:p>
-            <a:pPr indent="0" marL="0">
+            <a:pPr marL="0" indent="0">
               <a:buNone/>
             </a:pPr>
             <a:r>
@@ -13807,13 +14426,20 @@
             <a:prstDash val="solid"/>
           </a:ln>
           <a:effectLst>
-            <a:outerShdw sx="100000" sy="100000" kx="0" ky="0" algn="bl" rotWithShape="0" blurRad="101600" dist="25400" dir="8100000">
+            <a:outerShdw blurRad="101600" dist="25400" dir="8100000" algn="bl" rotWithShape="0">
               <a:srgbClr val="000000">
                 <a:alpha val="10000"/>
               </a:srgbClr>
             </a:outerShdw>
           </a:effectLst>
         </p:spPr>
+        <p:txBody>
+          <a:bodyPr/>
+          <a:lstStyle/>
+          <a:p>
+            <a:endParaRPr lang="en-US"/>
+          </a:p>
+        </p:txBody>
       </p:sp>
       <p:sp>
         <p:nvSpPr>
@@ -13839,6 +14465,13 @@
             <a:prstDash val="solid"/>
           </a:ln>
         </p:spPr>
+        <p:txBody>
+          <a:bodyPr/>
+          <a:lstStyle/>
+          <a:p>
+            <a:endParaRPr lang="en-US"/>
+          </a:p>
+        </p:txBody>
       </p:sp>
       <p:sp>
         <p:nvSpPr>
@@ -13864,6 +14497,13 @@
             <a:prstDash val="solid"/>
           </a:ln>
         </p:spPr>
+        <p:txBody>
+          <a:bodyPr/>
+          <a:lstStyle/>
+          <a:p>
+            <a:endParaRPr lang="en-US"/>
+          </a:p>
+        </p:txBody>
       </p:sp>
       <p:sp>
         <p:nvSpPr>
@@ -13886,7 +14526,7 @@
           <a:bodyPr wrap="square" lIns="0" tIns="0" rIns="0" bIns="0" rtlCol="0" anchor="ctr"/>
           <a:lstStyle/>
           <a:p>
-            <a:pPr algn="ctr" indent="0" marL="0">
+            <a:pPr marL="0" indent="0" algn="ctr">
               <a:buNone/>
             </a:pPr>
             <a:r>
@@ -13922,7 +14562,7 @@
           <a:bodyPr wrap="square" lIns="0" tIns="0" rIns="0" bIns="0" rtlCol="0" anchor="ctr"/>
           <a:lstStyle/>
           <a:p>
-            <a:pPr indent="0" marL="0">
+            <a:pPr marL="0" indent="0">
               <a:buNone/>
             </a:pPr>
             <a:r>
@@ -13958,7 +14598,7 @@
           <a:bodyPr wrap="square" lIns="0" tIns="0" rIns="0" bIns="0" rtlCol="0" anchor="ctr"/>
           <a:lstStyle/>
           <a:p>
-            <a:pPr indent="0" marL="0">
+            <a:pPr marL="0" indent="0">
               <a:buNone/>
             </a:pPr>
             <a:r>
@@ -13997,13 +14637,20 @@
             <a:prstDash val="solid"/>
           </a:ln>
           <a:effectLst>
-            <a:outerShdw sx="100000" sy="100000" kx="0" ky="0" algn="bl" rotWithShape="0" blurRad="101600" dist="25400" dir="8100000">
+            <a:outerShdw blurRad="101600" dist="25400" dir="8100000" algn="bl" rotWithShape="0">
               <a:srgbClr val="000000">
                 <a:alpha val="10000"/>
               </a:srgbClr>
             </a:outerShdw>
           </a:effectLst>
         </p:spPr>
+        <p:txBody>
+          <a:bodyPr/>
+          <a:lstStyle/>
+          <a:p>
+            <a:endParaRPr lang="en-US"/>
+          </a:p>
+        </p:txBody>
       </p:sp>
       <p:sp>
         <p:nvSpPr>
@@ -14029,6 +14676,13 @@
             <a:prstDash val="solid"/>
           </a:ln>
         </p:spPr>
+        <p:txBody>
+          <a:bodyPr/>
+          <a:lstStyle/>
+          <a:p>
+            <a:endParaRPr lang="en-US"/>
+          </a:p>
+        </p:txBody>
       </p:sp>
       <p:sp>
         <p:nvSpPr>
@@ -14054,6 +14708,13 @@
             <a:prstDash val="solid"/>
           </a:ln>
         </p:spPr>
+        <p:txBody>
+          <a:bodyPr/>
+          <a:lstStyle/>
+          <a:p>
+            <a:endParaRPr lang="en-US"/>
+          </a:p>
+        </p:txBody>
       </p:sp>
       <p:sp>
         <p:nvSpPr>
@@ -14076,7 +14737,7 @@
           <a:bodyPr wrap="square" lIns="0" tIns="0" rIns="0" bIns="0" rtlCol="0" anchor="ctr"/>
           <a:lstStyle/>
           <a:p>
-            <a:pPr algn="ctr" indent="0" marL="0">
+            <a:pPr marL="0" indent="0" algn="ctr">
               <a:buNone/>
             </a:pPr>
             <a:r>
@@ -14112,7 +14773,7 @@
           <a:bodyPr wrap="square" lIns="0" tIns="0" rIns="0" bIns="0" rtlCol="0" anchor="ctr"/>
           <a:lstStyle/>
           <a:p>
-            <a:pPr indent="0" marL="0">
+            <a:pPr marL="0" indent="0">
               <a:buNone/>
             </a:pPr>
             <a:r>
@@ -14148,7 +14809,7 @@
           <a:bodyPr wrap="square" lIns="0" tIns="0" rIns="0" bIns="0" rtlCol="0" anchor="ctr"/>
           <a:lstStyle/>
           <a:p>
-            <a:pPr indent="0" marL="0">
+            <a:pPr marL="0" indent="0">
               <a:buNone/>
             </a:pPr>
             <a:r>
@@ -14187,13 +14848,20 @@
             <a:prstDash val="solid"/>
           </a:ln>
           <a:effectLst>
-            <a:outerShdw sx="100000" sy="100000" kx="0" ky="0" algn="bl" rotWithShape="0" blurRad="101600" dist="25400" dir="8100000">
+            <a:outerShdw blurRad="101600" dist="25400" dir="8100000" algn="bl" rotWithShape="0">
               <a:srgbClr val="000000">
                 <a:alpha val="10000"/>
               </a:srgbClr>
             </a:outerShdw>
           </a:effectLst>
         </p:spPr>
+        <p:txBody>
+          <a:bodyPr/>
+          <a:lstStyle/>
+          <a:p>
+            <a:endParaRPr lang="en-US"/>
+          </a:p>
+        </p:txBody>
       </p:sp>
       <p:sp>
         <p:nvSpPr>
@@ -14219,6 +14887,13 @@
             <a:prstDash val="solid"/>
           </a:ln>
         </p:spPr>
+        <p:txBody>
+          <a:bodyPr/>
+          <a:lstStyle/>
+          <a:p>
+            <a:endParaRPr lang="en-US"/>
+          </a:p>
+        </p:txBody>
       </p:sp>
       <p:sp>
         <p:nvSpPr>
@@ -14244,6 +14919,13 @@
             <a:prstDash val="solid"/>
           </a:ln>
         </p:spPr>
+        <p:txBody>
+          <a:bodyPr/>
+          <a:lstStyle/>
+          <a:p>
+            <a:endParaRPr lang="en-US"/>
+          </a:p>
+        </p:txBody>
       </p:sp>
       <p:sp>
         <p:nvSpPr>
@@ -14266,7 +14948,7 @@
           <a:bodyPr wrap="square" lIns="0" tIns="0" rIns="0" bIns="0" rtlCol="0" anchor="ctr"/>
           <a:lstStyle/>
           <a:p>
-            <a:pPr algn="ctr" indent="0" marL="0">
+            <a:pPr marL="0" indent="0" algn="ctr">
               <a:buNone/>
             </a:pPr>
             <a:r>
@@ -14302,7 +14984,7 @@
           <a:bodyPr wrap="square" lIns="0" tIns="0" rIns="0" bIns="0" rtlCol="0" anchor="ctr"/>
           <a:lstStyle/>
           <a:p>
-            <a:pPr indent="0" marL="0">
+            <a:pPr marL="0" indent="0">
               <a:buNone/>
             </a:pPr>
             <a:r>
@@ -14338,7 +15020,7 @@
           <a:bodyPr wrap="square" lIns="0" tIns="0" rIns="0" bIns="0" rtlCol="0" anchor="ctr"/>
           <a:lstStyle/>
           <a:p>
-            <a:pPr indent="0" marL="0">
+            <a:pPr marL="0" indent="0">
               <a:buNone/>
             </a:pPr>
             <a:r>
@@ -14377,13 +15059,20 @@
             <a:prstDash val="solid"/>
           </a:ln>
           <a:effectLst>
-            <a:outerShdw sx="100000" sy="100000" kx="0" ky="0" algn="bl" rotWithShape="0" blurRad="101600" dist="25400" dir="8100000">
+            <a:outerShdw blurRad="101600" dist="25400" dir="8100000" algn="bl" rotWithShape="0">
               <a:srgbClr val="000000">
                 <a:alpha val="10000"/>
               </a:srgbClr>
             </a:outerShdw>
           </a:effectLst>
         </p:spPr>
+        <p:txBody>
+          <a:bodyPr/>
+          <a:lstStyle/>
+          <a:p>
+            <a:endParaRPr lang="en-US"/>
+          </a:p>
+        </p:txBody>
       </p:sp>
       <p:sp>
         <p:nvSpPr>
@@ -14406,7 +15095,7 @@
           <a:bodyPr wrap="square" lIns="0" tIns="0" rIns="0" bIns="0" rtlCol="0" anchor="ctr"/>
           <a:lstStyle/>
           <a:p>
-            <a:pPr indent="0" marL="0">
+            <a:pPr marL="0" indent="0">
               <a:buNone/>
             </a:pPr>
             <a:r>
@@ -14442,7 +15131,7 @@
           <a:bodyPr wrap="square" lIns="0" tIns="0" rIns="0" bIns="0" rtlCol="0" anchor="ctr"/>
           <a:lstStyle/>
           <a:p>
-            <a:pPr indent="0" marL="0">
+            <a:pPr marL="0" indent="0">
               <a:buNone/>
             </a:pPr>
             <a:r>
@@ -14473,6 +15162,7 @@
         <a:solidFill>
           <a:srgbClr val="F0FDFA"/>
         </a:solidFill>
+        <a:effectLst/>
       </p:bgPr>
     </p:bg>
     <p:spTree>
@@ -14513,6 +15203,13 @@
             <a:prstDash val="solid"/>
           </a:ln>
         </p:spPr>
+        <p:txBody>
+          <a:bodyPr/>
+          <a:lstStyle/>
+          <a:p>
+            <a:endParaRPr lang="en-US"/>
+          </a:p>
+        </p:txBody>
       </p:sp>
       <p:sp>
         <p:nvSpPr>
@@ -14535,7 +15232,7 @@
           <a:bodyPr wrap="square" lIns="0" tIns="0" rIns="0" bIns="0" rtlCol="0" anchor="ctr"/>
           <a:lstStyle/>
           <a:p>
-            <a:pPr indent="0" marL="0">
+            <a:pPr marL="0" indent="0">
               <a:buNone/>
             </a:pPr>
             <a:r>
@@ -14574,6 +15271,13 @@
             <a:prstDash val="solid"/>
           </a:ln>
         </p:spPr>
+        <p:txBody>
+          <a:bodyPr/>
+          <a:lstStyle/>
+          <a:p>
+            <a:endParaRPr lang="en-US"/>
+          </a:p>
+        </p:txBody>
       </p:sp>
       <p:sp>
         <p:nvSpPr>
@@ -14596,7 +15300,7 @@
           <a:bodyPr wrap="square" lIns="0" tIns="0" rIns="0" bIns="0" rtlCol="0" anchor="ctr"/>
           <a:lstStyle/>
           <a:p>
-            <a:pPr algn="ctr" indent="0" marL="0">
+            <a:pPr marL="0" indent="0" algn="ctr">
               <a:buNone/>
             </a:pPr>
             <a:r>
@@ -14632,7 +15336,7 @@
           <a:bodyPr wrap="square" lIns="0" tIns="0" rIns="0" bIns="0" rtlCol="0" anchor="ctr"/>
           <a:lstStyle/>
           <a:p>
-            <a:pPr algn="ctr" indent="0" marL="0">
+            <a:pPr marL="0" indent="0" algn="ctr">
               <a:buNone/>
             </a:pPr>
             <a:r>
@@ -14668,7 +15372,7 @@
           <a:bodyPr wrap="square" lIns="0" tIns="0" rIns="0" bIns="0" rtlCol="0" anchor="ctr"/>
           <a:lstStyle/>
           <a:p>
-            <a:pPr algn="ctr" indent="0" marL="0">
+            <a:pPr marL="0" indent="0" algn="ctr">
               <a:buNone/>
             </a:pPr>
             <a:r>
@@ -14704,7 +15408,7 @@
           <a:bodyPr wrap="square" lIns="0" tIns="0" rIns="0" bIns="0" rtlCol="0" anchor="ctr"/>
           <a:lstStyle/>
           <a:p>
-            <a:pPr indent="0" marL="0">
+            <a:pPr marL="0" indent="0">
               <a:buNone/>
             </a:pPr>
             <a:r>
@@ -14752,9 +15456,6 @@
               </a:rPr>
               <a:t>  </a:t>
             </a:r>
-            <a:pPr indent="0" marL="0">
-              <a:buNone/>
-            </a:pPr>
             <a:r>
               <a:rPr lang="en-US" sz="1050" dirty="0">
                 <a:solidFill>
@@ -14800,9 +15501,6 @@
               </a:rPr>
               <a:t>  </a:t>
             </a:r>
-            <a:pPr indent="0" marL="0">
-              <a:buNone/>
-            </a:pPr>
             <a:r>
               <a:rPr lang="en-US" sz="1050" dirty="0">
                 <a:solidFill>
@@ -14848,9 +15546,6 @@
               </a:rPr>
               <a:t>  </a:t>
             </a:r>
-            <a:pPr indent="0" marL="0">
-              <a:buNone/>
-            </a:pPr>
             <a:r>
               <a:rPr lang="en-US" sz="1050" dirty="0">
                 <a:solidFill>
@@ -14896,9 +15591,6 @@
               </a:rPr>
               <a:t>  </a:t>
             </a:r>
-            <a:pPr indent="0" marL="0">
-              <a:buNone/>
-            </a:pPr>
             <a:r>
               <a:rPr lang="en-US" sz="1050" dirty="0">
                 <a:solidFill>
@@ -14944,9 +15636,6 @@
               </a:rPr>
               <a:t>  </a:t>
             </a:r>
-            <a:pPr indent="0" marL="0">
-              <a:buNone/>
-            </a:pPr>
             <a:r>
               <a:rPr lang="en-US" sz="1050" dirty="0">
                 <a:solidFill>
@@ -14983,13 +15672,20 @@
             <a:prstDash val="solid"/>
           </a:ln>
           <a:effectLst>
-            <a:outerShdw sx="100000" sy="100000" kx="0" ky="0" algn="bl" rotWithShape="0" blurRad="101600" dist="25400" dir="8100000">
+            <a:outerShdw blurRad="101600" dist="25400" dir="8100000" algn="bl" rotWithShape="0">
               <a:srgbClr val="000000">
                 <a:alpha val="10000"/>
               </a:srgbClr>
             </a:outerShdw>
           </a:effectLst>
         </p:spPr>
+        <p:txBody>
+          <a:bodyPr/>
+          <a:lstStyle/>
+          <a:p>
+            <a:endParaRPr lang="en-US"/>
+          </a:p>
+        </p:txBody>
       </p:sp>
       <p:sp>
         <p:nvSpPr>
@@ -15015,6 +15711,13 @@
             <a:prstDash val="solid"/>
           </a:ln>
         </p:spPr>
+        <p:txBody>
+          <a:bodyPr/>
+          <a:lstStyle/>
+          <a:p>
+            <a:endParaRPr lang="en-US"/>
+          </a:p>
+        </p:txBody>
       </p:sp>
       <p:sp>
         <p:nvSpPr>
@@ -15037,7 +15740,7 @@
           <a:bodyPr wrap="square" lIns="0" tIns="0" rIns="0" bIns="0" rtlCol="0" anchor="ctr"/>
           <a:lstStyle/>
           <a:p>
-            <a:pPr indent="0" marL="0">
+            <a:pPr marL="0" indent="0">
               <a:buNone/>
             </a:pPr>
             <a:r>
@@ -15073,7 +15776,7 @@
           <a:bodyPr wrap="square" lIns="0" tIns="0" rIns="0" bIns="0" rtlCol="0" anchor="ctr"/>
           <a:lstStyle/>
           <a:p>
-            <a:pPr indent="0" marL="0">
+            <a:pPr marL="0" indent="0">
               <a:buNone/>
             </a:pPr>
             <a:r>
@@ -15109,7 +15812,7 @@
           <a:bodyPr wrap="square" lIns="0" tIns="0" rIns="0" bIns="0" rtlCol="0" anchor="ctr"/>
           <a:lstStyle/>
           <a:p>
-            <a:pPr indent="0" marL="0">
+            <a:pPr marL="0" indent="0">
               <a:buNone/>
             </a:pPr>
             <a:r>
@@ -15140,6 +15843,7 @@
         <a:solidFill>
           <a:srgbClr val="F0FDFA"/>
         </a:solidFill>
+        <a:effectLst/>
       </p:bgPr>
     </p:bg>
     <p:spTree>
@@ -15180,6 +15884,13 @@
             <a:prstDash val="solid"/>
           </a:ln>
         </p:spPr>
+        <p:txBody>
+          <a:bodyPr/>
+          <a:lstStyle/>
+          <a:p>
+            <a:endParaRPr lang="en-US"/>
+          </a:p>
+        </p:txBody>
       </p:sp>
       <p:sp>
         <p:nvSpPr>
@@ -15202,7 +15913,7 @@
           <a:bodyPr wrap="square" lIns="0" tIns="0" rIns="0" bIns="0" rtlCol="0" anchor="ctr"/>
           <a:lstStyle/>
           <a:p>
-            <a:pPr indent="0" marL="0">
+            <a:pPr marL="0" indent="0">
               <a:buNone/>
             </a:pPr>
             <a:r>
@@ -15241,6 +15952,13 @@
             <a:prstDash val="solid"/>
           </a:ln>
         </p:spPr>
+        <p:txBody>
+          <a:bodyPr/>
+          <a:lstStyle/>
+          <a:p>
+            <a:endParaRPr lang="en-US"/>
+          </a:p>
+        </p:txBody>
       </p:sp>
       <p:sp>
         <p:nvSpPr>
@@ -15263,7 +15981,7 @@
           <a:bodyPr wrap="square" lIns="0" tIns="0" rIns="0" bIns="0" rtlCol="0" anchor="ctr"/>
           <a:lstStyle/>
           <a:p>
-            <a:pPr algn="ctr" indent="0" marL="0">
+            <a:pPr marL="0" indent="0" algn="ctr">
               <a:buNone/>
             </a:pPr>
             <a:r>
@@ -15299,7 +16017,7 @@
           <a:bodyPr wrap="square" lIns="0" tIns="0" rIns="0" bIns="0" rtlCol="0" anchor="ctr"/>
           <a:lstStyle/>
           <a:p>
-            <a:pPr algn="ctr" indent="0" marL="0">
+            <a:pPr marL="0" indent="0" algn="ctr">
               <a:buNone/>
             </a:pPr>
             <a:r>
@@ -15335,7 +16053,7 @@
           <a:bodyPr wrap="square" lIns="0" tIns="0" rIns="0" bIns="0" rtlCol="0" anchor="ctr"/>
           <a:lstStyle/>
           <a:p>
-            <a:pPr algn="ctr" indent="0" marL="0">
+            <a:pPr marL="0" indent="0" algn="ctr">
               <a:buNone/>
             </a:pPr>
             <a:r>
@@ -15374,6 +16092,13 @@
             <a:prstDash val="solid"/>
           </a:ln>
         </p:spPr>
+        <p:txBody>
+          <a:bodyPr/>
+          <a:lstStyle/>
+          <a:p>
+            <a:endParaRPr lang="en-US"/>
+          </a:p>
+        </p:txBody>
       </p:sp>
       <p:sp>
         <p:nvSpPr>
@@ -15396,7 +16121,7 @@
           <a:bodyPr wrap="square" lIns="0" tIns="0" rIns="0" bIns="0" rtlCol="0" anchor="ctr"/>
           <a:lstStyle/>
           <a:p>
-            <a:pPr indent="0" marL="0">
+            <a:pPr marL="0" indent="0">
               <a:buNone/>
             </a:pPr>
             <a:r>
@@ -15432,7 +16157,7 @@
           <a:bodyPr wrap="square" lIns="0" tIns="0" rIns="0" bIns="0" rtlCol="0" anchor="ctr"/>
           <a:lstStyle/>
           <a:p>
-            <a:pPr indent="0" marL="0">
+            <a:pPr marL="0" indent="0">
               <a:buNone/>
             </a:pPr>
             <a:r>
@@ -15468,7 +16193,7 @@
           <a:bodyPr wrap="square" lIns="0" tIns="0" rIns="0" bIns="0" rtlCol="0" anchor="ctr"/>
           <a:lstStyle/>
           <a:p>
-            <a:pPr indent="0" marL="0">
+            <a:pPr marL="0" indent="0">
               <a:buNone/>
             </a:pPr>
             <a:r>
@@ -15507,6 +16232,13 @@
             <a:prstDash val="solid"/>
           </a:ln>
         </p:spPr>
+        <p:txBody>
+          <a:bodyPr/>
+          <a:lstStyle/>
+          <a:p>
+            <a:endParaRPr lang="en-US"/>
+          </a:p>
+        </p:txBody>
       </p:sp>
       <p:sp>
         <p:nvSpPr>
@@ -15529,7 +16261,7 @@
           <a:bodyPr wrap="square" lIns="0" tIns="0" rIns="0" bIns="0" rtlCol="0" anchor="ctr"/>
           <a:lstStyle/>
           <a:p>
-            <a:pPr indent="0" marL="0">
+            <a:pPr marL="0" indent="0">
               <a:buNone/>
             </a:pPr>
             <a:r>
@@ -15565,7 +16297,7 @@
           <a:bodyPr wrap="square" lIns="0" tIns="0" rIns="0" bIns="0" rtlCol="0" anchor="ctr"/>
           <a:lstStyle/>
           <a:p>
-            <a:pPr indent="0" marL="0">
+            <a:pPr marL="0" indent="0">
               <a:buNone/>
             </a:pPr>
             <a:r>
@@ -15601,7 +16333,7 @@
           <a:bodyPr wrap="square" lIns="0" tIns="0" rIns="0" bIns="0" rtlCol="0" anchor="ctr"/>
           <a:lstStyle/>
           <a:p>
-            <a:pPr indent="0" marL="0">
+            <a:pPr marL="0" indent="0">
               <a:buNone/>
             </a:pPr>
             <a:r>
@@ -15640,6 +16372,13 @@
             <a:prstDash val="solid"/>
           </a:ln>
         </p:spPr>
+        <p:txBody>
+          <a:bodyPr/>
+          <a:lstStyle/>
+          <a:p>
+            <a:endParaRPr lang="en-US"/>
+          </a:p>
+        </p:txBody>
       </p:sp>
       <p:sp>
         <p:nvSpPr>
@@ -15662,7 +16401,7 @@
           <a:bodyPr wrap="square" lIns="0" tIns="0" rIns="0" bIns="0" rtlCol="0" anchor="ctr"/>
           <a:lstStyle/>
           <a:p>
-            <a:pPr indent="0" marL="0">
+            <a:pPr marL="0" indent="0">
               <a:buNone/>
             </a:pPr>
             <a:r>
@@ -15698,7 +16437,7 @@
           <a:bodyPr wrap="square" lIns="0" tIns="0" rIns="0" bIns="0" rtlCol="0" anchor="ctr"/>
           <a:lstStyle/>
           <a:p>
-            <a:pPr indent="0" marL="0">
+            <a:pPr marL="0" indent="0">
               <a:buNone/>
             </a:pPr>
             <a:r>
@@ -15734,7 +16473,7 @@
           <a:bodyPr wrap="square" lIns="0" tIns="0" rIns="0" bIns="0" rtlCol="0" anchor="ctr"/>
           <a:lstStyle/>
           <a:p>
-            <a:pPr indent="0" marL="0">
+            <a:pPr marL="0" indent="0">
               <a:buNone/>
             </a:pPr>
             <a:r>
@@ -15773,6 +16512,13 @@
             <a:prstDash val="solid"/>
           </a:ln>
         </p:spPr>
+        <p:txBody>
+          <a:bodyPr/>
+          <a:lstStyle/>
+          <a:p>
+            <a:endParaRPr lang="en-US"/>
+          </a:p>
+        </p:txBody>
       </p:sp>
       <p:sp>
         <p:nvSpPr>
@@ -15795,7 +16541,7 @@
           <a:bodyPr wrap="square" lIns="0" tIns="0" rIns="0" bIns="0" rtlCol="0" anchor="ctr"/>
           <a:lstStyle/>
           <a:p>
-            <a:pPr indent="0" marL="0">
+            <a:pPr marL="0" indent="0">
               <a:buNone/>
             </a:pPr>
             <a:r>
@@ -15831,7 +16577,7 @@
           <a:bodyPr wrap="square" lIns="0" tIns="0" rIns="0" bIns="0" rtlCol="0" anchor="ctr"/>
           <a:lstStyle/>
           <a:p>
-            <a:pPr indent="0" marL="0">
+            <a:pPr marL="0" indent="0">
               <a:buNone/>
             </a:pPr>
             <a:r>
@@ -15867,7 +16613,7 @@
           <a:bodyPr wrap="square" lIns="0" tIns="0" rIns="0" bIns="0" rtlCol="0" anchor="ctr"/>
           <a:lstStyle/>
           <a:p>
-            <a:pPr indent="0" marL="0">
+            <a:pPr marL="0" indent="0">
               <a:buNone/>
             </a:pPr>
             <a:r>
@@ -15906,6 +16652,13 @@
             <a:prstDash val="solid"/>
           </a:ln>
         </p:spPr>
+        <p:txBody>
+          <a:bodyPr/>
+          <a:lstStyle/>
+          <a:p>
+            <a:endParaRPr lang="en-US"/>
+          </a:p>
+        </p:txBody>
       </p:sp>
       <p:sp>
         <p:nvSpPr>
@@ -15928,7 +16681,7 @@
           <a:bodyPr wrap="square" lIns="0" tIns="0" rIns="0" bIns="0" rtlCol="0" anchor="ctr"/>
           <a:lstStyle/>
           <a:p>
-            <a:pPr indent="0" marL="0">
+            <a:pPr marL="0" indent="0">
               <a:buNone/>
             </a:pPr>
             <a:r>
@@ -15964,7 +16717,7 @@
           <a:bodyPr wrap="square" lIns="0" tIns="0" rIns="0" bIns="0" rtlCol="0" anchor="ctr"/>
           <a:lstStyle/>
           <a:p>
-            <a:pPr indent="0" marL="0">
+            <a:pPr marL="0" indent="0">
               <a:buNone/>
             </a:pPr>
             <a:r>
@@ -16000,7 +16753,7 @@
           <a:bodyPr wrap="square" lIns="0" tIns="0" rIns="0" bIns="0" rtlCol="0" anchor="ctr"/>
           <a:lstStyle/>
           <a:p>
-            <a:pPr indent="0" marL="0">
+            <a:pPr marL="0" indent="0">
               <a:buNone/>
             </a:pPr>
             <a:r>
@@ -16039,6 +16792,13 @@
             <a:prstDash val="solid"/>
           </a:ln>
         </p:spPr>
+        <p:txBody>
+          <a:bodyPr/>
+          <a:lstStyle/>
+          <a:p>
+            <a:endParaRPr lang="en-US"/>
+          </a:p>
+        </p:txBody>
       </p:sp>
       <p:sp>
         <p:nvSpPr>
@@ -16061,7 +16821,7 @@
           <a:bodyPr wrap="square" lIns="0" tIns="0" rIns="0" bIns="0" rtlCol="0" anchor="ctr"/>
           <a:lstStyle/>
           <a:p>
-            <a:pPr indent="0" marL="0">
+            <a:pPr marL="0" indent="0">
               <a:buNone/>
             </a:pPr>
             <a:r>
@@ -16097,7 +16857,7 @@
           <a:bodyPr wrap="square" lIns="0" tIns="0" rIns="0" bIns="0" rtlCol="0" anchor="ctr"/>
           <a:lstStyle/>
           <a:p>
-            <a:pPr indent="0" marL="0">
+            <a:pPr marL="0" indent="0">
               <a:buNone/>
             </a:pPr>
             <a:r>
@@ -16133,7 +16893,7 @@
           <a:bodyPr wrap="square" lIns="0" tIns="0" rIns="0" bIns="0" rtlCol="0" anchor="ctr"/>
           <a:lstStyle/>
           <a:p>
-            <a:pPr indent="0" marL="0">
+            <a:pPr marL="0" indent="0">
               <a:buNone/>
             </a:pPr>
             <a:r>
@@ -16172,6 +16932,13 @@
             <a:prstDash val="solid"/>
           </a:ln>
         </p:spPr>
+        <p:txBody>
+          <a:bodyPr/>
+          <a:lstStyle/>
+          <a:p>
+            <a:endParaRPr lang="en-US"/>
+          </a:p>
+        </p:txBody>
       </p:sp>
       <p:sp>
         <p:nvSpPr>
@@ -16194,7 +16961,7 @@
           <a:bodyPr wrap="square" lIns="0" tIns="0" rIns="0" bIns="0" rtlCol="0" anchor="ctr"/>
           <a:lstStyle/>
           <a:p>
-            <a:pPr indent="0" marL="0">
+            <a:pPr marL="0" indent="0">
               <a:buNone/>
             </a:pPr>
             <a:r>
@@ -16230,7 +16997,7 @@
           <a:bodyPr wrap="square" lIns="0" tIns="0" rIns="0" bIns="0" rtlCol="0" anchor="ctr"/>
           <a:lstStyle/>
           <a:p>
-            <a:pPr indent="0" marL="0">
+            <a:pPr marL="0" indent="0">
               <a:buNone/>
             </a:pPr>
             <a:r>
@@ -16266,7 +17033,7 @@
           <a:bodyPr wrap="square" lIns="0" tIns="0" rIns="0" bIns="0" rtlCol="0" anchor="ctr"/>
           <a:lstStyle/>
           <a:p>
-            <a:pPr indent="0" marL="0">
+            <a:pPr marL="0" indent="0">
               <a:buNone/>
             </a:pPr>
             <a:r>
@@ -16305,6 +17072,13 @@
             <a:prstDash val="solid"/>
           </a:ln>
         </p:spPr>
+        <p:txBody>
+          <a:bodyPr/>
+          <a:lstStyle/>
+          <a:p>
+            <a:endParaRPr lang="en-US"/>
+          </a:p>
+        </p:txBody>
       </p:sp>
       <p:sp>
         <p:nvSpPr>
@@ -16327,7 +17101,7 @@
           <a:bodyPr wrap="square" lIns="0" tIns="0" rIns="0" bIns="0" rtlCol="0" anchor="ctr"/>
           <a:lstStyle/>
           <a:p>
-            <a:pPr indent="0" marL="0">
+            <a:pPr marL="0" indent="0">
               <a:buNone/>
             </a:pPr>
             <a:r>
@@ -16363,7 +17137,7 @@
           <a:bodyPr wrap="square" lIns="0" tIns="0" rIns="0" bIns="0" rtlCol="0" anchor="ctr"/>
           <a:lstStyle/>
           <a:p>
-            <a:pPr indent="0" marL="0">
+            <a:pPr marL="0" indent="0">
               <a:buNone/>
             </a:pPr>
             <a:r>
@@ -16399,7 +17173,7 @@
           <a:bodyPr wrap="square" lIns="0" tIns="0" rIns="0" bIns="0" rtlCol="0" anchor="ctr"/>
           <a:lstStyle/>
           <a:p>
-            <a:pPr indent="0" marL="0">
+            <a:pPr marL="0" indent="0">
               <a:buNone/>
             </a:pPr>
             <a:r>
@@ -16438,6 +17212,13 @@
             <a:prstDash val="solid"/>
           </a:ln>
         </p:spPr>
+        <p:txBody>
+          <a:bodyPr/>
+          <a:lstStyle/>
+          <a:p>
+            <a:endParaRPr lang="en-US"/>
+          </a:p>
+        </p:txBody>
       </p:sp>
       <p:sp>
         <p:nvSpPr>
@@ -16460,7 +17241,7 @@
           <a:bodyPr wrap="square" lIns="0" tIns="0" rIns="0" bIns="0" rtlCol="0" anchor="ctr"/>
           <a:lstStyle/>
           <a:p>
-            <a:pPr indent="0" marL="0">
+            <a:pPr marL="0" indent="0">
               <a:buNone/>
             </a:pPr>
             <a:r>
@@ -16496,7 +17277,7 @@
           <a:bodyPr wrap="square" lIns="0" tIns="0" rIns="0" bIns="0" rtlCol="0" anchor="ctr"/>
           <a:lstStyle/>
           <a:p>
-            <a:pPr indent="0" marL="0">
+            <a:pPr marL="0" indent="0">
               <a:buNone/>
             </a:pPr>
             <a:r>
@@ -16532,7 +17313,7 @@
           <a:bodyPr wrap="square" lIns="0" tIns="0" rIns="0" bIns="0" rtlCol="0" anchor="ctr"/>
           <a:lstStyle/>
           <a:p>
-            <a:pPr indent="0" marL="0">
+            <a:pPr marL="0" indent="0">
               <a:buNone/>
             </a:pPr>
             <a:r>
@@ -16571,6 +17352,13 @@
             <a:prstDash val="solid"/>
           </a:ln>
         </p:spPr>
+        <p:txBody>
+          <a:bodyPr/>
+          <a:lstStyle/>
+          <a:p>
+            <a:endParaRPr lang="en-US"/>
+          </a:p>
+        </p:txBody>
       </p:sp>
       <p:sp>
         <p:nvSpPr>
@@ -16593,7 +17381,7 @@
           <a:bodyPr wrap="square" lIns="0" tIns="0" rIns="0" bIns="0" rtlCol="0" anchor="ctr"/>
           <a:lstStyle/>
           <a:p>
-            <a:pPr indent="0" marL="0">
+            <a:pPr marL="0" indent="0">
               <a:buNone/>
             </a:pPr>
             <a:r>
@@ -16629,7 +17417,7 @@
           <a:bodyPr wrap="square" lIns="0" tIns="0" rIns="0" bIns="0" rtlCol="0" anchor="ctr"/>
           <a:lstStyle/>
           <a:p>
-            <a:pPr indent="0" marL="0">
+            <a:pPr marL="0" indent="0">
               <a:buNone/>
             </a:pPr>
             <a:r>
@@ -16665,7 +17453,7 @@
           <a:bodyPr wrap="square" lIns="0" tIns="0" rIns="0" bIns="0" rtlCol="0" anchor="ctr"/>
           <a:lstStyle/>
           <a:p>
-            <a:pPr indent="0" marL="0">
+            <a:pPr marL="0" indent="0">
               <a:buNone/>
             </a:pPr>
             <a:r>
@@ -16704,6 +17492,13 @@
             <a:prstDash val="solid"/>
           </a:ln>
         </p:spPr>
+        <p:txBody>
+          <a:bodyPr/>
+          <a:lstStyle/>
+          <a:p>
+            <a:endParaRPr lang="en-US"/>
+          </a:p>
+        </p:txBody>
       </p:sp>
       <p:sp>
         <p:nvSpPr>
@@ -16726,7 +17521,7 @@
           <a:bodyPr wrap="square" lIns="0" tIns="0" rIns="0" bIns="0" rtlCol="0" anchor="ctr"/>
           <a:lstStyle/>
           <a:p>
-            <a:pPr indent="0" marL="0">
+            <a:pPr marL="0" indent="0">
               <a:buNone/>
             </a:pPr>
             <a:r>
@@ -16762,7 +17557,7 @@
           <a:bodyPr wrap="square" lIns="0" tIns="0" rIns="0" bIns="0" rtlCol="0" anchor="ctr"/>
           <a:lstStyle/>
           <a:p>
-            <a:pPr indent="0" marL="0">
+            <a:pPr marL="0" indent="0">
               <a:buNone/>
             </a:pPr>
             <a:r>
@@ -16798,7 +17593,7 @@
           <a:bodyPr wrap="square" lIns="0" tIns="0" rIns="0" bIns="0" rtlCol="0" anchor="ctr"/>
           <a:lstStyle/>
           <a:p>
-            <a:pPr indent="0" marL="0">
+            <a:pPr marL="0" indent="0">
               <a:buNone/>
             </a:pPr>
             <a:r>
@@ -16834,7 +17629,7 @@
           <a:bodyPr wrap="square" lIns="0" tIns="0" rIns="0" bIns="0" rtlCol="0" anchor="ctr"/>
           <a:lstStyle/>
           <a:p>
-            <a:pPr indent="0" marL="0">
+            <a:pPr marL="0" indent="0">
               <a:buNone/>
             </a:pPr>
             <a:r>
@@ -16865,6 +17660,7 @@
         <a:solidFill>
           <a:srgbClr val="F0FDFA"/>
         </a:solidFill>
+        <a:effectLst/>
       </p:bgPr>
     </p:bg>
     <p:spTree>
@@ -16905,6 +17701,13 @@
             <a:prstDash val="solid"/>
           </a:ln>
         </p:spPr>
+        <p:txBody>
+          <a:bodyPr/>
+          <a:lstStyle/>
+          <a:p>
+            <a:endParaRPr lang="en-US"/>
+          </a:p>
+        </p:txBody>
       </p:sp>
       <p:sp>
         <p:nvSpPr>
@@ -16927,7 +17730,7 @@
           <a:bodyPr wrap="square" lIns="0" tIns="0" rIns="0" bIns="0" rtlCol="0" anchor="ctr"/>
           <a:lstStyle/>
           <a:p>
-            <a:pPr indent="0" marL="0">
+            <a:pPr marL="0" indent="0">
               <a:buNone/>
             </a:pPr>
             <a:r>
@@ -16966,6 +17769,13 @@
             <a:prstDash val="solid"/>
           </a:ln>
         </p:spPr>
+        <p:txBody>
+          <a:bodyPr/>
+          <a:lstStyle/>
+          <a:p>
+            <a:endParaRPr lang="en-US"/>
+          </a:p>
+        </p:txBody>
       </p:sp>
       <p:sp>
         <p:nvSpPr>
@@ -16988,7 +17798,7 @@
           <a:bodyPr wrap="square" lIns="0" tIns="0" rIns="0" bIns="0" rtlCol="0" anchor="ctr"/>
           <a:lstStyle/>
           <a:p>
-            <a:pPr algn="ctr" indent="0" marL="0">
+            <a:pPr marL="0" indent="0" algn="ctr">
               <a:buNone/>
             </a:pPr>
             <a:r>
@@ -17024,7 +17834,7 @@
           <a:bodyPr wrap="square" lIns="0" tIns="0" rIns="0" bIns="0" rtlCol="0" anchor="ctr"/>
           <a:lstStyle/>
           <a:p>
-            <a:pPr algn="ctr" indent="0" marL="0">
+            <a:pPr marL="0" indent="0" algn="ctr">
               <a:buNone/>
             </a:pPr>
             <a:r>
@@ -17060,7 +17870,7 @@
           <a:bodyPr wrap="square" lIns="0" tIns="0" rIns="0" bIns="0" rtlCol="0" anchor="ctr"/>
           <a:lstStyle/>
           <a:p>
-            <a:pPr algn="ctr" indent="0" marL="0">
+            <a:pPr marL="0" indent="0" algn="ctr">
               <a:buNone/>
             </a:pPr>
             <a:r>
@@ -17096,7 +17906,7 @@
           <a:bodyPr wrap="square" lIns="0" tIns="0" rIns="0" bIns="0" rtlCol="0" anchor="ctr"/>
           <a:lstStyle/>
           <a:p>
-            <a:pPr indent="0" marL="0">
+            <a:pPr marL="0" indent="0">
               <a:buNone/>
             </a:pPr>
             <a:r>
@@ -17135,13 +17945,20 @@
             <a:prstDash val="solid"/>
           </a:ln>
           <a:effectLst>
-            <a:outerShdw sx="100000" sy="100000" kx="0" ky="0" algn="bl" rotWithShape="0" blurRad="101600" dist="25400" dir="8100000">
+            <a:outerShdw blurRad="101600" dist="25400" dir="8100000" algn="bl" rotWithShape="0">
               <a:srgbClr val="000000">
                 <a:alpha val="10000"/>
               </a:srgbClr>
             </a:outerShdw>
           </a:effectLst>
         </p:spPr>
+        <p:txBody>
+          <a:bodyPr/>
+          <a:lstStyle/>
+          <a:p>
+            <a:endParaRPr lang="en-US"/>
+          </a:p>
+        </p:txBody>
       </p:sp>
       <p:sp>
         <p:nvSpPr>
@@ -17167,6 +17984,13 @@
             <a:prstDash val="solid"/>
           </a:ln>
         </p:spPr>
+        <p:txBody>
+          <a:bodyPr/>
+          <a:lstStyle/>
+          <a:p>
+            <a:endParaRPr lang="en-US"/>
+          </a:p>
+        </p:txBody>
       </p:sp>
       <p:sp>
         <p:nvSpPr>
@@ -17189,7 +18013,7 @@
           <a:bodyPr wrap="square" lIns="0" tIns="0" rIns="0" bIns="0" rtlCol="0" anchor="ctr"/>
           <a:lstStyle/>
           <a:p>
-            <a:pPr indent="0" marL="0">
+            <a:pPr marL="0" indent="0">
               <a:buNone/>
             </a:pPr>
             <a:r>
@@ -17225,7 +18049,7 @@
           <a:bodyPr wrap="square" lIns="0" tIns="0" rIns="0" bIns="0" rtlCol="0" anchor="ctr"/>
           <a:lstStyle/>
           <a:p>
-            <a:pPr algn="r" indent="0" marL="0">
+            <a:pPr marL="0" indent="0" algn="r">
               <a:buNone/>
             </a:pPr>
             <a:r>
@@ -17264,6 +18088,13 @@
             <a:prstDash val="solid"/>
           </a:ln>
         </p:spPr>
+        <p:txBody>
+          <a:bodyPr/>
+          <a:lstStyle/>
+          <a:p>
+            <a:endParaRPr lang="en-US"/>
+          </a:p>
+        </p:txBody>
       </p:sp>
       <p:sp>
         <p:nvSpPr>
@@ -17289,6 +18120,13 @@
             <a:prstDash val="solid"/>
           </a:ln>
         </p:spPr>
+        <p:txBody>
+          <a:bodyPr/>
+          <a:lstStyle/>
+          <a:p>
+            <a:endParaRPr lang="en-US"/>
+          </a:p>
+        </p:txBody>
       </p:sp>
       <p:sp>
         <p:nvSpPr>
@@ -17311,7 +18149,7 @@
           <a:bodyPr wrap="square" lIns="0" tIns="0" rIns="0" bIns="0" rtlCol="0" anchor="ctr"/>
           <a:lstStyle/>
           <a:p>
-            <a:pPr indent="0" marL="0">
+            <a:pPr marL="0" indent="0">
               <a:buNone/>
             </a:pPr>
             <a:r>
@@ -17350,13 +18188,20 @@
             <a:prstDash val="solid"/>
           </a:ln>
           <a:effectLst>
-            <a:outerShdw sx="100000" sy="100000" kx="0" ky="0" algn="bl" rotWithShape="0" blurRad="101600" dist="25400" dir="8100000">
+            <a:outerShdw blurRad="101600" dist="25400" dir="8100000" algn="bl" rotWithShape="0">
               <a:srgbClr val="000000">
                 <a:alpha val="10000"/>
               </a:srgbClr>
             </a:outerShdw>
           </a:effectLst>
         </p:spPr>
+        <p:txBody>
+          <a:bodyPr/>
+          <a:lstStyle/>
+          <a:p>
+            <a:endParaRPr lang="en-US"/>
+          </a:p>
+        </p:txBody>
       </p:sp>
       <p:sp>
         <p:nvSpPr>
@@ -17382,6 +18227,13 @@
             <a:prstDash val="solid"/>
           </a:ln>
         </p:spPr>
+        <p:txBody>
+          <a:bodyPr/>
+          <a:lstStyle/>
+          <a:p>
+            <a:endParaRPr lang="en-US"/>
+          </a:p>
+        </p:txBody>
       </p:sp>
       <p:sp>
         <p:nvSpPr>
@@ -17404,7 +18256,7 @@
           <a:bodyPr wrap="square" lIns="0" tIns="0" rIns="0" bIns="0" rtlCol="0" anchor="ctr"/>
           <a:lstStyle/>
           <a:p>
-            <a:pPr indent="0" marL="0">
+            <a:pPr marL="0" indent="0">
               <a:buNone/>
             </a:pPr>
             <a:r>
@@ -17440,7 +18292,7 @@
           <a:bodyPr wrap="square" lIns="0" tIns="0" rIns="0" bIns="0" rtlCol="0" anchor="ctr"/>
           <a:lstStyle/>
           <a:p>
-            <a:pPr algn="r" indent="0" marL="0">
+            <a:pPr marL="0" indent="0" algn="r">
               <a:buNone/>
             </a:pPr>
             <a:r>
@@ -17479,6 +18331,13 @@
             <a:prstDash val="solid"/>
           </a:ln>
         </p:spPr>
+        <p:txBody>
+          <a:bodyPr/>
+          <a:lstStyle/>
+          <a:p>
+            <a:endParaRPr lang="en-US"/>
+          </a:p>
+        </p:txBody>
       </p:sp>
       <p:sp>
         <p:nvSpPr>
@@ -17504,6 +18363,13 @@
             <a:prstDash val="solid"/>
           </a:ln>
         </p:spPr>
+        <p:txBody>
+          <a:bodyPr/>
+          <a:lstStyle/>
+          <a:p>
+            <a:endParaRPr lang="en-US"/>
+          </a:p>
+        </p:txBody>
       </p:sp>
       <p:sp>
         <p:nvSpPr>
@@ -17526,7 +18392,7 @@
           <a:bodyPr wrap="square" lIns="0" tIns="0" rIns="0" bIns="0" rtlCol="0" anchor="ctr"/>
           <a:lstStyle/>
           <a:p>
-            <a:pPr indent="0" marL="0">
+            <a:pPr marL="0" indent="0">
               <a:buNone/>
             </a:pPr>
             <a:r>
@@ -17565,13 +18431,20 @@
             <a:prstDash val="solid"/>
           </a:ln>
           <a:effectLst>
-            <a:outerShdw sx="100000" sy="100000" kx="0" ky="0" algn="bl" rotWithShape="0" blurRad="101600" dist="25400" dir="8100000">
+            <a:outerShdw blurRad="101600" dist="25400" dir="8100000" algn="bl" rotWithShape="0">
               <a:srgbClr val="000000">
                 <a:alpha val="10000"/>
               </a:srgbClr>
             </a:outerShdw>
           </a:effectLst>
         </p:spPr>
+        <p:txBody>
+          <a:bodyPr/>
+          <a:lstStyle/>
+          <a:p>
+            <a:endParaRPr lang="en-US"/>
+          </a:p>
+        </p:txBody>
       </p:sp>
       <p:sp>
         <p:nvSpPr>
@@ -17597,6 +18470,13 @@
             <a:prstDash val="solid"/>
           </a:ln>
         </p:spPr>
+        <p:txBody>
+          <a:bodyPr/>
+          <a:lstStyle/>
+          <a:p>
+            <a:endParaRPr lang="en-US"/>
+          </a:p>
+        </p:txBody>
       </p:sp>
       <p:sp>
         <p:nvSpPr>
@@ -17619,7 +18499,7 @@
           <a:bodyPr wrap="square" lIns="0" tIns="0" rIns="0" bIns="0" rtlCol="0" anchor="ctr"/>
           <a:lstStyle/>
           <a:p>
-            <a:pPr indent="0" marL="0">
+            <a:pPr marL="0" indent="0">
               <a:buNone/>
             </a:pPr>
             <a:r>
@@ -17655,7 +18535,7 @@
           <a:bodyPr wrap="square" lIns="0" tIns="0" rIns="0" bIns="0" rtlCol="0" anchor="ctr"/>
           <a:lstStyle/>
           <a:p>
-            <a:pPr algn="r" indent="0" marL="0">
+            <a:pPr marL="0" indent="0" algn="r">
               <a:buNone/>
             </a:pPr>
             <a:r>
@@ -17694,6 +18574,13 @@
             <a:prstDash val="solid"/>
           </a:ln>
         </p:spPr>
+        <p:txBody>
+          <a:bodyPr/>
+          <a:lstStyle/>
+          <a:p>
+            <a:endParaRPr lang="en-US"/>
+          </a:p>
+        </p:txBody>
       </p:sp>
       <p:sp>
         <p:nvSpPr>
@@ -17719,6 +18606,13 @@
             <a:prstDash val="solid"/>
           </a:ln>
         </p:spPr>
+        <p:txBody>
+          <a:bodyPr/>
+          <a:lstStyle/>
+          <a:p>
+            <a:endParaRPr lang="en-US"/>
+          </a:p>
+        </p:txBody>
       </p:sp>
       <p:sp>
         <p:nvSpPr>
@@ -17741,7 +18635,7 @@
           <a:bodyPr wrap="square" lIns="0" tIns="0" rIns="0" bIns="0" rtlCol="0" anchor="ctr"/>
           <a:lstStyle/>
           <a:p>
-            <a:pPr indent="0" marL="0">
+            <a:pPr marL="0" indent="0">
               <a:buNone/>
             </a:pPr>
             <a:r>
@@ -17780,13 +18674,20 @@
             <a:prstDash val="solid"/>
           </a:ln>
           <a:effectLst>
-            <a:outerShdw sx="100000" sy="100000" kx="0" ky="0" algn="bl" rotWithShape="0" blurRad="101600" dist="25400" dir="8100000">
+            <a:outerShdw blurRad="101600" dist="25400" dir="8100000" algn="bl" rotWithShape="0">
               <a:srgbClr val="000000">
                 <a:alpha val="10000"/>
               </a:srgbClr>
             </a:outerShdw>
           </a:effectLst>
         </p:spPr>
+        <p:txBody>
+          <a:bodyPr/>
+          <a:lstStyle/>
+          <a:p>
+            <a:endParaRPr lang="en-US"/>
+          </a:p>
+        </p:txBody>
       </p:sp>
       <p:sp>
         <p:nvSpPr>
@@ -17812,6 +18713,13 @@
             <a:prstDash val="solid"/>
           </a:ln>
         </p:spPr>
+        <p:txBody>
+          <a:bodyPr/>
+          <a:lstStyle/>
+          <a:p>
+            <a:endParaRPr lang="en-US"/>
+          </a:p>
+        </p:txBody>
       </p:sp>
       <p:sp>
         <p:nvSpPr>
@@ -17834,7 +18742,7 @@
           <a:bodyPr wrap="square" lIns="0" tIns="0" rIns="0" bIns="0" rtlCol="0" anchor="ctr"/>
           <a:lstStyle/>
           <a:p>
-            <a:pPr indent="0" marL="0">
+            <a:pPr marL="0" indent="0">
               <a:buNone/>
             </a:pPr>
             <a:r>
@@ -17870,7 +18778,7 @@
           <a:bodyPr wrap="square" lIns="0" tIns="0" rIns="0" bIns="0" rtlCol="0" anchor="ctr"/>
           <a:lstStyle/>
           <a:p>
-            <a:pPr algn="r" indent="0" marL="0">
+            <a:pPr marL="0" indent="0" algn="r">
               <a:buNone/>
             </a:pPr>
             <a:r>
@@ -17909,6 +18817,13 @@
             <a:prstDash val="solid"/>
           </a:ln>
         </p:spPr>
+        <p:txBody>
+          <a:bodyPr/>
+          <a:lstStyle/>
+          <a:p>
+            <a:endParaRPr lang="en-US"/>
+          </a:p>
+        </p:txBody>
       </p:sp>
       <p:sp>
         <p:nvSpPr>
@@ -17934,6 +18849,13 @@
             <a:prstDash val="solid"/>
           </a:ln>
         </p:spPr>
+        <p:txBody>
+          <a:bodyPr/>
+          <a:lstStyle/>
+          <a:p>
+            <a:endParaRPr lang="en-US"/>
+          </a:p>
+        </p:txBody>
       </p:sp>
       <p:sp>
         <p:nvSpPr>
@@ -17956,7 +18878,7 @@
           <a:bodyPr wrap="square" lIns="0" tIns="0" rIns="0" bIns="0" rtlCol="0" anchor="ctr"/>
           <a:lstStyle/>
           <a:p>
-            <a:pPr indent="0" marL="0">
+            <a:pPr marL="0" indent="0">
               <a:buNone/>
             </a:pPr>
             <a:r>
@@ -17992,7 +18914,7 @@
           <a:bodyPr wrap="square" lIns="0" tIns="0" rIns="0" bIns="0" rtlCol="0" anchor="ctr"/>
           <a:lstStyle/>
           <a:p>
-            <a:pPr indent="0" marL="0">
+            <a:pPr marL="0" indent="0">
               <a:buNone/>
             </a:pPr>
             <a:r>
@@ -18023,6 +18945,7 @@
         <a:solidFill>
           <a:srgbClr val="F0FDFA"/>
         </a:solidFill>
+        <a:effectLst/>
       </p:bgPr>
     </p:bg>
     <p:spTree>
@@ -18063,6 +18986,13 @@
             <a:prstDash val="solid"/>
           </a:ln>
         </p:spPr>
+        <p:txBody>
+          <a:bodyPr/>
+          <a:lstStyle/>
+          <a:p>
+            <a:endParaRPr lang="en-US"/>
+          </a:p>
+        </p:txBody>
       </p:sp>
       <p:sp>
         <p:nvSpPr>
@@ -18085,7 +19015,7 @@
           <a:bodyPr wrap="square" lIns="0" tIns="0" rIns="0" bIns="0" rtlCol="0" anchor="ctr"/>
           <a:lstStyle/>
           <a:p>
-            <a:pPr indent="0" marL="0">
+            <a:pPr marL="0" indent="0">
               <a:buNone/>
             </a:pPr>
             <a:r>
@@ -18124,6 +19054,13 @@
             <a:prstDash val="solid"/>
           </a:ln>
         </p:spPr>
+        <p:txBody>
+          <a:bodyPr/>
+          <a:lstStyle/>
+          <a:p>
+            <a:endParaRPr lang="en-US"/>
+          </a:p>
+        </p:txBody>
       </p:sp>
       <p:sp>
         <p:nvSpPr>
@@ -18146,7 +19083,7 @@
           <a:bodyPr wrap="square" lIns="0" tIns="0" rIns="0" bIns="0" rtlCol="0" anchor="ctr"/>
           <a:lstStyle/>
           <a:p>
-            <a:pPr algn="ctr" indent="0" marL="0">
+            <a:pPr marL="0" indent="0" algn="ctr">
               <a:buNone/>
             </a:pPr>
             <a:r>
@@ -18182,7 +19119,7 @@
           <a:bodyPr wrap="square" lIns="0" tIns="0" rIns="0" bIns="0" rtlCol="0" anchor="ctr"/>
           <a:lstStyle/>
           <a:p>
-            <a:pPr algn="ctr" indent="0" marL="0">
+            <a:pPr marL="0" indent="0" algn="ctr">
               <a:buNone/>
             </a:pPr>
             <a:r>
@@ -18218,7 +19155,7 @@
           <a:bodyPr wrap="square" lIns="0" tIns="0" rIns="0" bIns="0" rtlCol="0" anchor="ctr"/>
           <a:lstStyle/>
           <a:p>
-            <a:pPr algn="ctr" indent="0" marL="0">
+            <a:pPr marL="0" indent="0" algn="ctr">
               <a:buNone/>
             </a:pPr>
             <a:r>
@@ -18254,7 +19191,7 @@
           <a:bodyPr wrap="square" lIns="0" tIns="0" rIns="0" bIns="0" rtlCol="0" anchor="ctr"/>
           <a:lstStyle/>
           <a:p>
-            <a:pPr indent="0" marL="0">
+            <a:pPr marL="0" indent="0">
               <a:buNone/>
             </a:pPr>
             <a:r>
@@ -18293,6 +19230,13 @@
             <a:prstDash val="solid"/>
           </a:ln>
         </p:spPr>
+        <p:txBody>
+          <a:bodyPr/>
+          <a:lstStyle/>
+          <a:p>
+            <a:endParaRPr lang="en-US"/>
+          </a:p>
+        </p:txBody>
       </p:sp>
       <p:sp>
         <p:nvSpPr>
@@ -18318,6 +19262,13 @@
             <a:prstDash val="solid"/>
           </a:ln>
         </p:spPr>
+        <p:txBody>
+          <a:bodyPr/>
+          <a:lstStyle/>
+          <a:p>
+            <a:endParaRPr lang="en-US"/>
+          </a:p>
+        </p:txBody>
       </p:sp>
       <p:sp>
         <p:nvSpPr>
@@ -18340,7 +19291,7 @@
           <a:bodyPr wrap="square" lIns="0" tIns="0" rIns="0" bIns="0" rtlCol="0" anchor="ctr"/>
           <a:lstStyle/>
           <a:p>
-            <a:pPr indent="0" marL="0">
+            <a:pPr marL="0" indent="0">
               <a:buNone/>
             </a:pPr>
             <a:r>
@@ -18376,7 +19327,7 @@
           <a:bodyPr wrap="square" lIns="0" tIns="0" rIns="0" bIns="0" rtlCol="0" anchor="ctr"/>
           <a:lstStyle/>
           <a:p>
-            <a:pPr algn="r" indent="0" marL="0">
+            <a:pPr marL="0" indent="0" algn="r">
               <a:buNone/>
             </a:pPr>
             <a:r>
@@ -18412,7 +19363,7 @@
           <a:bodyPr wrap="square" lIns="0" tIns="0" rIns="0" bIns="0" rtlCol="0" anchor="ctr"/>
           <a:lstStyle/>
           <a:p>
-            <a:pPr indent="0" marL="0">
+            <a:pPr marL="0" indent="0">
               <a:buNone/>
             </a:pPr>
             <a:r>
@@ -18451,6 +19402,13 @@
             <a:prstDash val="solid"/>
           </a:ln>
         </p:spPr>
+        <p:txBody>
+          <a:bodyPr/>
+          <a:lstStyle/>
+          <a:p>
+            <a:endParaRPr lang="en-US"/>
+          </a:p>
+        </p:txBody>
       </p:sp>
       <p:sp>
         <p:nvSpPr>
@@ -18476,6 +19434,13 @@
             <a:prstDash val="solid"/>
           </a:ln>
         </p:spPr>
+        <p:txBody>
+          <a:bodyPr/>
+          <a:lstStyle/>
+          <a:p>
+            <a:endParaRPr lang="en-US"/>
+          </a:p>
+        </p:txBody>
       </p:sp>
       <p:sp>
         <p:nvSpPr>
@@ -18498,7 +19463,7 @@
           <a:bodyPr wrap="square" lIns="0" tIns="0" rIns="0" bIns="0" rtlCol="0" anchor="ctr"/>
           <a:lstStyle/>
           <a:p>
-            <a:pPr indent="0" marL="0">
+            <a:pPr marL="0" indent="0">
               <a:buNone/>
             </a:pPr>
             <a:r>
@@ -18534,7 +19499,7 @@
           <a:bodyPr wrap="square" lIns="0" tIns="0" rIns="0" bIns="0" rtlCol="0" anchor="ctr"/>
           <a:lstStyle/>
           <a:p>
-            <a:pPr algn="r" indent="0" marL="0">
+            <a:pPr marL="0" indent="0" algn="r">
               <a:buNone/>
             </a:pPr>
             <a:r>
@@ -18570,7 +19535,7 @@
           <a:bodyPr wrap="square" lIns="0" tIns="0" rIns="0" bIns="0" rtlCol="0" anchor="ctr"/>
           <a:lstStyle/>
           <a:p>
-            <a:pPr indent="0" marL="0">
+            <a:pPr marL="0" indent="0">
               <a:buNone/>
             </a:pPr>
             <a:r>
@@ -18609,6 +19574,13 @@
             <a:prstDash val="solid"/>
           </a:ln>
         </p:spPr>
+        <p:txBody>
+          <a:bodyPr/>
+          <a:lstStyle/>
+          <a:p>
+            <a:endParaRPr lang="en-US"/>
+          </a:p>
+        </p:txBody>
       </p:sp>
       <p:sp>
         <p:nvSpPr>
@@ -18634,6 +19606,13 @@
             <a:prstDash val="solid"/>
           </a:ln>
         </p:spPr>
+        <p:txBody>
+          <a:bodyPr/>
+          <a:lstStyle/>
+          <a:p>
+            <a:endParaRPr lang="en-US"/>
+          </a:p>
+        </p:txBody>
       </p:sp>
       <p:sp>
         <p:nvSpPr>
@@ -18656,7 +19635,7 @@
           <a:bodyPr wrap="square" lIns="0" tIns="0" rIns="0" bIns="0" rtlCol="0" anchor="ctr"/>
           <a:lstStyle/>
           <a:p>
-            <a:pPr indent="0" marL="0">
+            <a:pPr marL="0" indent="0">
               <a:buNone/>
             </a:pPr>
             <a:r>
@@ -18692,7 +19671,7 @@
           <a:bodyPr wrap="square" lIns="0" tIns="0" rIns="0" bIns="0" rtlCol="0" anchor="ctr"/>
           <a:lstStyle/>
           <a:p>
-            <a:pPr algn="r" indent="0" marL="0">
+            <a:pPr marL="0" indent="0" algn="r">
               <a:buNone/>
             </a:pPr>
             <a:r>
@@ -18728,7 +19707,7 @@
           <a:bodyPr wrap="square" lIns="0" tIns="0" rIns="0" bIns="0" rtlCol="0" anchor="ctr"/>
           <a:lstStyle/>
           <a:p>
-            <a:pPr indent="0" marL="0">
+            <a:pPr marL="0" indent="0">
               <a:buNone/>
             </a:pPr>
             <a:r>
@@ -18767,6 +19746,13 @@
             <a:prstDash val="solid"/>
           </a:ln>
         </p:spPr>
+        <p:txBody>
+          <a:bodyPr/>
+          <a:lstStyle/>
+          <a:p>
+            <a:endParaRPr lang="en-US"/>
+          </a:p>
+        </p:txBody>
       </p:sp>
       <p:sp>
         <p:nvSpPr>
@@ -18792,6 +19778,13 @@
             <a:prstDash val="solid"/>
           </a:ln>
         </p:spPr>
+        <p:txBody>
+          <a:bodyPr/>
+          <a:lstStyle/>
+          <a:p>
+            <a:endParaRPr lang="en-US"/>
+          </a:p>
+        </p:txBody>
       </p:sp>
       <p:sp>
         <p:nvSpPr>
@@ -18814,7 +19807,7 @@
           <a:bodyPr wrap="square" lIns="0" tIns="0" rIns="0" bIns="0" rtlCol="0" anchor="ctr"/>
           <a:lstStyle/>
           <a:p>
-            <a:pPr indent="0" marL="0">
+            <a:pPr marL="0" indent="0">
               <a:buNone/>
             </a:pPr>
             <a:r>
@@ -18850,7 +19843,7 @@
           <a:bodyPr wrap="square" lIns="0" tIns="0" rIns="0" bIns="0" rtlCol="0" anchor="ctr"/>
           <a:lstStyle/>
           <a:p>
-            <a:pPr algn="r" indent="0" marL="0">
+            <a:pPr marL="0" indent="0" algn="r">
               <a:buNone/>
             </a:pPr>
             <a:r>
@@ -18886,7 +19879,7 @@
           <a:bodyPr wrap="square" lIns="0" tIns="0" rIns="0" bIns="0" rtlCol="0" anchor="ctr"/>
           <a:lstStyle/>
           <a:p>
-            <a:pPr indent="0" marL="0">
+            <a:pPr marL="0" indent="0">
               <a:buNone/>
             </a:pPr>
             <a:r>
@@ -18925,6 +19918,13 @@
             <a:prstDash val="solid"/>
           </a:ln>
         </p:spPr>
+        <p:txBody>
+          <a:bodyPr/>
+          <a:lstStyle/>
+          <a:p>
+            <a:endParaRPr lang="en-US"/>
+          </a:p>
+        </p:txBody>
       </p:sp>
       <p:sp>
         <p:nvSpPr>
@@ -18950,6 +19950,13 @@
             <a:prstDash val="solid"/>
           </a:ln>
         </p:spPr>
+        <p:txBody>
+          <a:bodyPr/>
+          <a:lstStyle/>
+          <a:p>
+            <a:endParaRPr lang="en-US"/>
+          </a:p>
+        </p:txBody>
       </p:sp>
       <p:sp>
         <p:nvSpPr>
@@ -18972,7 +19979,7 @@
           <a:bodyPr wrap="square" lIns="0" tIns="0" rIns="0" bIns="0" rtlCol="0" anchor="ctr"/>
           <a:lstStyle/>
           <a:p>
-            <a:pPr indent="0" marL="0">
+            <a:pPr marL="0" indent="0">
               <a:buNone/>
             </a:pPr>
             <a:r>
@@ -19008,7 +20015,7 @@
           <a:bodyPr wrap="square" lIns="0" tIns="0" rIns="0" bIns="0" rtlCol="0" anchor="ctr"/>
           <a:lstStyle/>
           <a:p>
-            <a:pPr algn="r" indent="0" marL="0">
+            <a:pPr marL="0" indent="0" algn="r">
               <a:buNone/>
             </a:pPr>
             <a:r>
@@ -19044,7 +20051,7 @@
           <a:bodyPr wrap="square" lIns="0" tIns="0" rIns="0" bIns="0" rtlCol="0" anchor="ctr"/>
           <a:lstStyle/>
           <a:p>
-            <a:pPr indent="0" marL="0">
+            <a:pPr marL="0" indent="0">
               <a:buNone/>
             </a:pPr>
             <a:r>
@@ -19083,6 +20090,13 @@
             <a:prstDash val="solid"/>
           </a:ln>
         </p:spPr>
+        <p:txBody>
+          <a:bodyPr/>
+          <a:lstStyle/>
+          <a:p>
+            <a:endParaRPr lang="en-US"/>
+          </a:p>
+        </p:txBody>
       </p:sp>
       <p:sp>
         <p:nvSpPr>
@@ -19108,6 +20122,13 @@
             <a:prstDash val="solid"/>
           </a:ln>
         </p:spPr>
+        <p:txBody>
+          <a:bodyPr/>
+          <a:lstStyle/>
+          <a:p>
+            <a:endParaRPr lang="en-US"/>
+          </a:p>
+        </p:txBody>
       </p:sp>
       <p:sp>
         <p:nvSpPr>
@@ -19130,7 +20151,7 @@
           <a:bodyPr wrap="square" lIns="0" tIns="0" rIns="0" bIns="0" rtlCol="0" anchor="ctr"/>
           <a:lstStyle/>
           <a:p>
-            <a:pPr indent="0" marL="0">
+            <a:pPr marL="0" indent="0">
               <a:buNone/>
             </a:pPr>
             <a:r>
@@ -19166,7 +20187,7 @@
           <a:bodyPr wrap="square" lIns="0" tIns="0" rIns="0" bIns="0" rtlCol="0" anchor="ctr"/>
           <a:lstStyle/>
           <a:p>
-            <a:pPr algn="r" indent="0" marL="0">
+            <a:pPr marL="0" indent="0" algn="r">
               <a:buNone/>
             </a:pPr>
             <a:r>
@@ -19202,7 +20223,7 @@
           <a:bodyPr wrap="square" lIns="0" tIns="0" rIns="0" bIns="0" rtlCol="0" anchor="ctr"/>
           <a:lstStyle/>
           <a:p>
-            <a:pPr indent="0" marL="0">
+            <a:pPr marL="0" indent="0">
               <a:buNone/>
             </a:pPr>
             <a:r>
@@ -19238,7 +20259,7 @@
           <a:bodyPr wrap="square" lIns="0" tIns="0" rIns="0" bIns="0" rtlCol="0" anchor="ctr"/>
           <a:lstStyle/>
           <a:p>
-            <a:pPr indent="0" marL="0">
+            <a:pPr marL="0" indent="0">
               <a:buNone/>
             </a:pPr>
             <a:r>
@@ -19554,4 +20575,319 @@
     </a:ext>
   </a:extLst>
 </a:theme>
+</file>
+
+<file path=ppt/theme/theme2.xml><?xml version="1.0" encoding="utf-8"?>
+<a:theme xmlns:a="http://schemas.openxmlformats.org/drawingml/2006/main" name="Office Theme">
+  <a:themeElements>
+    <a:clrScheme name="Office">
+      <a:dk1>
+        <a:sysClr val="windowText" lastClr="000000"/>
+      </a:dk1>
+      <a:lt1>
+        <a:sysClr val="window" lastClr="FFFFFF"/>
+      </a:lt1>
+      <a:dk2>
+        <a:srgbClr val="0E2841"/>
+      </a:dk2>
+      <a:lt2>
+        <a:srgbClr val="E8E8E8"/>
+      </a:lt2>
+      <a:accent1>
+        <a:srgbClr val="156082"/>
+      </a:accent1>
+      <a:accent2>
+        <a:srgbClr val="E97132"/>
+      </a:accent2>
+      <a:accent3>
+        <a:srgbClr val="196B24"/>
+      </a:accent3>
+      <a:accent4>
+        <a:srgbClr val="0F9ED5"/>
+      </a:accent4>
+      <a:accent5>
+        <a:srgbClr val="A02B93"/>
+      </a:accent5>
+      <a:accent6>
+        <a:srgbClr val="4EA72E"/>
+      </a:accent6>
+      <a:hlink>
+        <a:srgbClr val="467886"/>
+      </a:hlink>
+      <a:folHlink>
+        <a:srgbClr val="96607D"/>
+      </a:folHlink>
+    </a:clrScheme>
+    <a:fontScheme name="Office">
+      <a:majorFont>
+        <a:latin typeface="Aptos Display" panose="02110004020202020204"/>
+        <a:ea typeface=""/>
+        <a:cs typeface=""/>
+        <a:font script="Jpan" typeface="游ゴシック Light"/>
+        <a:font script="Hang" typeface="맑은 고딕"/>
+        <a:font script="Hans" typeface="等线 Light"/>
+        <a:font script="Hant" typeface="新細明體"/>
+        <a:font script="Arab" typeface="Times New Roman"/>
+        <a:font script="Hebr" typeface="Times New Roman"/>
+        <a:font script="Thai" typeface="Angsana New"/>
+        <a:font script="Ethi" typeface="Nyala"/>
+        <a:font script="Beng" typeface="Vrinda"/>
+        <a:font script="Gujr" typeface="Shruti"/>
+        <a:font script="Khmr" typeface="MoolBoran"/>
+        <a:font script="Knda" typeface="Tunga"/>
+        <a:font script="Guru" typeface="Raavi"/>
+        <a:font script="Cans" typeface="Euphemia"/>
+        <a:font script="Cher" typeface="Plantagenet Cherokee"/>
+        <a:font script="Yiii" typeface="Microsoft Yi Baiti"/>
+        <a:font script="Tibt" typeface="Microsoft Himalaya"/>
+        <a:font script="Thaa" typeface="MV Boli"/>
+        <a:font script="Deva" typeface="Mangal"/>
+        <a:font script="Telu" typeface="Gautami"/>
+        <a:font script="Taml" typeface="Latha"/>
+        <a:font script="Syrc" typeface="Estrangelo Edessa"/>
+        <a:font script="Orya" typeface="Kalinga"/>
+        <a:font script="Mlym" typeface="Kartika"/>
+        <a:font script="Laoo" typeface="DokChampa"/>
+        <a:font script="Sinh" typeface="Iskoola Pota"/>
+        <a:font script="Mong" typeface="Mongolian Baiti"/>
+        <a:font script="Viet" typeface="Times New Roman"/>
+        <a:font script="Uigh" typeface="Microsoft Uighur"/>
+        <a:font script="Geor" typeface="Sylfaen"/>
+        <a:font script="Armn" typeface="Arial"/>
+        <a:font script="Bugi" typeface="Leelawadee UI"/>
+        <a:font script="Bopo" typeface="Microsoft JhengHei"/>
+        <a:font script="Java" typeface="Javanese Text"/>
+        <a:font script="Lisu" typeface="Segoe UI"/>
+        <a:font script="Mymr" typeface="Myanmar Text"/>
+        <a:font script="Nkoo" typeface="Ebrima"/>
+        <a:font script="Olck" typeface="Nirmala UI"/>
+        <a:font script="Osma" typeface="Ebrima"/>
+        <a:font script="Phag" typeface="Phagspa"/>
+        <a:font script="Syrn" typeface="Estrangelo Edessa"/>
+        <a:font script="Syrj" typeface="Estrangelo Edessa"/>
+        <a:font script="Syre" typeface="Estrangelo Edessa"/>
+        <a:font script="Sora" typeface="Nirmala UI"/>
+        <a:font script="Tale" typeface="Microsoft Tai Le"/>
+        <a:font script="Talu" typeface="Microsoft New Tai Lue"/>
+        <a:font script="Tfng" typeface="Ebrima"/>
+      </a:majorFont>
+      <a:minorFont>
+        <a:latin typeface="Aptos" panose="02110004020202020204"/>
+        <a:ea typeface=""/>
+        <a:cs typeface=""/>
+        <a:font script="Jpan" typeface="游ゴシック"/>
+        <a:font script="Hang" typeface="맑은 고딕"/>
+        <a:font script="Hans" typeface="等线"/>
+        <a:font script="Hant" typeface="新細明體"/>
+        <a:font script="Arab" typeface="Arial"/>
+        <a:font script="Hebr" typeface="Arial"/>
+        <a:font script="Thai" typeface="Cordia New"/>
+        <a:font script="Ethi" typeface="Nyala"/>
+        <a:font script="Beng" typeface="Vrinda"/>
+        <a:font script="Gujr" typeface="Shruti"/>
+        <a:font script="Khmr" typeface="DaunPenh"/>
+        <a:font script="Knda" typeface="Tunga"/>
+        <a:font script="Guru" typeface="Raavi"/>
+        <a:font script="Cans" typeface="Euphemia"/>
+        <a:font script="Cher" typeface="Plantagenet Cherokee"/>
+        <a:font script="Yiii" typeface="Microsoft Yi Baiti"/>
+        <a:font script="Tibt" typeface="Microsoft Himalaya"/>
+        <a:font script="Thaa" typeface="MV Boli"/>
+        <a:font script="Deva" typeface="Mangal"/>
+        <a:font script="Telu" typeface="Gautami"/>
+        <a:font script="Taml" typeface="Latha"/>
+        <a:font script="Syrc" typeface="Estrangelo Edessa"/>
+        <a:font script="Orya" typeface="Kalinga"/>
+        <a:font script="Mlym" typeface="Kartika"/>
+        <a:font script="Laoo" typeface="DokChampa"/>
+        <a:font script="Sinh" typeface="Iskoola Pota"/>
+        <a:font script="Mong" typeface="Mongolian Baiti"/>
+        <a:font script="Viet" typeface="Arial"/>
+        <a:font script="Uigh" typeface="Microsoft Uighur"/>
+        <a:font script="Geor" typeface="Sylfaen"/>
+        <a:font script="Armn" typeface="Arial"/>
+        <a:font script="Bugi" typeface="Leelawadee UI"/>
+        <a:font script="Bopo" typeface="Microsoft JhengHei"/>
+        <a:font script="Java" typeface="Javanese Text"/>
+        <a:font script="Lisu" typeface="Segoe UI"/>
+        <a:font script="Mymr" typeface="Myanmar Text"/>
+        <a:font script="Nkoo" typeface="Ebrima"/>
+        <a:font script="Olck" typeface="Nirmala UI"/>
+        <a:font script="Osma" typeface="Ebrima"/>
+        <a:font script="Phag" typeface="Phagspa"/>
+        <a:font script="Syrn" typeface="Estrangelo Edessa"/>
+        <a:font script="Syrj" typeface="Estrangelo Edessa"/>
+        <a:font script="Syre" typeface="Estrangelo Edessa"/>
+        <a:font script="Sora" typeface="Nirmala UI"/>
+        <a:font script="Tale" typeface="Microsoft Tai Le"/>
+        <a:font script="Talu" typeface="Microsoft New Tai Lue"/>
+        <a:font script="Tfng" typeface="Ebrima"/>
+      </a:minorFont>
+    </a:fontScheme>
+    <a:fmtScheme name="Office">
+      <a:fillStyleLst>
+        <a:solidFill>
+          <a:schemeClr val="phClr"/>
+        </a:solidFill>
+        <a:gradFill rotWithShape="1">
+          <a:gsLst>
+            <a:gs pos="0">
+              <a:schemeClr val="phClr">
+                <a:lumMod val="110000"/>
+                <a:satMod val="105000"/>
+                <a:tint val="67000"/>
+              </a:schemeClr>
+            </a:gs>
+            <a:gs pos="50000">
+              <a:schemeClr val="phClr">
+                <a:lumMod val="105000"/>
+                <a:satMod val="103000"/>
+                <a:tint val="73000"/>
+              </a:schemeClr>
+            </a:gs>
+            <a:gs pos="100000">
+              <a:schemeClr val="phClr">
+                <a:lumMod val="105000"/>
+                <a:satMod val="109000"/>
+                <a:tint val="81000"/>
+              </a:schemeClr>
+            </a:gs>
+          </a:gsLst>
+          <a:lin ang="5400000" scaled="0"/>
+        </a:gradFill>
+        <a:gradFill rotWithShape="1">
+          <a:gsLst>
+            <a:gs pos="0">
+              <a:schemeClr val="phClr">
+                <a:satMod val="103000"/>
+                <a:lumMod val="102000"/>
+                <a:tint val="94000"/>
+              </a:schemeClr>
+            </a:gs>
+            <a:gs pos="50000">
+              <a:schemeClr val="phClr">
+                <a:satMod val="110000"/>
+                <a:lumMod val="100000"/>
+                <a:shade val="100000"/>
+              </a:schemeClr>
+            </a:gs>
+            <a:gs pos="100000">
+              <a:schemeClr val="phClr">
+                <a:lumMod val="99000"/>
+                <a:satMod val="120000"/>
+                <a:shade val="78000"/>
+              </a:schemeClr>
+            </a:gs>
+          </a:gsLst>
+          <a:lin ang="5400000" scaled="0"/>
+        </a:gradFill>
+      </a:fillStyleLst>
+      <a:lnStyleLst>
+        <a:ln w="12700" cap="flat" cmpd="sng" algn="ctr">
+          <a:solidFill>
+            <a:schemeClr val="phClr"/>
+          </a:solidFill>
+          <a:prstDash val="solid"/>
+          <a:miter lim="800000"/>
+        </a:ln>
+        <a:ln w="19050" cap="flat" cmpd="sng" algn="ctr">
+          <a:solidFill>
+            <a:schemeClr val="phClr"/>
+          </a:solidFill>
+          <a:prstDash val="solid"/>
+          <a:miter lim="800000"/>
+        </a:ln>
+        <a:ln w="25400" cap="flat" cmpd="sng" algn="ctr">
+          <a:solidFill>
+            <a:schemeClr val="phClr"/>
+          </a:solidFill>
+          <a:prstDash val="solid"/>
+          <a:miter lim="800000"/>
+        </a:ln>
+      </a:lnStyleLst>
+      <a:effectStyleLst>
+        <a:effectStyle>
+          <a:effectLst/>
+        </a:effectStyle>
+        <a:effectStyle>
+          <a:effectLst/>
+        </a:effectStyle>
+        <a:effectStyle>
+          <a:effectLst>
+            <a:outerShdw blurRad="57150" dist="19050" dir="5400000" algn="ctr" rotWithShape="0">
+              <a:srgbClr val="000000">
+                <a:alpha val="63000"/>
+              </a:srgbClr>
+            </a:outerShdw>
+          </a:effectLst>
+        </a:effectStyle>
+      </a:effectStyleLst>
+      <a:bgFillStyleLst>
+        <a:solidFill>
+          <a:schemeClr val="phClr"/>
+        </a:solidFill>
+        <a:solidFill>
+          <a:schemeClr val="phClr">
+            <a:tint val="95000"/>
+            <a:satMod val="170000"/>
+          </a:schemeClr>
+        </a:solidFill>
+        <a:gradFill rotWithShape="1">
+          <a:gsLst>
+            <a:gs pos="0">
+              <a:schemeClr val="phClr">
+                <a:tint val="93000"/>
+                <a:satMod val="150000"/>
+                <a:shade val="98000"/>
+                <a:lumMod val="102000"/>
+              </a:schemeClr>
+            </a:gs>
+            <a:gs pos="50000">
+              <a:schemeClr val="phClr">
+                <a:tint val="98000"/>
+                <a:satMod val="130000"/>
+                <a:shade val="90000"/>
+                <a:lumMod val="103000"/>
+              </a:schemeClr>
+            </a:gs>
+            <a:gs pos="100000">
+              <a:schemeClr val="phClr">
+                <a:shade val="63000"/>
+                <a:satMod val="120000"/>
+              </a:schemeClr>
+            </a:gs>
+          </a:gsLst>
+          <a:lin ang="5400000" scaled="0"/>
+        </a:gradFill>
+      </a:bgFillStyleLst>
+    </a:fmtScheme>
+  </a:themeElements>
+  <a:objectDefaults>
+    <a:lnDef>
+      <a:spPr/>
+      <a:bodyPr/>
+      <a:lstStyle/>
+      <a:style>
+        <a:lnRef idx="2">
+          <a:schemeClr val="accent1"/>
+        </a:lnRef>
+        <a:fillRef idx="0">
+          <a:schemeClr val="accent1"/>
+        </a:fillRef>
+        <a:effectRef idx="1">
+          <a:schemeClr val="accent1"/>
+        </a:effectRef>
+        <a:fontRef idx="minor">
+          <a:schemeClr val="tx1"/>
+        </a:fontRef>
+      </a:style>
+    </a:lnDef>
+  </a:objectDefaults>
+  <a:extraClrSchemeLst/>
+  <a:extLst>
+    <a:ext uri="{05A4C25C-085E-4340-85A3-A5531E510DB2}">
+      <thm15:themeFamily xmlns:thm15="http://schemas.microsoft.com/office/thememl/2012/main" name="Office Theme" id="{2E142A2C-CD16-42D6-873A-C26D2A0506FA}" vid="{1BDDFF52-6CD6-40A5-AB3C-68EB2F1E4D0A}"/>
+    </a:ext>
+  </a:extLst>
+</a:theme>
 </file>